--- a/deliverables/presentation/klinicheskiy-kompas-demo-day.pptx
+++ b/deliverables/presentation/klinicheskiy-kompas-demo-day.pptx
@@ -124,19 +124,19 @@
   <p:extLst>
     <p:ext uri="{521415D9-36F7-43E2-AB2F-B90AF26B5E84}">
       <p14:sectionLst xmlns:p14="http://schemas.microsoft.com/office/powerpoint/2010/main">
-        <p14:section name="Титул" id="{376689a8-2194-4041-2ee0-1c59304040d0}">
+        <p14:section name="Титул" id="{d252efde-812e-78fb-fc6e-760142f15f59}">
           <p14:sldIdLst>
             <p14:sldId id="256"/>
           </p14:sldIdLst>
         </p14:section>
-        <p14:section name="1. Идея" id="{00a47929-9ade-08bd-89e3-c277b837d33d}">
+        <p14:section name="1. Идея" id="{df8e3af0-b312-1b96-704e-7d02fc105155}">
           <p14:sldIdLst>
             <p14:sldId id="257"/>
             <p14:sldId id="258"/>
             <p14:sldId id="259"/>
           </p14:sldIdLst>
         </p14:section>
-        <p14:section name="2. Прототип" id="{fc6b09f8-6b42-097f-f347-07ae294377e0}">
+        <p14:section name="2. Прототип" id="{e320e50a-fb27-3073-1cbb-f6e2ee439850}">
           <p14:sldIdLst>
             <p14:sldId id="260"/>
             <p14:sldId id="261"/>
@@ -144,33 +144,33 @@
             <p14:sldId id="263"/>
           </p14:sldIdLst>
         </p14:section>
-        <p14:section name="3. Испытания" id="{2d4b855e-64d8-db61-889f-f5e8f2442f5f}">
+        <p14:section name="3. Испытания" id="{db131931-598b-e9ab-d1d0-bee5500ea5c7}">
           <p14:sldIdLst>
             <p14:sldId id="264"/>
             <p14:sldId id="265"/>
           </p14:sldIdLst>
         </p14:section>
-        <p14:section name="4. Планы" id="{8f5b8f66-dabb-cc00-569d-97b31e7c0bbb}">
+        <p14:section name="4. Планы" id="{065615ea-f3c0-8148-583c-c35d148b1e2e}">
           <p14:sldIdLst>
             <p14:sldId id="266"/>
             <p14:sldId id="267"/>
             <p14:sldId id="268"/>
           </p14:sldIdLst>
         </p14:section>
-        <p14:section name="5. Команда" id="{53487902-b478-bfbc-2892-9bcac43324a4}">
+        <p14:section name="5. Команда" id="{d2d1ef3b-4ab9-04d4-4539-83eb6c1a36d4}">
           <p14:sldIdLst>
             <p14:sldId id="269"/>
             <p14:sldId id="270"/>
           </p14:sldIdLst>
         </p14:section>
-        <p14:section name="Финал" id="{28245ed2-fb02-ed40-2298-ef97fbbdfb6c}">
+        <p14:section name="Приложение" id="{701eea9f-1a22-3998-d001-a60d4f7d2a74}">
           <p14:sldIdLst>
             <p14:sldId id="271"/>
+            <p14:sldId id="272"/>
           </p14:sldIdLst>
         </p14:section>
-        <p14:section name="Приложение" id="{bb3d92d0-48b2-0f9a-a055-766c69a76a31}">
+        <p14:section name="Финал" id="{f9855243-00e3-30fd-1d82-b876276b3b0b}">
           <p14:sldIdLst>
-            <p14:sldId id="272"/>
             <p14:sldId id="273"/>
           </p14:sldIdLst>
         </p14:section>
@@ -1277,7 +1277,7 @@
           <a:p>
             <a:r>
               <a:rPr lang="en-US" dirty="0"/>
-              <a:t>Добрый день. Психиатр видит пациента раз в несколько недель, а всё важное происходит между приёмами. «Клинический компас» показывает врачу эту часть жизни пациента: самочувствие, анкеты, приём препаратов. При этом решение всегда остаётся за врачом. Я Азамат Сибгатуллин, капитан и разработчик команды.</a:t>
+              <a:t>Добрый день. Психиатр видит пациента раз в несколько недель, а всё важное происходит между приёмами. «Клинический компас» показывает врачу эту часть жизни пациента: самочувствие, анкеты, приём препаратов. При этом решение всегда остаётся за врачом. Мы команда «Шаг вперёд» из Казанского медицинского университета: четыре медика и разработчик.</a:t>
             </a:r>
             <a:endParaRPr lang="en-US" dirty="0"/>
           </a:p>
@@ -1717,7 +1717,7 @@
           <a:p>
             <a:r>
               <a:rPr lang="en-US" dirty="0"/>
-              <a:t>Наша команда — пять человек. Я отвечаю за разработку: спроектировал и написал сервер, базу и оба кабинета. (Представить остальных участников и их роли.)</a:t>
+              <a:t>Нас пятеро, все из Казанского медицинского университета, педиатрический факультет. Капитан — Ильназ Идиятуллин. Марк Галицкий, Мурадисин Мурадисинов и Ильназ Гайнатуллин вместе с капитаном представляют медицинский профиль команды. Азамат Сибгатуллин написал сервис: сервер, базу данных, оба кабинета и автотесты.</a:t>
             </a:r>
             <a:endParaRPr lang="en-US" dirty="0"/>
           </a:p>
@@ -1893,7 +1893,7 @@
           <a:p>
             <a:r>
               <a:rPr lang="en-US" dirty="0"/>
-              <a:t>Клинический компас: врач за минуту видит, что изменилось у пациента между приёмами, а решение всегда остаётся за врачом. Спасибо, готовы ответить на вопросы.</a:t>
+              <a:t>Слайд для вопросов жюри о методике измерений.</a:t>
             </a:r>
             <a:endParaRPr lang="en-US" dirty="0"/>
           </a:p>
@@ -1981,7 +1981,7 @@
           <a:p>
             <a:r>
               <a:rPr lang="en-US" dirty="0"/>
-              <a:t>Слайд для вопросов жюри о методике измерений.</a:t>
+              <a:t>Слайд для вопросов жюри об источниках.</a:t>
             </a:r>
             <a:endParaRPr lang="en-US" dirty="0"/>
           </a:p>
@@ -2069,7 +2069,7 @@
           <a:p>
             <a:r>
               <a:rPr lang="en-US" dirty="0"/>
-              <a:t>Слайд для вопросов жюри об источниках.</a:t>
+              <a:t>Клинический компас: врач за минуту видит, что изменилось у пациента между приёмами, а решение всегда остаётся за врачом. Спасибо, готовы ответить на вопросы.</a:t>
             </a:r>
             <a:endParaRPr lang="en-US" dirty="0"/>
           </a:p>
@@ -2421,7 +2421,7 @@
           <a:p>
             <a:r>
               <a:rPr lang="en-US" dirty="0"/>
-              <a:t>Это работающий кабинет врача, не макет. Слева список пациентов: сверху те, у кого есть что проверить, и рядом конкретная причина, например пропуск в плане или записанное нежелательное явление. В центре сводка к приёму за выбранный период. Справа план и календарь приёма препаратов, где видно, в какой день пациент пропустил таблетку.</a:t>
+              <a:t>Это работающий кабинет врача, не макет. Сверху списка те, у кого есть что проверить, и рядом конкретная причина: пропуск в плане или записанное нежелательное явление. Справа последние отметки самочувствия. Один щелчок, и врач в нужной записи.</a:t>
             </a:r>
             <a:endParaRPr lang="en-US" dirty="0"/>
           </a:p>
@@ -2509,7 +2509,7 @@
           <a:p>
             <a:r>
               <a:rPr lang="en-US" dirty="0"/>
-              <a:t>Пациент чаще всего работает с телефона. Поэтому главное действие видно сразу: отметить самочувствие или заполнить анкету, которую предложил врач. После отправки пациент видит, что запись сохранена на сервере. Баллы анкет пациенту не показываем: это материал для врача, а не самодиагностика.</a:t>
+              <a:t>Перед приёмом врач открывает сводку за выбранный период: все записи пациента, кто и когда их сделал, и что осталось неизвестным. Рядом план лечения и календарь препаратов, где видно, в какой день пациент пропустил таблетку.</a:t>
             </a:r>
             <a:endParaRPr lang="en-US" dirty="0"/>
           </a:p>
@@ -2597,7 +2597,7 @@
           <a:p>
             <a:r>
               <a:rPr lang="en-US" dirty="0"/>
-              <a:t>Анкеты врач предлагает сам. В карточке три шкалы DASS-42 и отдельно PHQ-9 и GAD-7: последнее значение, график и изменение. Мы используем точные русские версии и ничего в них не меняем. Если анкета заполнена не полностью, точка на графике не появляется: пропуск не превращается в ноль.</a:t>
+              <a:t>Пациент чаще всего работает с телефона. Поэтому главное действие видно сразу: отметить самочувствие или заполнить анкету, которую предложил врач. После отправки пациент видит, что запись сохранена на сервере. Баллы анкет пациенту не показываем: это материал для врача, а не самодиагностика.</a:t>
             </a:r>
             <a:endParaRPr lang="en-US" dirty="0"/>
           </a:p>
@@ -2685,7 +2685,7 @@
           <a:p>
             <a:r>
               <a:rPr lang="en-US" dirty="0"/>
-              <a:t>Безопасность заложена в устройство сервиса. Пять видов клинических действий без подтверждения врача не срабатывают, причём проверка идёт на сервере, а не только в интерфейсе. Врач видит только своих пациентов. У каждой записи есть автор и время, исправления ничего не стирают. В демонстрации только вымышленные люди.</a:t>
+              <a:t>Анкеты врач предлагает сам. В карточке три шкалы DASS-42 и отдельно PHQ-9 и GAD-7: последнее значение, график и изменение. Мы используем точные русские версии и ничего в них не меняем. Если анкета заполнена не полностью, точка на графике не появляется: пропуск не превращается в ноль.</a:t>
             </a:r>
             <a:endParaRPr lang="en-US" dirty="0"/>
           </a:p>
@@ -2965,7 +2965,7 @@
                 <a:ea typeface="Calibri" pitchFamily="34" charset="-122"/>
                 <a:cs typeface="Calibri" pitchFamily="34" charset="-120"/>
               </a:rPr>
-              <a:t>Клинический компас · кейс-чемпионат Авинейро · 2026</a:t>
+              <a:t>Команда «Шаг вперёд» · Клинический компас · кейс-чемпионат Авинейро · 2026</a:t>
             </a:r>
             <a:endParaRPr lang="en-US" sz="900" dirty="0"/>
           </a:p>
@@ -4489,8 +4489,72 @@
         </p:nvSpPr>
         <p:spPr>
           <a:xfrm>
-            <a:off x="548640" y="5166360"/>
-            <a:ext cx="566928" cy="566928"/>
+            <a:off x="548640" y="5029200"/>
+            <a:ext cx="530352" cy="530352"/>
+          </a:xfrm>
+          <a:prstGeom prst="ellipse">
+            <a:avLst/>
+          </a:prstGeom>
+          <a:solidFill>
+            <a:srgbClr val="D9822B"/>
+          </a:solidFill>
+          <a:ln w="19050">
+            <a:solidFill>
+              <a:srgbClr val="FFFFFF"/>
+            </a:solidFill>
+            <a:prstDash val="solid"/>
+          </a:ln>
+        </p:spPr>
+      </p:sp>
+      <p:sp>
+        <p:nvSpPr>
+          <p:cNvPr id="32" name="Text 27"/>
+          <p:cNvSpPr txBox="1"/>
+          <p:nvPr/>
+        </p:nvSpPr>
+        <p:spPr>
+          <a:xfrm>
+            <a:off x="548640" y="5029200"/>
+            <a:ext cx="530352" cy="530352"/>
+          </a:xfrm>
+          <a:prstGeom prst="rect">
+            <a:avLst/>
+          </a:prstGeom>
+          <a:noFill/>
+          <a:ln/>
+        </p:spPr>
+        <p:txBody>
+          <a:bodyPr wrap="square" lIns="0" tIns="0" rIns="0" bIns="0" rtlCol="0" anchor="ctr"/>
+          <a:lstStyle/>
+          <a:p>
+            <a:pPr algn="ctr" indent="0" marL="0">
+              <a:buNone/>
+            </a:pPr>
+            <a:r>
+              <a:rPr lang="en-US" sz="1200" b="1" dirty="0">
+                <a:solidFill>
+                  <a:srgbClr val="FFFFFF"/>
+                </a:solidFill>
+                <a:latin typeface="Cambria" pitchFamily="34" charset="0"/>
+                <a:ea typeface="Cambria" pitchFamily="34" charset="-122"/>
+                <a:cs typeface="Cambria" pitchFamily="34" charset="-120"/>
+              </a:rPr>
+              <a:t>ИИ</a:t>
+            </a:r>
+            <a:endParaRPr lang="en-US" sz="1200" dirty="0"/>
+          </a:p>
+        </p:txBody>
+      </p:sp>
+      <p:sp>
+        <p:nvSpPr>
+          <p:cNvPr id="33" name="Shape 28"/>
+          <p:cNvSpPr/>
+          <p:nvPr/>
+        </p:nvSpPr>
+        <p:spPr>
+          <a:xfrm>
+            <a:off x="1005840" y="5029200"/>
+            <a:ext cx="530352" cy="530352"/>
           </a:xfrm>
           <a:prstGeom prst="ellipse">
             <a:avLst/>
@@ -4498,9 +4562,9 @@
           <a:solidFill>
             <a:srgbClr val="123A40"/>
           </a:solidFill>
-          <a:ln w="12700">
+          <a:ln w="19050">
             <a:solidFill>
-              <a:srgbClr val="123A40"/>
+              <a:srgbClr val="FFFFFF"/>
             </a:solidFill>
             <a:prstDash val="solid"/>
           </a:ln>
@@ -4508,14 +4572,14 @@
       </p:sp>
       <p:sp>
         <p:nvSpPr>
-          <p:cNvPr id="32" name="Text 27"/>
-          <p:cNvSpPr txBox="1"/>
-          <p:nvPr/>
-        </p:nvSpPr>
-        <p:spPr>
-          <a:xfrm>
-            <a:off x="548640" y="5166360"/>
-            <a:ext cx="566928" cy="566928"/>
+          <p:cNvPr id="34" name="Text 29"/>
+          <p:cNvSpPr txBox="1"/>
+          <p:nvPr/>
+        </p:nvSpPr>
+        <p:spPr>
+          <a:xfrm>
+            <a:off x="1005840" y="5029200"/>
+            <a:ext cx="530352" cy="530352"/>
           </a:xfrm>
           <a:prstGeom prst="rect">
             <a:avLst/>
@@ -4531,7 +4595,7 @@
               <a:buNone/>
             </a:pPr>
             <a:r>
-              <a:rPr lang="en-US" sz="1500" b="1" dirty="0">
+              <a:rPr lang="en-US" sz="1200" b="1" dirty="0">
                 <a:solidFill>
                   <a:srgbClr val="FFFFFF"/>
                 </a:solidFill>
@@ -4541,59 +4605,212 @@
               </a:rPr>
               <a:t>АС</a:t>
             </a:r>
-            <a:endParaRPr lang="en-US" sz="1500" dirty="0"/>
-          </a:p>
-        </p:txBody>
-      </p:sp>
-      <p:sp>
-        <p:nvSpPr>
-          <p:cNvPr id="33" name="Text 28"/>
-          <p:cNvSpPr txBox="1"/>
-          <p:nvPr/>
-        </p:nvSpPr>
-        <p:spPr>
-          <a:xfrm>
-            <a:off x="1261872" y="5175504"/>
-            <a:ext cx="2926080" cy="292608"/>
-          </a:xfrm>
-          <a:prstGeom prst="rect">
-            <a:avLst/>
-          </a:prstGeom>
-          <a:noFill/>
-          <a:ln/>
-        </p:spPr>
-        <p:txBody>
-          <a:bodyPr wrap="square" lIns="0" tIns="0" rIns="0" bIns="0" rtlCol="0" anchor="t"/>
-          <a:lstStyle/>
-          <a:p>
-            <a:pPr indent="0" marL="0">
-              <a:buNone/>
-            </a:pPr>
-            <a:r>
-              <a:rPr lang="en-US" sz="1400" b="1" dirty="0">
-                <a:solidFill>
-                  <a:srgbClr val="16252B"/>
+            <a:endParaRPr lang="en-US" sz="1200" dirty="0"/>
+          </a:p>
+        </p:txBody>
+      </p:sp>
+      <p:sp>
+        <p:nvSpPr>
+          <p:cNvPr id="35" name="Shape 30"/>
+          <p:cNvSpPr/>
+          <p:nvPr/>
+        </p:nvSpPr>
+        <p:spPr>
+          <a:xfrm>
+            <a:off x="1463040" y="5029200"/>
+            <a:ext cx="530352" cy="530352"/>
+          </a:xfrm>
+          <a:prstGeom prst="ellipse">
+            <a:avLst/>
+          </a:prstGeom>
+          <a:solidFill>
+            <a:srgbClr val="123A40"/>
+          </a:solidFill>
+          <a:ln w="19050">
+            <a:solidFill>
+              <a:srgbClr val="FFFFFF"/>
+            </a:solidFill>
+            <a:prstDash val="solid"/>
+          </a:ln>
+        </p:spPr>
+      </p:sp>
+      <p:sp>
+        <p:nvSpPr>
+          <p:cNvPr id="36" name="Text 31"/>
+          <p:cNvSpPr txBox="1"/>
+          <p:nvPr/>
+        </p:nvSpPr>
+        <p:spPr>
+          <a:xfrm>
+            <a:off x="1463040" y="5029200"/>
+            <a:ext cx="530352" cy="530352"/>
+          </a:xfrm>
+          <a:prstGeom prst="rect">
+            <a:avLst/>
+          </a:prstGeom>
+          <a:noFill/>
+          <a:ln/>
+        </p:spPr>
+        <p:txBody>
+          <a:bodyPr wrap="square" lIns="0" tIns="0" rIns="0" bIns="0" rtlCol="0" anchor="ctr"/>
+          <a:lstStyle/>
+          <a:p>
+            <a:pPr algn="ctr" indent="0" marL="0">
+              <a:buNone/>
+            </a:pPr>
+            <a:r>
+              <a:rPr lang="en-US" sz="1200" b="1" dirty="0">
+                <a:solidFill>
+                  <a:srgbClr val="FFFFFF"/>
                 </a:solidFill>
                 <a:latin typeface="Cambria" pitchFamily="34" charset="0"/>
                 <a:ea typeface="Cambria" pitchFamily="34" charset="-122"/>
                 <a:cs typeface="Cambria" pitchFamily="34" charset="-120"/>
               </a:rPr>
-              <a:t>Азамат Сибгатуллин</a:t>
-            </a:r>
-            <a:endParaRPr lang="en-US" sz="1400" dirty="0"/>
-          </a:p>
-        </p:txBody>
-      </p:sp>
-      <p:sp>
-        <p:nvSpPr>
-          <p:cNvPr id="34" name="Text 29"/>
-          <p:cNvSpPr txBox="1"/>
-          <p:nvPr/>
-        </p:nvSpPr>
-        <p:spPr>
-          <a:xfrm>
-            <a:off x="1261872" y="5458968"/>
-            <a:ext cx="2926080" cy="274320"/>
+              <a:t>МГ</a:t>
+            </a:r>
+            <a:endParaRPr lang="en-US" sz="1200" dirty="0"/>
+          </a:p>
+        </p:txBody>
+      </p:sp>
+      <p:sp>
+        <p:nvSpPr>
+          <p:cNvPr id="37" name="Shape 32"/>
+          <p:cNvSpPr/>
+          <p:nvPr/>
+        </p:nvSpPr>
+        <p:spPr>
+          <a:xfrm>
+            <a:off x="1920240" y="5029200"/>
+            <a:ext cx="530352" cy="530352"/>
+          </a:xfrm>
+          <a:prstGeom prst="ellipse">
+            <a:avLst/>
+          </a:prstGeom>
+          <a:solidFill>
+            <a:srgbClr val="123A40"/>
+          </a:solidFill>
+          <a:ln w="19050">
+            <a:solidFill>
+              <a:srgbClr val="FFFFFF"/>
+            </a:solidFill>
+            <a:prstDash val="solid"/>
+          </a:ln>
+        </p:spPr>
+      </p:sp>
+      <p:sp>
+        <p:nvSpPr>
+          <p:cNvPr id="38" name="Text 33"/>
+          <p:cNvSpPr txBox="1"/>
+          <p:nvPr/>
+        </p:nvSpPr>
+        <p:spPr>
+          <a:xfrm>
+            <a:off x="1920240" y="5029200"/>
+            <a:ext cx="530352" cy="530352"/>
+          </a:xfrm>
+          <a:prstGeom prst="rect">
+            <a:avLst/>
+          </a:prstGeom>
+          <a:noFill/>
+          <a:ln/>
+        </p:spPr>
+        <p:txBody>
+          <a:bodyPr wrap="square" lIns="0" tIns="0" rIns="0" bIns="0" rtlCol="0" anchor="ctr"/>
+          <a:lstStyle/>
+          <a:p>
+            <a:pPr algn="ctr" indent="0" marL="0">
+              <a:buNone/>
+            </a:pPr>
+            <a:r>
+              <a:rPr lang="en-US" sz="1200" b="1" dirty="0">
+                <a:solidFill>
+                  <a:srgbClr val="FFFFFF"/>
+                </a:solidFill>
+                <a:latin typeface="Cambria" pitchFamily="34" charset="0"/>
+                <a:ea typeface="Cambria" pitchFamily="34" charset="-122"/>
+                <a:cs typeface="Cambria" pitchFamily="34" charset="-120"/>
+              </a:rPr>
+              <a:t>ММ</a:t>
+            </a:r>
+            <a:endParaRPr lang="en-US" sz="1200" dirty="0"/>
+          </a:p>
+        </p:txBody>
+      </p:sp>
+      <p:sp>
+        <p:nvSpPr>
+          <p:cNvPr id="39" name="Shape 34"/>
+          <p:cNvSpPr/>
+          <p:nvPr/>
+        </p:nvSpPr>
+        <p:spPr>
+          <a:xfrm>
+            <a:off x="2377440" y="5029200"/>
+            <a:ext cx="530352" cy="530352"/>
+          </a:xfrm>
+          <a:prstGeom prst="ellipse">
+            <a:avLst/>
+          </a:prstGeom>
+          <a:solidFill>
+            <a:srgbClr val="123A40"/>
+          </a:solidFill>
+          <a:ln w="19050">
+            <a:solidFill>
+              <a:srgbClr val="FFFFFF"/>
+            </a:solidFill>
+            <a:prstDash val="solid"/>
+          </a:ln>
+        </p:spPr>
+      </p:sp>
+      <p:sp>
+        <p:nvSpPr>
+          <p:cNvPr id="40" name="Text 35"/>
+          <p:cNvSpPr txBox="1"/>
+          <p:nvPr/>
+        </p:nvSpPr>
+        <p:spPr>
+          <a:xfrm>
+            <a:off x="2377440" y="5029200"/>
+            <a:ext cx="530352" cy="530352"/>
+          </a:xfrm>
+          <a:prstGeom prst="rect">
+            <a:avLst/>
+          </a:prstGeom>
+          <a:noFill/>
+          <a:ln/>
+        </p:spPr>
+        <p:txBody>
+          <a:bodyPr wrap="square" lIns="0" tIns="0" rIns="0" bIns="0" rtlCol="0" anchor="ctr"/>
+          <a:lstStyle/>
+          <a:p>
+            <a:pPr algn="ctr" indent="0" marL="0">
+              <a:buNone/>
+            </a:pPr>
+            <a:r>
+              <a:rPr lang="en-US" sz="1200" b="1" dirty="0">
+                <a:solidFill>
+                  <a:srgbClr val="FFFFFF"/>
+                </a:solidFill>
+                <a:latin typeface="Cambria" pitchFamily="34" charset="0"/>
+                <a:ea typeface="Cambria" pitchFamily="34" charset="-122"/>
+                <a:cs typeface="Cambria" pitchFamily="34" charset="-120"/>
+              </a:rPr>
+              <a:t>ИГ</a:t>
+            </a:r>
+            <a:endParaRPr lang="en-US" sz="1200" dirty="0"/>
+          </a:p>
+        </p:txBody>
+      </p:sp>
+      <p:sp>
+        <p:nvSpPr>
+          <p:cNvPr id="41" name="Text 36"/>
+          <p:cNvSpPr txBox="1"/>
+          <p:nvPr/>
+        </p:nvSpPr>
+        <p:spPr>
+          <a:xfrm>
+            <a:off x="3063240" y="5001768"/>
+            <a:ext cx="3840480" cy="310896"/>
           </a:xfrm>
           <a:prstGeom prst="rect">
             <a:avLst/>
@@ -4609,7 +4826,46 @@
               <a:buNone/>
             </a:pPr>
             <a:r>
-              <a:rPr lang="en-US" sz="1100" dirty="0">
+              <a:rPr lang="en-US" sz="1600" b="1" dirty="0">
+                <a:solidFill>
+                  <a:srgbClr val="16252B"/>
+                </a:solidFill>
+                <a:latin typeface="Cambria" pitchFamily="34" charset="0"/>
+                <a:ea typeface="Cambria" pitchFamily="34" charset="-122"/>
+                <a:cs typeface="Cambria" pitchFamily="34" charset="-120"/>
+              </a:rPr>
+              <a:t>Команда «Шаг вперёд»</a:t>
+            </a:r>
+            <a:endParaRPr lang="en-US" sz="1600" dirty="0"/>
+          </a:p>
+        </p:txBody>
+      </p:sp>
+      <p:sp>
+        <p:nvSpPr>
+          <p:cNvPr id="42" name="Text 37"/>
+          <p:cNvSpPr txBox="1"/>
+          <p:nvPr/>
+        </p:nvSpPr>
+        <p:spPr>
+          <a:xfrm>
+            <a:off x="3063240" y="5303520"/>
+            <a:ext cx="3840480" cy="274320"/>
+          </a:xfrm>
+          <a:prstGeom prst="rect">
+            <a:avLst/>
+          </a:prstGeom>
+          <a:noFill/>
+          <a:ln/>
+        </p:spPr>
+        <p:txBody>
+          <a:bodyPr wrap="square" lIns="0" tIns="0" rIns="0" bIns="0" rtlCol="0" anchor="t"/>
+          <a:lstStyle/>
+          <a:p>
+            <a:pPr indent="0" marL="0">
+              <a:buNone/>
+            </a:pPr>
+            <a:r>
+              <a:rPr lang="en-US" sz="1200" dirty="0">
                 <a:solidFill>
                   <a:srgbClr val="5A6B71"/>
                 </a:solidFill>
@@ -4617,125 +4873,22 @@
                 <a:ea typeface="Calibri" pitchFamily="34" charset="-122"/>
                 <a:cs typeface="Calibri" pitchFamily="34" charset="-120"/>
               </a:rPr>
-              <a:t>капитан команды, разработчик</a:t>
-            </a:r>
-            <a:endParaRPr lang="en-US" sz="1100" dirty="0"/>
-          </a:p>
-        </p:txBody>
-      </p:sp>
-      <p:sp>
-        <p:nvSpPr>
-          <p:cNvPr id="35" name="Shape 30"/>
-          <p:cNvSpPr/>
-          <p:nvPr/>
-        </p:nvSpPr>
-        <p:spPr>
-          <a:xfrm>
-            <a:off x="4069080" y="5166360"/>
-            <a:ext cx="566928" cy="566928"/>
-          </a:xfrm>
-          <a:prstGeom prst="ellipse">
-            <a:avLst/>
-          </a:prstGeom>
-          <a:solidFill>
-            <a:srgbClr val="DCEBE8"/>
-          </a:solidFill>
-          <a:ln w="12700">
-            <a:solidFill>
-              <a:srgbClr val="DCEBE8"/>
-            </a:solidFill>
-            <a:prstDash val="solid"/>
-          </a:ln>
-        </p:spPr>
-      </p:sp>
-      <p:sp>
-        <p:nvSpPr>
-          <p:cNvPr id="36" name="Text 31"/>
-          <p:cNvSpPr txBox="1"/>
-          <p:nvPr/>
-        </p:nvSpPr>
-        <p:spPr>
-          <a:xfrm>
-            <a:off x="4069080" y="5166360"/>
-            <a:ext cx="566928" cy="566928"/>
-          </a:xfrm>
-          <a:prstGeom prst="rect">
-            <a:avLst/>
-          </a:prstGeom>
-          <a:noFill/>
-          <a:ln/>
-        </p:spPr>
-        <p:txBody>
-          <a:bodyPr wrap="square" lIns="0" tIns="0" rIns="0" bIns="0" rtlCol="0" anchor="ctr"/>
-          <a:lstStyle/>
-          <a:p>
-            <a:pPr algn="ctr" indent="0" marL="0">
-              <a:buNone/>
-            </a:pPr>
-            <a:r>
-              <a:rPr lang="en-US" sz="1500" b="1" dirty="0">
-                <a:solidFill>
-                  <a:srgbClr val="1F6F68"/>
-                </a:solidFill>
-                <a:latin typeface="Cambria" pitchFamily="34" charset="0"/>
-                <a:ea typeface="Cambria" pitchFamily="34" charset="-122"/>
-                <a:cs typeface="Cambria" pitchFamily="34" charset="-120"/>
-              </a:rPr>
-              <a:t>+4</a:t>
-            </a:r>
-            <a:endParaRPr lang="en-US" sz="1500" dirty="0"/>
-          </a:p>
-        </p:txBody>
-      </p:sp>
-      <p:sp>
-        <p:nvSpPr>
-          <p:cNvPr id="37" name="Text 32"/>
-          <p:cNvSpPr txBox="1"/>
-          <p:nvPr/>
-        </p:nvSpPr>
-        <p:spPr>
-          <a:xfrm>
-            <a:off x="4782312" y="5175504"/>
-            <a:ext cx="2103120" cy="292608"/>
-          </a:xfrm>
-          <a:prstGeom prst="rect">
-            <a:avLst/>
-          </a:prstGeom>
-          <a:noFill/>
-          <a:ln/>
-        </p:spPr>
-        <p:txBody>
-          <a:bodyPr wrap="square" lIns="0" tIns="0" rIns="0" bIns="0" rtlCol="0" anchor="t"/>
-          <a:lstStyle/>
-          <a:p>
-            <a:pPr indent="0" marL="0">
-              <a:buNone/>
-            </a:pPr>
-            <a:r>
-              <a:rPr lang="en-US" sz="1400" b="1" dirty="0">
-                <a:solidFill>
-                  <a:srgbClr val="16252B"/>
-                </a:solidFill>
-                <a:latin typeface="Cambria" pitchFamily="34" charset="0"/>
-                <a:ea typeface="Cambria" pitchFamily="34" charset="-122"/>
-                <a:cs typeface="Cambria" pitchFamily="34" charset="-120"/>
-              </a:rPr>
-              <a:t>участника команды</a:t>
-            </a:r>
-            <a:endParaRPr lang="en-US" sz="1400" dirty="0"/>
-          </a:p>
-        </p:txBody>
-      </p:sp>
-      <p:sp>
-        <p:nvSpPr>
-          <p:cNvPr id="38" name="Text 33"/>
-          <p:cNvSpPr txBox="1"/>
-          <p:nvPr/>
-        </p:nvSpPr>
-        <p:spPr>
-          <a:xfrm>
-            <a:off x="4782312" y="5458968"/>
-            <a:ext cx="2103120" cy="274320"/>
+              <a:t>капитан — Ильназ Идиятуллин</a:t>
+            </a:r>
+            <a:endParaRPr lang="en-US" sz="1200" dirty="0"/>
+          </a:p>
+        </p:txBody>
+      </p:sp>
+      <p:sp>
+        <p:nvSpPr>
+          <p:cNvPr id="43" name="Text 38"/>
+          <p:cNvSpPr txBox="1"/>
+          <p:nvPr/>
+        </p:nvSpPr>
+        <p:spPr>
+          <a:xfrm>
+            <a:off x="548640" y="5833872"/>
+            <a:ext cx="6400800" cy="274320"/>
           </a:xfrm>
           <a:prstGeom prst="rect">
             <a:avLst/>
@@ -4759,7 +4912,7 @@
                 <a:ea typeface="Calibri" pitchFamily="34" charset="-122"/>
                 <a:cs typeface="Calibri" pitchFamily="34" charset="-120"/>
               </a:rPr>
-              <a:t>состав на слайде «Команда»</a:t>
+              <a:t>ФГБОУ ВО «Казанский государственный медицинский университет» Минздрава России</a:t>
             </a:r>
             <a:endParaRPr lang="en-US" sz="1100" dirty="0"/>
           </a:p>
@@ -4767,14 +4920,14 @@
       </p:sp>
       <p:sp>
         <p:nvSpPr>
-          <p:cNvPr id="39" name="Text 34"/>
-          <p:cNvSpPr txBox="1"/>
-          <p:nvPr/>
-        </p:nvSpPr>
-        <p:spPr>
-          <a:xfrm>
-            <a:off x="548640" y="6263640"/>
-            <a:ext cx="2743200" cy="274320"/>
+          <p:cNvPr id="44" name="Text 39"/>
+          <p:cNvSpPr txBox="1"/>
+          <p:nvPr/>
+        </p:nvSpPr>
+        <p:spPr>
+          <a:xfrm>
+            <a:off x="548640" y="6126480"/>
+            <a:ext cx="6400800" cy="274320"/>
           </a:xfrm>
           <a:prstGeom prst="rect">
             <a:avLst/>
@@ -4798,7 +4951,7 @@
                 <a:ea typeface="Calibri" pitchFamily="34" charset="-122"/>
                 <a:cs typeface="Calibri" pitchFamily="34" charset="-120"/>
               </a:rPr>
-              <a:t>Октябрь 2026</a:t>
+              <a:t>Педиатрический факультет · Казань, октябрь 2026</a:t>
             </a:r>
             <a:endParaRPr lang="en-US" sz="1100" dirty="0"/>
           </a:p>
@@ -9247,7 +9400,7 @@
                 <a:ea typeface="Cambria" pitchFamily="34" charset="-122"/>
                 <a:cs typeface="Cambria" pitchFamily="34" charset="-120"/>
               </a:rPr>
-              <a:t>Команда проекта</a:t>
+              <a:t>Команда «Шаг вперёд»</a:t>
             </a:r>
             <a:endParaRPr lang="en-US" sz="2800" dirty="0"/>
           </a:p>
@@ -9262,11 +9415,11 @@
         <p:spPr>
           <a:xfrm>
             <a:off x="548640" y="1627632"/>
-            <a:ext cx="4206240" cy="4343400"/>
+            <a:ext cx="2075688" cy="3520440"/>
           </a:xfrm>
           <a:prstGeom prst="roundRect">
             <a:avLst>
-              <a:gd name="adj" fmla="val 1739"/>
+              <a:gd name="adj" fmla="val 3524"/>
             </a:avLst>
           </a:prstGeom>
           <a:solidFill>
@@ -9288,8 +9441,8 @@
         </p:nvSpPr>
         <p:spPr>
           <a:xfrm>
-            <a:off x="868680" y="1920240"/>
-            <a:ext cx="1051560" cy="1051560"/>
+            <a:off x="777240" y="1901952"/>
+            <a:ext cx="914400" cy="914400"/>
           </a:xfrm>
           <a:prstGeom prst="ellipse">
             <a:avLst/>
@@ -9313,8 +9466,8 @@
         </p:nvSpPr>
         <p:spPr>
           <a:xfrm>
-            <a:off x="868680" y="1920240"/>
-            <a:ext cx="1051560" cy="1051560"/>
+            <a:off x="777240" y="1901952"/>
+            <a:ext cx="914400" cy="914400"/>
           </a:xfrm>
           <a:prstGeom prst="rect">
             <a:avLst/>
@@ -9330,7 +9483,7 @@
               <a:buNone/>
             </a:pPr>
             <a:r>
-              <a:rPr lang="en-US" sz="2600" b="1" dirty="0">
+              <a:rPr lang="en-US" sz="2200" b="1" dirty="0">
                 <a:solidFill>
                   <a:srgbClr val="FFFFFF"/>
                 </a:solidFill>
@@ -9338,9 +9491,9 @@
                 <a:ea typeface="Cambria" pitchFamily="34" charset="-122"/>
                 <a:cs typeface="Cambria" pitchFamily="34" charset="-120"/>
               </a:rPr>
-              <a:t>АС</a:t>
-            </a:r>
-            <a:endParaRPr lang="en-US" sz="2600" dirty="0"/>
+              <a:t>ИИ</a:t>
+            </a:r>
+            <a:endParaRPr lang="en-US" sz="2200" dirty="0"/>
           </a:p>
         </p:txBody>
       </p:sp>
@@ -9352,8 +9505,8 @@
         </p:nvSpPr>
         <p:spPr>
           <a:xfrm>
-            <a:off x="868680" y="3154680"/>
-            <a:ext cx="3657600" cy="777240"/>
+            <a:off x="777240" y="3044952"/>
+            <a:ext cx="1709928" cy="347472"/>
           </a:xfrm>
           <a:prstGeom prst="rect">
             <a:avLst/>
@@ -9369,7 +9522,7 @@
               <a:buNone/>
             </a:pPr>
             <a:r>
-              <a:rPr lang="en-US" sz="1800" b="1" dirty="0">
+              <a:rPr lang="en-US" sz="1600" b="1" dirty="0">
                 <a:solidFill>
                   <a:srgbClr val="FFFFFF"/>
                 </a:solidFill>
@@ -9377,65 +9530,48 @@
                 <a:ea typeface="Cambria" pitchFamily="34" charset="-122"/>
                 <a:cs typeface="Cambria" pitchFamily="34" charset="-120"/>
               </a:rPr>
-              <a:t>Сибгатуллин</a:t>
-            </a:r>
-            <a:endParaRPr lang="en-US" sz="1800" dirty="0"/>
-          </a:p>
+              <a:t>Идиятуллин</a:t>
+            </a:r>
+            <a:endParaRPr lang="en-US" sz="1600" dirty="0"/>
+          </a:p>
+        </p:txBody>
+      </p:sp>
+      <p:sp>
+        <p:nvSpPr>
+          <p:cNvPr id="9" name="Text 7"/>
+          <p:cNvSpPr txBox="1"/>
+          <p:nvPr/>
+        </p:nvSpPr>
+        <p:spPr>
+          <a:xfrm>
+            <a:off x="777240" y="3392424"/>
+            <a:ext cx="1709928" cy="548640"/>
+          </a:xfrm>
+          <a:prstGeom prst="rect">
+            <a:avLst/>
+          </a:prstGeom>
+          <a:noFill/>
+          <a:ln/>
+        </p:spPr>
+        <p:txBody>
+          <a:bodyPr wrap="square" lIns="0" tIns="0" rIns="0" bIns="0" rtlCol="0" anchor="t"/>
+          <a:lstStyle/>
           <a:p>
             <a:pPr indent="0" marL="0">
               <a:buNone/>
             </a:pPr>
             <a:r>
-              <a:rPr lang="en-US" sz="1800" b="1" dirty="0">
-                <a:solidFill>
-                  <a:srgbClr val="FFFFFF"/>
-                </a:solidFill>
-                <a:latin typeface="Cambria" pitchFamily="34" charset="0"/>
-                <a:ea typeface="Cambria" pitchFamily="34" charset="-122"/>
-                <a:cs typeface="Cambria" pitchFamily="34" charset="-120"/>
-              </a:rPr>
-              <a:t>Азамат Ильдарович</a:t>
-            </a:r>
-            <a:endParaRPr lang="en-US" sz="1800" dirty="0"/>
-          </a:p>
-        </p:txBody>
-      </p:sp>
-      <p:sp>
-        <p:nvSpPr>
-          <p:cNvPr id="9" name="Text 7"/>
-          <p:cNvSpPr txBox="1"/>
-          <p:nvPr/>
-        </p:nvSpPr>
-        <p:spPr>
-          <a:xfrm>
-            <a:off x="868680" y="3959352"/>
-            <a:ext cx="3657600" cy="274320"/>
-          </a:xfrm>
-          <a:prstGeom prst="rect">
-            <a:avLst/>
-          </a:prstGeom>
-          <a:noFill/>
-          <a:ln/>
-        </p:spPr>
-        <p:txBody>
-          <a:bodyPr wrap="square" lIns="0" tIns="0" rIns="0" bIns="0" rtlCol="0" anchor="t"/>
-          <a:lstStyle/>
-          <a:p>
-            <a:pPr indent="0" marL="0">
-              <a:buNone/>
-            </a:pPr>
-            <a:r>
-              <a:rPr lang="en-US" sz="1000" b="1" spc="150" kern="0" dirty="0">
-                <a:solidFill>
-                  <a:srgbClr val="FBEBD9"/>
+              <a:rPr lang="en-US" sz="1300" dirty="0">
+                <a:solidFill>
+                  <a:srgbClr val="E4EFED"/>
                 </a:solidFill>
                 <a:latin typeface="Calibri" pitchFamily="34" charset="0"/>
                 <a:ea typeface="Calibri" pitchFamily="34" charset="-122"/>
                 <a:cs typeface="Calibri" pitchFamily="34" charset="-120"/>
               </a:rPr>
-              <a:t>КАПИТАН · РАЗРАБОТЧИК</a:t>
-            </a:r>
-            <a:endParaRPr lang="en-US" sz="1000" dirty="0"/>
+              <a:t>Ильназ Алмазович</a:t>
+            </a:r>
+            <a:endParaRPr lang="en-US" sz="1300" dirty="0"/>
           </a:p>
         </p:txBody>
       </p:sp>
@@ -9447,8 +9583,8 @@
         </p:nvSpPr>
         <p:spPr>
           <a:xfrm>
-            <a:off x="868680" y="4343400"/>
-            <a:ext cx="3611880" cy="1463040"/>
+            <a:off x="777240" y="4023360"/>
+            <a:ext cx="1755648" cy="411480"/>
           </a:xfrm>
           <a:prstGeom prst="rect">
             <a:avLst/>
@@ -9460,46 +9596,21 @@
           <a:bodyPr wrap="square" lIns="0" tIns="0" rIns="0" bIns="0" rtlCol="0" anchor="t"/>
           <a:lstStyle/>
           <a:p>
-            <a:pPr marL="177800" indent="-177800">
-              <a:spcAft>
-                <a:spcPts val="600"/>
-              </a:spcAft>
-              <a:buSzPct val="100000"/>
-              <a:buChar char="•"/>
-            </a:pPr>
-            <a:r>
-              <a:rPr lang="en-US" sz="1200" dirty="0">
-                <a:solidFill>
-                  <a:srgbClr val="E4EFED"/>
+            <a:pPr indent="0" marL="0">
+              <a:buNone/>
+            </a:pPr>
+            <a:r>
+              <a:rPr lang="en-US" sz="950" b="1" spc="120" kern="0" dirty="0">
+                <a:solidFill>
+                  <a:srgbClr val="FBEBD9"/>
                 </a:solidFill>
                 <a:latin typeface="Calibri" pitchFamily="34" charset="0"/>
                 <a:ea typeface="Calibri" pitchFamily="34" charset="-122"/>
                 <a:cs typeface="Calibri" pitchFamily="34" charset="-120"/>
               </a:rPr>
-              <a:t>Спроектировал и написал сервис: сервер, база данных, кабинеты врача и пациента</a:t>
-            </a:r>
-            <a:endParaRPr lang="en-US" sz="1200" dirty="0"/>
-          </a:p>
-          <a:p>
-            <a:pPr marL="177800" indent="-177800">
-              <a:spcAft>
-                <a:spcPts val="600"/>
-              </a:spcAft>
-              <a:buSzPct val="100000"/>
-              <a:buChar char="•"/>
-            </a:pPr>
-            <a:r>
-              <a:rPr lang="en-US" sz="1200" dirty="0">
-                <a:solidFill>
-                  <a:srgbClr val="E4EFED"/>
-                </a:solidFill>
-                <a:latin typeface="Calibri" pitchFamily="34" charset="0"/>
-                <a:ea typeface="Calibri" pitchFamily="34" charset="-122"/>
-                <a:cs typeface="Calibri" pitchFamily="34" charset="-120"/>
-              </a:rPr>
-              <a:t>588 автотестов и 53 принятых этапа разработки</a:t>
-            </a:r>
-            <a:endParaRPr lang="en-US" sz="1200" dirty="0"/>
+              <a:t>КАПИТАН · МЕДИК</a:t>
+            </a:r>
+            <a:endParaRPr lang="en-US" sz="950" dirty="0"/>
           </a:p>
         </p:txBody>
       </p:sp>
@@ -9511,12 +9622,12 @@
         </p:nvSpPr>
         <p:spPr>
           <a:xfrm>
-            <a:off x="4983480" y="1627632"/>
-            <a:ext cx="3200400" cy="2103120"/>
+            <a:off x="2803322" y="1627632"/>
+            <a:ext cx="2075688" cy="3520440"/>
           </a:xfrm>
           <a:prstGeom prst="roundRect">
             <a:avLst>
-              <a:gd name="adj" fmla="val 3478"/>
+              <a:gd name="adj" fmla="val 3524"/>
             </a:avLst>
           </a:prstGeom>
           <a:solidFill>
@@ -9538,8 +9649,8 @@
         </p:nvSpPr>
         <p:spPr>
           <a:xfrm>
-            <a:off x="5239512" y="1901952"/>
-            <a:ext cx="777240" cy="777240"/>
+            <a:off x="3031922" y="1901952"/>
+            <a:ext cx="914400" cy="914400"/>
           </a:xfrm>
           <a:prstGeom prst="ellipse">
             <a:avLst/>
@@ -9555,40 +9666,16 @@
           </a:ln>
         </p:spPr>
       </p:sp>
-      <p:pic>
-        <p:nvPicPr>
-          <p:cNvPr id="13" name="Image 0" descr="preencoded.png">    </p:cNvPr>
-          <p:cNvPicPr>
-            <a:picLocks noChangeAspect="1"/>
-          </p:cNvPicPr>
-          <p:nvPr/>
-        </p:nvPicPr>
-        <p:blipFill>
-          <a:blip r:embed="rId1"/>
-          <a:stretch>
-            <a:fillRect/>
-          </a:stretch>
-        </p:blipFill>
-        <p:spPr>
-          <a:xfrm>
-            <a:off x="5422392" y="2084832"/>
-            <a:ext cx="411480" cy="411480"/>
-          </a:xfrm>
-          <a:prstGeom prst="rect">
-            <a:avLst/>
-          </a:prstGeom>
-        </p:spPr>
-      </p:pic>
-      <p:sp>
-        <p:nvSpPr>
-          <p:cNvPr id="14" name="Text 11"/>
-          <p:cNvSpPr txBox="1"/>
-          <p:nvPr/>
-        </p:nvSpPr>
-        <p:spPr>
-          <a:xfrm>
-            <a:off x="6172200" y="1901952"/>
-            <a:ext cx="1920240" cy="777240"/>
+      <p:sp>
+        <p:nvSpPr>
+          <p:cNvPr id="13" name="Text 11"/>
+          <p:cNvSpPr txBox="1"/>
+          <p:nvPr/>
+        </p:nvSpPr>
+        <p:spPr>
+          <a:xfrm>
+            <a:off x="3031922" y="1901952"/>
+            <a:ext cx="914400" cy="914400"/>
           </a:xfrm>
           <a:prstGeom prst="rect">
             <a:avLst/>
@@ -9600,28 +9687,50 @@
           <a:bodyPr wrap="square" lIns="0" tIns="0" rIns="0" bIns="0" rtlCol="0" anchor="ctr"/>
           <a:lstStyle/>
           <a:p>
-            <a:pPr indent="0" marL="0">
-              <a:buNone/>
-            </a:pPr>
-            <a:r>
-              <a:rPr lang="en-US" sz="1400" b="1" dirty="0">
-                <a:solidFill>
-                  <a:srgbClr val="123A40"/>
+            <a:pPr algn="ctr" indent="0" marL="0">
+              <a:buNone/>
+            </a:pPr>
+            <a:r>
+              <a:rPr lang="en-US" sz="2200" b="1" dirty="0">
+                <a:solidFill>
+                  <a:srgbClr val="1F6F68"/>
                 </a:solidFill>
                 <a:latin typeface="Cambria" pitchFamily="34" charset="0"/>
                 <a:ea typeface="Cambria" pitchFamily="34" charset="-122"/>
                 <a:cs typeface="Cambria" pitchFamily="34" charset="-120"/>
               </a:rPr>
-              <a:t>Фамилия</a:t>
-            </a:r>
-            <a:endParaRPr lang="en-US" sz="1400" dirty="0"/>
-          </a:p>
+              <a:t>АС</a:t>
+            </a:r>
+            <a:endParaRPr lang="en-US" sz="2200" dirty="0"/>
+          </a:p>
+        </p:txBody>
+      </p:sp>
+      <p:sp>
+        <p:nvSpPr>
+          <p:cNvPr id="14" name="Text 12"/>
+          <p:cNvSpPr txBox="1"/>
+          <p:nvPr/>
+        </p:nvSpPr>
+        <p:spPr>
+          <a:xfrm>
+            <a:off x="3031922" y="3044952"/>
+            <a:ext cx="1709928" cy="347472"/>
+          </a:xfrm>
+          <a:prstGeom prst="rect">
+            <a:avLst/>
+          </a:prstGeom>
+          <a:noFill/>
+          <a:ln/>
+        </p:spPr>
+        <p:txBody>
+          <a:bodyPr wrap="square" lIns="0" tIns="0" rIns="0" bIns="0" rtlCol="0" anchor="t"/>
+          <a:lstStyle/>
           <a:p>
             <a:pPr indent="0" marL="0">
               <a:buNone/>
             </a:pPr>
             <a:r>
-              <a:rPr lang="en-US" sz="1400" b="1" dirty="0">
+              <a:rPr lang="en-US" sz="1600" b="1" dirty="0">
                 <a:solidFill>
                   <a:srgbClr val="123A40"/>
                 </a:solidFill>
@@ -9629,22 +9738,22 @@
                 <a:ea typeface="Cambria" pitchFamily="34" charset="-122"/>
                 <a:cs typeface="Cambria" pitchFamily="34" charset="-120"/>
               </a:rPr>
-              <a:t>Имя Отчество</a:t>
-            </a:r>
-            <a:endParaRPr lang="en-US" sz="1400" dirty="0"/>
-          </a:p>
-        </p:txBody>
-      </p:sp>
-      <p:sp>
-        <p:nvSpPr>
-          <p:cNvPr id="15" name="Text 12"/>
-          <p:cNvSpPr txBox="1"/>
-          <p:nvPr/>
-        </p:nvSpPr>
-        <p:spPr>
-          <a:xfrm>
-            <a:off x="5239512" y="2862072"/>
-            <a:ext cx="2743200" cy="256032"/>
+              <a:t>Сибгатуллин</a:t>
+            </a:r>
+            <a:endParaRPr lang="en-US" sz="1600" dirty="0"/>
+          </a:p>
+        </p:txBody>
+      </p:sp>
+      <p:sp>
+        <p:nvSpPr>
+          <p:cNvPr id="15" name="Text 13"/>
+          <p:cNvSpPr txBox="1"/>
+          <p:nvPr/>
+        </p:nvSpPr>
+        <p:spPr>
+          <a:xfrm>
+            <a:off x="3031922" y="3392424"/>
+            <a:ext cx="1709928" cy="548640"/>
           </a:xfrm>
           <a:prstGeom prst="rect">
             <a:avLst/>
@@ -9660,30 +9769,30 @@
               <a:buNone/>
             </a:pPr>
             <a:r>
-              <a:rPr lang="en-US" sz="1000" b="1" spc="150" kern="0" dirty="0">
-                <a:solidFill>
-                  <a:srgbClr val="1F6F68"/>
+              <a:rPr lang="en-US" sz="1300" dirty="0">
+                <a:solidFill>
+                  <a:srgbClr val="16252B"/>
                 </a:solidFill>
                 <a:latin typeface="Calibri" pitchFamily="34" charset="0"/>
                 <a:ea typeface="Calibri" pitchFamily="34" charset="-122"/>
                 <a:cs typeface="Calibri" pitchFamily="34" charset="-120"/>
               </a:rPr>
-              <a:t>РОЛЬ В ПРОЕКТЕ</a:t>
-            </a:r>
-            <a:endParaRPr lang="en-US" sz="1000" dirty="0"/>
-          </a:p>
-        </p:txBody>
-      </p:sp>
-      <p:sp>
-        <p:nvSpPr>
-          <p:cNvPr id="16" name="Text 13"/>
-          <p:cNvSpPr txBox="1"/>
-          <p:nvPr/>
-        </p:nvSpPr>
-        <p:spPr>
-          <a:xfrm>
-            <a:off x="5239512" y="3136392"/>
-            <a:ext cx="2743200" cy="457200"/>
+              <a:t>Азамат Ильдарович</a:t>
+            </a:r>
+            <a:endParaRPr lang="en-US" sz="1300" dirty="0"/>
+          </a:p>
+        </p:txBody>
+      </p:sp>
+      <p:sp>
+        <p:nvSpPr>
+          <p:cNvPr id="16" name="Text 14"/>
+          <p:cNvSpPr txBox="1"/>
+          <p:nvPr/>
+        </p:nvSpPr>
+        <p:spPr>
+          <a:xfrm>
+            <a:off x="3031922" y="4023360"/>
+            <a:ext cx="1755648" cy="411480"/>
           </a:xfrm>
           <a:prstGeom prst="rect">
             <a:avLst/>
@@ -9699,34 +9808,73 @@
               <a:buNone/>
             </a:pPr>
             <a:r>
-              <a:rPr lang="en-US" sz="1200" dirty="0">
-                <a:solidFill>
-                  <a:srgbClr val="5A6B71"/>
+              <a:rPr lang="en-US" sz="950" b="1" spc="120" kern="0" dirty="0">
+                <a:solidFill>
+                  <a:srgbClr val="1F6F68"/>
                 </a:solidFill>
                 <a:latin typeface="Calibri" pitchFamily="34" charset="0"/>
                 <a:ea typeface="Calibri" pitchFamily="34" charset="-122"/>
                 <a:cs typeface="Calibri" pitchFamily="34" charset="-120"/>
               </a:rPr>
-              <a:t>Чем занимается в команде</a:t>
-            </a:r>
-            <a:endParaRPr lang="en-US" sz="1200" dirty="0"/>
-          </a:p>
-        </p:txBody>
-      </p:sp>
-      <p:sp>
-        <p:nvSpPr>
-          <p:cNvPr id="17" name="Shape 14"/>
+              <a:t>ТЕХНИЧЕСКИЙ СПЕЦИАЛИСТ</a:t>
+            </a:r>
+            <a:endParaRPr lang="en-US" sz="950" dirty="0"/>
+          </a:p>
+        </p:txBody>
+      </p:sp>
+      <p:sp>
+        <p:nvSpPr>
+          <p:cNvPr id="17" name="Text 15"/>
+          <p:cNvSpPr txBox="1"/>
+          <p:nvPr/>
+        </p:nvSpPr>
+        <p:spPr>
+          <a:xfrm>
+            <a:off x="3031922" y="4370832"/>
+            <a:ext cx="1709928" cy="731520"/>
+          </a:xfrm>
+          <a:prstGeom prst="rect">
+            <a:avLst/>
+          </a:prstGeom>
+          <a:noFill/>
+          <a:ln/>
+        </p:spPr>
+        <p:txBody>
+          <a:bodyPr wrap="square" lIns="0" tIns="0" rIns="0" bIns="0" rtlCol="0" anchor="t"/>
+          <a:lstStyle/>
+          <a:p>
+            <a:pPr indent="0" marL="0">
+              <a:buNone/>
+            </a:pPr>
+            <a:r>
+              <a:rPr lang="en-US" sz="1100" dirty="0">
+                <a:solidFill>
+                  <a:srgbClr val="5A6B71"/>
+                </a:solidFill>
+                <a:latin typeface="Calibri" pitchFamily="34" charset="0"/>
+                <a:ea typeface="Calibri" pitchFamily="34" charset="-122"/>
+                <a:cs typeface="Calibri" pitchFamily="34" charset="-120"/>
+              </a:rPr>
+              <a:t>Сервер, база данных, кабинеты врача и пациента, автотесты</a:t>
+            </a:r>
+            <a:endParaRPr lang="en-US" sz="1100" dirty="0"/>
+          </a:p>
+        </p:txBody>
+      </p:sp>
+      <p:sp>
+        <p:nvSpPr>
+          <p:cNvPr id="18" name="Shape 16"/>
           <p:cNvSpPr/>
           <p:nvPr/>
         </p:nvSpPr>
         <p:spPr>
           <a:xfrm>
-            <a:off x="8339328" y="1627632"/>
-            <a:ext cx="3200400" cy="2103120"/>
+            <a:off x="5058004" y="1627632"/>
+            <a:ext cx="2075688" cy="3520440"/>
           </a:xfrm>
           <a:prstGeom prst="roundRect">
             <a:avLst>
-              <a:gd name="adj" fmla="val 3478"/>
+              <a:gd name="adj" fmla="val 3524"/>
             </a:avLst>
           </a:prstGeom>
           <a:solidFill>
@@ -9742,14 +9890,14 @@
       </p:sp>
       <p:sp>
         <p:nvSpPr>
-          <p:cNvPr id="18" name="Shape 15"/>
+          <p:cNvPr id="19" name="Shape 17"/>
           <p:cNvSpPr/>
           <p:nvPr/>
         </p:nvSpPr>
         <p:spPr>
           <a:xfrm>
-            <a:off x="8595360" y="1901952"/>
-            <a:ext cx="777240" cy="777240"/>
+            <a:off x="5286604" y="1901952"/>
+            <a:ext cx="914400" cy="914400"/>
           </a:xfrm>
           <a:prstGeom prst="ellipse">
             <a:avLst/>
@@ -9765,40 +9913,16 @@
           </a:ln>
         </p:spPr>
       </p:sp>
-      <p:pic>
-        <p:nvPicPr>
-          <p:cNvPr id="19" name="Image 1" descr="preencoded.png">    </p:cNvPr>
-          <p:cNvPicPr>
-            <a:picLocks noChangeAspect="1"/>
-          </p:cNvPicPr>
-          <p:nvPr/>
-        </p:nvPicPr>
-        <p:blipFill>
-          <a:blip r:embed="rId2"/>
-          <a:stretch>
-            <a:fillRect/>
-          </a:stretch>
-        </p:blipFill>
-        <p:spPr>
-          <a:xfrm>
-            <a:off x="8778240" y="2084832"/>
-            <a:ext cx="411480" cy="411480"/>
-          </a:xfrm>
-          <a:prstGeom prst="rect">
-            <a:avLst/>
-          </a:prstGeom>
-        </p:spPr>
-      </p:pic>
-      <p:sp>
-        <p:nvSpPr>
-          <p:cNvPr id="20" name="Text 16"/>
-          <p:cNvSpPr txBox="1"/>
-          <p:nvPr/>
-        </p:nvSpPr>
-        <p:spPr>
-          <a:xfrm>
-            <a:off x="9528048" y="1901952"/>
-            <a:ext cx="1920240" cy="777240"/>
+      <p:sp>
+        <p:nvSpPr>
+          <p:cNvPr id="20" name="Text 18"/>
+          <p:cNvSpPr txBox="1"/>
+          <p:nvPr/>
+        </p:nvSpPr>
+        <p:spPr>
+          <a:xfrm>
+            <a:off x="5286604" y="1901952"/>
+            <a:ext cx="914400" cy="914400"/>
           </a:xfrm>
           <a:prstGeom prst="rect">
             <a:avLst/>
@@ -9810,28 +9934,50 @@
           <a:bodyPr wrap="square" lIns="0" tIns="0" rIns="0" bIns="0" rtlCol="0" anchor="ctr"/>
           <a:lstStyle/>
           <a:p>
-            <a:pPr indent="0" marL="0">
-              <a:buNone/>
-            </a:pPr>
-            <a:r>
-              <a:rPr lang="en-US" sz="1400" b="1" dirty="0">
-                <a:solidFill>
-                  <a:srgbClr val="123A40"/>
+            <a:pPr algn="ctr" indent="0" marL="0">
+              <a:buNone/>
+            </a:pPr>
+            <a:r>
+              <a:rPr lang="en-US" sz="2200" b="1" dirty="0">
+                <a:solidFill>
+                  <a:srgbClr val="1F6F68"/>
                 </a:solidFill>
                 <a:latin typeface="Cambria" pitchFamily="34" charset="0"/>
                 <a:ea typeface="Cambria" pitchFamily="34" charset="-122"/>
                 <a:cs typeface="Cambria" pitchFamily="34" charset="-120"/>
               </a:rPr>
-              <a:t>Фамилия</a:t>
-            </a:r>
-            <a:endParaRPr lang="en-US" sz="1400" dirty="0"/>
-          </a:p>
+              <a:t>МГ</a:t>
+            </a:r>
+            <a:endParaRPr lang="en-US" sz="2200" dirty="0"/>
+          </a:p>
+        </p:txBody>
+      </p:sp>
+      <p:sp>
+        <p:nvSpPr>
+          <p:cNvPr id="21" name="Text 19"/>
+          <p:cNvSpPr txBox="1"/>
+          <p:nvPr/>
+        </p:nvSpPr>
+        <p:spPr>
+          <a:xfrm>
+            <a:off x="5286604" y="3044952"/>
+            <a:ext cx="1709928" cy="347472"/>
+          </a:xfrm>
+          <a:prstGeom prst="rect">
+            <a:avLst/>
+          </a:prstGeom>
+          <a:noFill/>
+          <a:ln/>
+        </p:spPr>
+        <p:txBody>
+          <a:bodyPr wrap="square" lIns="0" tIns="0" rIns="0" bIns="0" rtlCol="0" anchor="t"/>
+          <a:lstStyle/>
           <a:p>
             <a:pPr indent="0" marL="0">
               <a:buNone/>
             </a:pPr>
             <a:r>
-              <a:rPr lang="en-US" sz="1400" b="1" dirty="0">
+              <a:rPr lang="en-US" sz="1600" b="1" dirty="0">
                 <a:solidFill>
                   <a:srgbClr val="123A40"/>
                 </a:solidFill>
@@ -9839,22 +9985,22 @@
                 <a:ea typeface="Cambria" pitchFamily="34" charset="-122"/>
                 <a:cs typeface="Cambria" pitchFamily="34" charset="-120"/>
               </a:rPr>
-              <a:t>Имя Отчество</a:t>
-            </a:r>
-            <a:endParaRPr lang="en-US" sz="1400" dirty="0"/>
-          </a:p>
-        </p:txBody>
-      </p:sp>
-      <p:sp>
-        <p:nvSpPr>
-          <p:cNvPr id="21" name="Text 17"/>
-          <p:cNvSpPr txBox="1"/>
-          <p:nvPr/>
-        </p:nvSpPr>
-        <p:spPr>
-          <a:xfrm>
-            <a:off x="8595360" y="2862072"/>
-            <a:ext cx="2743200" cy="256032"/>
+              <a:t>Галицкий</a:t>
+            </a:r>
+            <a:endParaRPr lang="en-US" sz="1600" dirty="0"/>
+          </a:p>
+        </p:txBody>
+      </p:sp>
+      <p:sp>
+        <p:nvSpPr>
+          <p:cNvPr id="22" name="Text 20"/>
+          <p:cNvSpPr txBox="1"/>
+          <p:nvPr/>
+        </p:nvSpPr>
+        <p:spPr>
+          <a:xfrm>
+            <a:off x="5286604" y="3392424"/>
+            <a:ext cx="1709928" cy="548640"/>
           </a:xfrm>
           <a:prstGeom prst="rect">
             <a:avLst/>
@@ -9870,30 +10016,30 @@
               <a:buNone/>
             </a:pPr>
             <a:r>
-              <a:rPr lang="en-US" sz="1000" b="1" spc="150" kern="0" dirty="0">
-                <a:solidFill>
-                  <a:srgbClr val="1F6F68"/>
+              <a:rPr lang="en-US" sz="1300" dirty="0">
+                <a:solidFill>
+                  <a:srgbClr val="16252B"/>
                 </a:solidFill>
                 <a:latin typeface="Calibri" pitchFamily="34" charset="0"/>
                 <a:ea typeface="Calibri" pitchFamily="34" charset="-122"/>
                 <a:cs typeface="Calibri" pitchFamily="34" charset="-120"/>
               </a:rPr>
-              <a:t>РОЛЬ В ПРОЕКТЕ</a:t>
-            </a:r>
-            <a:endParaRPr lang="en-US" sz="1000" dirty="0"/>
-          </a:p>
-        </p:txBody>
-      </p:sp>
-      <p:sp>
-        <p:nvSpPr>
-          <p:cNvPr id="22" name="Text 18"/>
-          <p:cNvSpPr txBox="1"/>
-          <p:nvPr/>
-        </p:nvSpPr>
-        <p:spPr>
-          <a:xfrm>
-            <a:off x="8595360" y="3136392"/>
-            <a:ext cx="2743200" cy="457200"/>
+              <a:t>Марк Игоревич</a:t>
+            </a:r>
+            <a:endParaRPr lang="en-US" sz="1300" dirty="0"/>
+          </a:p>
+        </p:txBody>
+      </p:sp>
+      <p:sp>
+        <p:nvSpPr>
+          <p:cNvPr id="23" name="Text 21"/>
+          <p:cNvSpPr txBox="1"/>
+          <p:nvPr/>
+        </p:nvSpPr>
+        <p:spPr>
+          <a:xfrm>
+            <a:off x="5286604" y="4023360"/>
+            <a:ext cx="1755648" cy="411480"/>
           </a:xfrm>
           <a:prstGeom prst="rect">
             <a:avLst/>
@@ -9909,34 +10055,34 @@
               <a:buNone/>
             </a:pPr>
             <a:r>
-              <a:rPr lang="en-US" sz="1200" dirty="0">
-                <a:solidFill>
-                  <a:srgbClr val="5A6B71"/>
+              <a:rPr lang="en-US" sz="950" b="1" spc="120" kern="0" dirty="0">
+                <a:solidFill>
+                  <a:srgbClr val="1F6F68"/>
                 </a:solidFill>
                 <a:latin typeface="Calibri" pitchFamily="34" charset="0"/>
                 <a:ea typeface="Calibri" pitchFamily="34" charset="-122"/>
                 <a:cs typeface="Calibri" pitchFamily="34" charset="-120"/>
               </a:rPr>
-              <a:t>Чем занимается в команде</a:t>
-            </a:r>
-            <a:endParaRPr lang="en-US" sz="1200" dirty="0"/>
-          </a:p>
-        </p:txBody>
-      </p:sp>
-      <p:sp>
-        <p:nvSpPr>
-          <p:cNvPr id="23" name="Shape 19"/>
+              <a:t>МЕДИК</a:t>
+            </a:r>
+            <a:endParaRPr lang="en-US" sz="950" dirty="0"/>
+          </a:p>
+        </p:txBody>
+      </p:sp>
+      <p:sp>
+        <p:nvSpPr>
+          <p:cNvPr id="24" name="Shape 22"/>
           <p:cNvSpPr/>
           <p:nvPr/>
         </p:nvSpPr>
         <p:spPr>
           <a:xfrm>
-            <a:off x="4983480" y="3849624"/>
-            <a:ext cx="3200400" cy="2103120"/>
+            <a:off x="7312685" y="1627632"/>
+            <a:ext cx="2075688" cy="3520440"/>
           </a:xfrm>
           <a:prstGeom prst="roundRect">
             <a:avLst>
-              <a:gd name="adj" fmla="val 3478"/>
+              <a:gd name="adj" fmla="val 3524"/>
             </a:avLst>
           </a:prstGeom>
           <a:solidFill>
@@ -9952,14 +10098,14 @@
       </p:sp>
       <p:sp>
         <p:nvSpPr>
-          <p:cNvPr id="24" name="Shape 20"/>
+          <p:cNvPr id="25" name="Shape 23"/>
           <p:cNvSpPr/>
           <p:nvPr/>
         </p:nvSpPr>
         <p:spPr>
           <a:xfrm>
-            <a:off x="5239512" y="4123944"/>
-            <a:ext cx="777240" cy="777240"/>
+            <a:off x="7541285" y="1901952"/>
+            <a:ext cx="914400" cy="914400"/>
           </a:xfrm>
           <a:prstGeom prst="ellipse">
             <a:avLst/>
@@ -9975,40 +10121,16 @@
           </a:ln>
         </p:spPr>
       </p:sp>
-      <p:pic>
-        <p:nvPicPr>
-          <p:cNvPr id="25" name="Image 2" descr="preencoded.png">    </p:cNvPr>
-          <p:cNvPicPr>
-            <a:picLocks noChangeAspect="1"/>
-          </p:cNvPicPr>
-          <p:nvPr/>
-        </p:nvPicPr>
-        <p:blipFill>
-          <a:blip r:embed="rId3"/>
-          <a:stretch>
-            <a:fillRect/>
-          </a:stretch>
-        </p:blipFill>
-        <p:spPr>
-          <a:xfrm>
-            <a:off x="5422392" y="4306824"/>
-            <a:ext cx="411480" cy="411480"/>
-          </a:xfrm>
-          <a:prstGeom prst="rect">
-            <a:avLst/>
-          </a:prstGeom>
-        </p:spPr>
-      </p:pic>
-      <p:sp>
-        <p:nvSpPr>
-          <p:cNvPr id="26" name="Text 21"/>
-          <p:cNvSpPr txBox="1"/>
-          <p:nvPr/>
-        </p:nvSpPr>
-        <p:spPr>
-          <a:xfrm>
-            <a:off x="6172200" y="4123944"/>
-            <a:ext cx="1920240" cy="777240"/>
+      <p:sp>
+        <p:nvSpPr>
+          <p:cNvPr id="26" name="Text 24"/>
+          <p:cNvSpPr txBox="1"/>
+          <p:nvPr/>
+        </p:nvSpPr>
+        <p:spPr>
+          <a:xfrm>
+            <a:off x="7541285" y="1901952"/>
+            <a:ext cx="914400" cy="914400"/>
           </a:xfrm>
           <a:prstGeom prst="rect">
             <a:avLst/>
@@ -10020,28 +10142,50 @@
           <a:bodyPr wrap="square" lIns="0" tIns="0" rIns="0" bIns="0" rtlCol="0" anchor="ctr"/>
           <a:lstStyle/>
           <a:p>
-            <a:pPr indent="0" marL="0">
-              <a:buNone/>
-            </a:pPr>
-            <a:r>
-              <a:rPr lang="en-US" sz="1400" b="1" dirty="0">
-                <a:solidFill>
-                  <a:srgbClr val="123A40"/>
+            <a:pPr algn="ctr" indent="0" marL="0">
+              <a:buNone/>
+            </a:pPr>
+            <a:r>
+              <a:rPr lang="en-US" sz="2200" b="1" dirty="0">
+                <a:solidFill>
+                  <a:srgbClr val="1F6F68"/>
                 </a:solidFill>
                 <a:latin typeface="Cambria" pitchFamily="34" charset="0"/>
                 <a:ea typeface="Cambria" pitchFamily="34" charset="-122"/>
                 <a:cs typeface="Cambria" pitchFamily="34" charset="-120"/>
               </a:rPr>
-              <a:t>Фамилия</a:t>
-            </a:r>
-            <a:endParaRPr lang="en-US" sz="1400" dirty="0"/>
-          </a:p>
+              <a:t>ММ</a:t>
+            </a:r>
+            <a:endParaRPr lang="en-US" sz="2200" dirty="0"/>
+          </a:p>
+        </p:txBody>
+      </p:sp>
+      <p:sp>
+        <p:nvSpPr>
+          <p:cNvPr id="27" name="Text 25"/>
+          <p:cNvSpPr txBox="1"/>
+          <p:nvPr/>
+        </p:nvSpPr>
+        <p:spPr>
+          <a:xfrm>
+            <a:off x="7541285" y="3044952"/>
+            <a:ext cx="1709928" cy="347472"/>
+          </a:xfrm>
+          <a:prstGeom prst="rect">
+            <a:avLst/>
+          </a:prstGeom>
+          <a:noFill/>
+          <a:ln/>
+        </p:spPr>
+        <p:txBody>
+          <a:bodyPr wrap="square" lIns="0" tIns="0" rIns="0" bIns="0" rtlCol="0" anchor="t"/>
+          <a:lstStyle/>
           <a:p>
             <a:pPr indent="0" marL="0">
               <a:buNone/>
             </a:pPr>
             <a:r>
-              <a:rPr lang="en-US" sz="1400" b="1" dirty="0">
+              <a:rPr lang="en-US" sz="1600" b="1" dirty="0">
                 <a:solidFill>
                   <a:srgbClr val="123A40"/>
                 </a:solidFill>
@@ -10049,22 +10193,22 @@
                 <a:ea typeface="Cambria" pitchFamily="34" charset="-122"/>
                 <a:cs typeface="Cambria" pitchFamily="34" charset="-120"/>
               </a:rPr>
-              <a:t>Имя Отчество</a:t>
-            </a:r>
-            <a:endParaRPr lang="en-US" sz="1400" dirty="0"/>
-          </a:p>
-        </p:txBody>
-      </p:sp>
-      <p:sp>
-        <p:nvSpPr>
-          <p:cNvPr id="27" name="Text 22"/>
-          <p:cNvSpPr txBox="1"/>
-          <p:nvPr/>
-        </p:nvSpPr>
-        <p:spPr>
-          <a:xfrm>
-            <a:off x="5239512" y="5084064"/>
-            <a:ext cx="2743200" cy="256032"/>
+              <a:t>Мурадисинов</a:t>
+            </a:r>
+            <a:endParaRPr lang="en-US" sz="1600" dirty="0"/>
+          </a:p>
+        </p:txBody>
+      </p:sp>
+      <p:sp>
+        <p:nvSpPr>
+          <p:cNvPr id="28" name="Text 26"/>
+          <p:cNvSpPr txBox="1"/>
+          <p:nvPr/>
+        </p:nvSpPr>
+        <p:spPr>
+          <a:xfrm>
+            <a:off x="7541285" y="3392424"/>
+            <a:ext cx="1709928" cy="548640"/>
           </a:xfrm>
           <a:prstGeom prst="rect">
             <a:avLst/>
@@ -10080,30 +10224,30 @@
               <a:buNone/>
             </a:pPr>
             <a:r>
-              <a:rPr lang="en-US" sz="1000" b="1" spc="150" kern="0" dirty="0">
-                <a:solidFill>
-                  <a:srgbClr val="1F6F68"/>
+              <a:rPr lang="en-US" sz="1300" dirty="0">
+                <a:solidFill>
+                  <a:srgbClr val="16252B"/>
                 </a:solidFill>
                 <a:latin typeface="Calibri" pitchFamily="34" charset="0"/>
                 <a:ea typeface="Calibri" pitchFamily="34" charset="-122"/>
                 <a:cs typeface="Calibri" pitchFamily="34" charset="-120"/>
               </a:rPr>
-              <a:t>РОЛЬ В ПРОЕКТЕ</a:t>
-            </a:r>
-            <a:endParaRPr lang="en-US" sz="1000" dirty="0"/>
-          </a:p>
-        </p:txBody>
-      </p:sp>
-      <p:sp>
-        <p:nvSpPr>
-          <p:cNvPr id="28" name="Text 23"/>
-          <p:cNvSpPr txBox="1"/>
-          <p:nvPr/>
-        </p:nvSpPr>
-        <p:spPr>
-          <a:xfrm>
-            <a:off x="5239512" y="5358384"/>
-            <a:ext cx="2743200" cy="457200"/>
+              <a:t>Мурадисин Идрисович</a:t>
+            </a:r>
+            <a:endParaRPr lang="en-US" sz="1300" dirty="0"/>
+          </a:p>
+        </p:txBody>
+      </p:sp>
+      <p:sp>
+        <p:nvSpPr>
+          <p:cNvPr id="29" name="Text 27"/>
+          <p:cNvSpPr txBox="1"/>
+          <p:nvPr/>
+        </p:nvSpPr>
+        <p:spPr>
+          <a:xfrm>
+            <a:off x="7541285" y="4023360"/>
+            <a:ext cx="1755648" cy="411480"/>
           </a:xfrm>
           <a:prstGeom prst="rect">
             <a:avLst/>
@@ -10119,34 +10263,34 @@
               <a:buNone/>
             </a:pPr>
             <a:r>
-              <a:rPr lang="en-US" sz="1200" dirty="0">
-                <a:solidFill>
-                  <a:srgbClr val="5A6B71"/>
+              <a:rPr lang="en-US" sz="950" b="1" spc="120" kern="0" dirty="0">
+                <a:solidFill>
+                  <a:srgbClr val="1F6F68"/>
                 </a:solidFill>
                 <a:latin typeface="Calibri" pitchFamily="34" charset="0"/>
                 <a:ea typeface="Calibri" pitchFamily="34" charset="-122"/>
                 <a:cs typeface="Calibri" pitchFamily="34" charset="-120"/>
               </a:rPr>
-              <a:t>Чем занимается в команде</a:t>
-            </a:r>
-            <a:endParaRPr lang="en-US" sz="1200" dirty="0"/>
-          </a:p>
-        </p:txBody>
-      </p:sp>
-      <p:sp>
-        <p:nvSpPr>
-          <p:cNvPr id="29" name="Shape 24"/>
+              <a:t>МЕДИК</a:t>
+            </a:r>
+            <a:endParaRPr lang="en-US" sz="950" dirty="0"/>
+          </a:p>
+        </p:txBody>
+      </p:sp>
+      <p:sp>
+        <p:nvSpPr>
+          <p:cNvPr id="30" name="Shape 28"/>
           <p:cNvSpPr/>
           <p:nvPr/>
         </p:nvSpPr>
         <p:spPr>
           <a:xfrm>
-            <a:off x="8339328" y="3849624"/>
-            <a:ext cx="3200400" cy="2103120"/>
+            <a:off x="9567367" y="1627632"/>
+            <a:ext cx="2075688" cy="3520440"/>
           </a:xfrm>
           <a:prstGeom prst="roundRect">
             <a:avLst>
-              <a:gd name="adj" fmla="val 3478"/>
+              <a:gd name="adj" fmla="val 3524"/>
             </a:avLst>
           </a:prstGeom>
           <a:solidFill>
@@ -10162,14 +10306,14 @@
       </p:sp>
       <p:sp>
         <p:nvSpPr>
-          <p:cNvPr id="30" name="Shape 25"/>
+          <p:cNvPr id="31" name="Shape 29"/>
           <p:cNvSpPr/>
           <p:nvPr/>
         </p:nvSpPr>
         <p:spPr>
           <a:xfrm>
-            <a:off x="8595360" y="4123944"/>
-            <a:ext cx="777240" cy="777240"/>
+            <a:off x="9795967" y="1901952"/>
+            <a:ext cx="914400" cy="914400"/>
           </a:xfrm>
           <a:prstGeom prst="ellipse">
             <a:avLst/>
@@ -10185,24 +10329,232 @@
           </a:ln>
         </p:spPr>
       </p:sp>
+      <p:sp>
+        <p:nvSpPr>
+          <p:cNvPr id="32" name="Text 30"/>
+          <p:cNvSpPr txBox="1"/>
+          <p:nvPr/>
+        </p:nvSpPr>
+        <p:spPr>
+          <a:xfrm>
+            <a:off x="9795967" y="1901952"/>
+            <a:ext cx="914400" cy="914400"/>
+          </a:xfrm>
+          <a:prstGeom prst="rect">
+            <a:avLst/>
+          </a:prstGeom>
+          <a:noFill/>
+          <a:ln/>
+        </p:spPr>
+        <p:txBody>
+          <a:bodyPr wrap="square" lIns="0" tIns="0" rIns="0" bIns="0" rtlCol="0" anchor="ctr"/>
+          <a:lstStyle/>
+          <a:p>
+            <a:pPr algn="ctr" indent="0" marL="0">
+              <a:buNone/>
+            </a:pPr>
+            <a:r>
+              <a:rPr lang="en-US" sz="2200" b="1" dirty="0">
+                <a:solidFill>
+                  <a:srgbClr val="1F6F68"/>
+                </a:solidFill>
+                <a:latin typeface="Cambria" pitchFamily="34" charset="0"/>
+                <a:ea typeface="Cambria" pitchFamily="34" charset="-122"/>
+                <a:cs typeface="Cambria" pitchFamily="34" charset="-120"/>
+              </a:rPr>
+              <a:t>ИГ</a:t>
+            </a:r>
+            <a:endParaRPr lang="en-US" sz="2200" dirty="0"/>
+          </a:p>
+        </p:txBody>
+      </p:sp>
+      <p:sp>
+        <p:nvSpPr>
+          <p:cNvPr id="33" name="Text 31"/>
+          <p:cNvSpPr txBox="1"/>
+          <p:nvPr/>
+        </p:nvSpPr>
+        <p:spPr>
+          <a:xfrm>
+            <a:off x="9795967" y="3044952"/>
+            <a:ext cx="1709928" cy="347472"/>
+          </a:xfrm>
+          <a:prstGeom prst="rect">
+            <a:avLst/>
+          </a:prstGeom>
+          <a:noFill/>
+          <a:ln/>
+        </p:spPr>
+        <p:txBody>
+          <a:bodyPr wrap="square" lIns="0" tIns="0" rIns="0" bIns="0" rtlCol="0" anchor="t"/>
+          <a:lstStyle/>
+          <a:p>
+            <a:pPr indent="0" marL="0">
+              <a:buNone/>
+            </a:pPr>
+            <a:r>
+              <a:rPr lang="en-US" sz="1600" b="1" dirty="0">
+                <a:solidFill>
+                  <a:srgbClr val="123A40"/>
+                </a:solidFill>
+                <a:latin typeface="Cambria" pitchFamily="34" charset="0"/>
+                <a:ea typeface="Cambria" pitchFamily="34" charset="-122"/>
+                <a:cs typeface="Cambria" pitchFamily="34" charset="-120"/>
+              </a:rPr>
+              <a:t>Гайнатуллин</a:t>
+            </a:r>
+            <a:endParaRPr lang="en-US" sz="1600" dirty="0"/>
+          </a:p>
+        </p:txBody>
+      </p:sp>
+      <p:sp>
+        <p:nvSpPr>
+          <p:cNvPr id="34" name="Text 32"/>
+          <p:cNvSpPr txBox="1"/>
+          <p:nvPr/>
+        </p:nvSpPr>
+        <p:spPr>
+          <a:xfrm>
+            <a:off x="9795967" y="3392424"/>
+            <a:ext cx="1709928" cy="548640"/>
+          </a:xfrm>
+          <a:prstGeom prst="rect">
+            <a:avLst/>
+          </a:prstGeom>
+          <a:noFill/>
+          <a:ln/>
+        </p:spPr>
+        <p:txBody>
+          <a:bodyPr wrap="square" lIns="0" tIns="0" rIns="0" bIns="0" rtlCol="0" anchor="t"/>
+          <a:lstStyle/>
+          <a:p>
+            <a:pPr indent="0" marL="0">
+              <a:buNone/>
+            </a:pPr>
+            <a:r>
+              <a:rPr lang="en-US" sz="1300" dirty="0">
+                <a:solidFill>
+                  <a:srgbClr val="16252B"/>
+                </a:solidFill>
+                <a:latin typeface="Calibri" pitchFamily="34" charset="0"/>
+                <a:ea typeface="Calibri" pitchFamily="34" charset="-122"/>
+                <a:cs typeface="Calibri" pitchFamily="34" charset="-120"/>
+              </a:rPr>
+              <a:t>Ильназ Рамилевич</a:t>
+            </a:r>
+            <a:endParaRPr lang="en-US" sz="1300" dirty="0"/>
+          </a:p>
+        </p:txBody>
+      </p:sp>
+      <p:sp>
+        <p:nvSpPr>
+          <p:cNvPr id="35" name="Text 33"/>
+          <p:cNvSpPr txBox="1"/>
+          <p:nvPr/>
+        </p:nvSpPr>
+        <p:spPr>
+          <a:xfrm>
+            <a:off x="9795967" y="4023360"/>
+            <a:ext cx="1755648" cy="411480"/>
+          </a:xfrm>
+          <a:prstGeom prst="rect">
+            <a:avLst/>
+          </a:prstGeom>
+          <a:noFill/>
+          <a:ln/>
+        </p:spPr>
+        <p:txBody>
+          <a:bodyPr wrap="square" lIns="0" tIns="0" rIns="0" bIns="0" rtlCol="0" anchor="t"/>
+          <a:lstStyle/>
+          <a:p>
+            <a:pPr indent="0" marL="0">
+              <a:buNone/>
+            </a:pPr>
+            <a:r>
+              <a:rPr lang="en-US" sz="950" b="1" spc="120" kern="0" dirty="0">
+                <a:solidFill>
+                  <a:srgbClr val="1F6F68"/>
+                </a:solidFill>
+                <a:latin typeface="Calibri" pitchFamily="34" charset="0"/>
+                <a:ea typeface="Calibri" pitchFamily="34" charset="-122"/>
+                <a:cs typeface="Calibri" pitchFamily="34" charset="-120"/>
+              </a:rPr>
+              <a:t>МЕДИК</a:t>
+            </a:r>
+            <a:endParaRPr lang="en-US" sz="950" dirty="0"/>
+          </a:p>
+        </p:txBody>
+      </p:sp>
+      <p:sp>
+        <p:nvSpPr>
+          <p:cNvPr id="36" name="Shape 34"/>
+          <p:cNvSpPr/>
+          <p:nvPr/>
+        </p:nvSpPr>
+        <p:spPr>
+          <a:xfrm>
+            <a:off x="548640" y="5376672"/>
+            <a:ext cx="11094415" cy="603504"/>
+          </a:xfrm>
+          <a:prstGeom prst="roundRect">
+            <a:avLst>
+              <a:gd name="adj" fmla="val 12121"/>
+            </a:avLst>
+          </a:prstGeom>
+          <a:solidFill>
+            <a:srgbClr val="F1F5F4"/>
+          </a:solidFill>
+          <a:ln w="12700">
+            <a:solidFill>
+              <a:srgbClr val="F1F5F4"/>
+            </a:solidFill>
+            <a:prstDash val="solid"/>
+          </a:ln>
+        </p:spPr>
+      </p:sp>
+      <p:sp>
+        <p:nvSpPr>
+          <p:cNvPr id="37" name="Shape 35"/>
+          <p:cNvSpPr/>
+          <p:nvPr/>
+        </p:nvSpPr>
+        <p:spPr>
+          <a:xfrm>
+            <a:off x="713232" y="5449824"/>
+            <a:ext cx="457200" cy="457200"/>
+          </a:xfrm>
+          <a:prstGeom prst="ellipse">
+            <a:avLst/>
+          </a:prstGeom>
+          <a:solidFill>
+            <a:srgbClr val="FFFFFF"/>
+          </a:solidFill>
+          <a:ln w="12700">
+            <a:solidFill>
+              <a:srgbClr val="FFFFFF"/>
+            </a:solidFill>
+            <a:prstDash val="solid"/>
+          </a:ln>
+        </p:spPr>
+      </p:sp>
       <p:pic>
         <p:nvPicPr>
-          <p:cNvPr id="31" name="Image 3" descr="preencoded.png">    </p:cNvPr>
+          <p:cNvPr id="38" name="Image 0" descr="preencoded.png">    </p:cNvPr>
           <p:cNvPicPr>
             <a:picLocks noChangeAspect="1"/>
           </p:cNvPicPr>
           <p:nvPr/>
         </p:nvPicPr>
         <p:blipFill>
-          <a:blip r:embed="rId4"/>
+          <a:blip r:embed="rId1"/>
           <a:stretch>
             <a:fillRect/>
           </a:stretch>
         </p:blipFill>
         <p:spPr>
           <a:xfrm>
-            <a:off x="8778240" y="4306824"/>
-            <a:ext cx="411480" cy="411480"/>
+            <a:off x="836676" y="5573268"/>
+            <a:ext cx="210312" cy="210312"/>
           </a:xfrm>
           <a:prstGeom prst="rect">
             <a:avLst/>
@@ -10211,14 +10563,14 @@
       </p:pic>
       <p:sp>
         <p:nvSpPr>
-          <p:cNvPr id="32" name="Text 26"/>
-          <p:cNvSpPr txBox="1"/>
-          <p:nvPr/>
-        </p:nvSpPr>
-        <p:spPr>
-          <a:xfrm>
-            <a:off x="9528048" y="4123944"/>
-            <a:ext cx="1920240" cy="777240"/>
+          <p:cNvPr id="39" name="Text 36"/>
+          <p:cNvSpPr txBox="1"/>
+          <p:nvPr/>
+        </p:nvSpPr>
+        <p:spPr>
+          <a:xfrm>
+            <a:off x="1325880" y="5376672"/>
+            <a:ext cx="10180015" cy="603504"/>
           </a:xfrm>
           <a:prstGeom prst="rect">
             <a:avLst/>
@@ -10234,112 +10586,31 @@
               <a:buNone/>
             </a:pPr>
             <a:r>
-              <a:rPr lang="en-US" sz="1400" b="1" dirty="0">
+              <a:rPr lang="en-US" sz="1300" b="1" dirty="0">
                 <a:solidFill>
                   <a:srgbClr val="123A40"/>
-                </a:solidFill>
-                <a:latin typeface="Cambria" pitchFamily="34" charset="0"/>
-                <a:ea typeface="Cambria" pitchFamily="34" charset="-122"/>
-                <a:cs typeface="Cambria" pitchFamily="34" charset="-120"/>
-              </a:rPr>
-              <a:t>Фамилия</a:t>
-            </a:r>
-            <a:endParaRPr lang="en-US" sz="1400" dirty="0"/>
-          </a:p>
-          <a:p>
-            <a:pPr indent="0" marL="0">
-              <a:buNone/>
-            </a:pPr>
-            <a:r>
-              <a:rPr lang="en-US" sz="1400" b="1" dirty="0">
-                <a:solidFill>
-                  <a:srgbClr val="123A40"/>
-                </a:solidFill>
-                <a:latin typeface="Cambria" pitchFamily="34" charset="0"/>
-                <a:ea typeface="Cambria" pitchFamily="34" charset="-122"/>
-                <a:cs typeface="Cambria" pitchFamily="34" charset="-120"/>
-              </a:rPr>
-              <a:t>Имя Отчество</a:t>
-            </a:r>
-            <a:endParaRPr lang="en-US" sz="1400" dirty="0"/>
-          </a:p>
-        </p:txBody>
-      </p:sp>
-      <p:sp>
-        <p:nvSpPr>
-          <p:cNvPr id="33" name="Text 27"/>
-          <p:cNvSpPr txBox="1"/>
-          <p:nvPr/>
-        </p:nvSpPr>
-        <p:spPr>
-          <a:xfrm>
-            <a:off x="8595360" y="5084064"/>
-            <a:ext cx="2743200" cy="256032"/>
-          </a:xfrm>
-          <a:prstGeom prst="rect">
-            <a:avLst/>
-          </a:prstGeom>
-          <a:noFill/>
-          <a:ln/>
-        </p:spPr>
-        <p:txBody>
-          <a:bodyPr wrap="square" lIns="0" tIns="0" rIns="0" bIns="0" rtlCol="0" anchor="t"/>
-          <a:lstStyle/>
-          <a:p>
-            <a:pPr indent="0" marL="0">
-              <a:buNone/>
-            </a:pPr>
-            <a:r>
-              <a:rPr lang="en-US" sz="1000" b="1" spc="150" kern="0" dirty="0">
-                <a:solidFill>
-                  <a:srgbClr val="1F6F68"/>
                 </a:solidFill>
                 <a:latin typeface="Calibri" pitchFamily="34" charset="0"/>
                 <a:ea typeface="Calibri" pitchFamily="34" charset="-122"/>
                 <a:cs typeface="Calibri" pitchFamily="34" charset="-120"/>
               </a:rPr>
-              <a:t>РОЛЬ В ПРОЕКТЕ</a:t>
-            </a:r>
-            <a:endParaRPr lang="en-US" sz="1000" dirty="0"/>
-          </a:p>
-        </p:txBody>
-      </p:sp>
-      <p:sp>
-        <p:nvSpPr>
-          <p:cNvPr id="34" name="Text 28"/>
-          <p:cNvSpPr txBox="1"/>
-          <p:nvPr/>
-        </p:nvSpPr>
-        <p:spPr>
-          <a:xfrm>
-            <a:off x="8595360" y="5358384"/>
-            <a:ext cx="2743200" cy="457200"/>
-          </a:xfrm>
-          <a:prstGeom prst="rect">
-            <a:avLst/>
-          </a:prstGeom>
-          <a:noFill/>
-          <a:ln/>
-        </p:spPr>
-        <p:txBody>
-          <a:bodyPr wrap="square" lIns="0" tIns="0" rIns="0" bIns="0" rtlCol="0" anchor="t"/>
-          <a:lstStyle/>
-          <a:p>
+              <a:t>ФГБОУ ВО «Казанский государственный медицинский университет» Минздрава России</a:t>
+            </a:r>
             <a:pPr indent="0" marL="0">
               <a:buNone/>
             </a:pPr>
             <a:r>
-              <a:rPr lang="en-US" sz="1200" dirty="0">
-                <a:solidFill>
-                  <a:srgbClr val="5A6B71"/>
+              <a:rPr lang="en-US" sz="1300" dirty="0">
+                <a:solidFill>
+                  <a:srgbClr val="16252B"/>
                 </a:solidFill>
                 <a:latin typeface="Calibri" pitchFamily="34" charset="0"/>
                 <a:ea typeface="Calibri" pitchFamily="34" charset="-122"/>
                 <a:cs typeface="Calibri" pitchFamily="34" charset="-120"/>
               </a:rPr>
-              <a:t>Чем занимается в команде</a:t>
-            </a:r>
-            <a:endParaRPr lang="en-US" sz="1200" dirty="0"/>
+              <a:t> · педиатрический факультет</a:t>
+            </a:r>
+            <a:endParaRPr lang="en-US" sz="1300" dirty="0"/>
           </a:p>
         </p:txBody>
       </p:sp>
@@ -11260,523 +11531,6 @@
           <a:chExt cx="0" cy="0"/>
         </a:xfrm>
       </p:grpSpPr>
-      <p:pic>
-        <p:nvPicPr>
-          <p:cNvPr id="2" name="Image 0" descr="preencoded.png">    </p:cNvPr>
-          <p:cNvPicPr>
-            <a:picLocks noChangeAspect="1"/>
-          </p:cNvPicPr>
-          <p:nvPr/>
-        </p:nvPicPr>
-        <p:blipFill>
-          <a:blip r:embed="rId1"/>
-          <a:stretch>
-            <a:fillRect/>
-          </a:stretch>
-        </p:blipFill>
-        <p:spPr>
-          <a:xfrm>
-            <a:off x="548640" y="640080"/>
-            <a:ext cx="822960" cy="822960"/>
-          </a:xfrm>
-          <a:prstGeom prst="rect">
-            <a:avLst/>
-          </a:prstGeom>
-        </p:spPr>
-      </p:pic>
-      <p:sp>
-        <p:nvSpPr>
-          <p:cNvPr id="3" name="Text 0"/>
-          <p:cNvSpPr txBox="1"/>
-          <p:nvPr/>
-        </p:nvSpPr>
-        <p:spPr>
-          <a:xfrm>
-            <a:off x="1554480" y="640080"/>
-            <a:ext cx="5486400" cy="822960"/>
-          </a:xfrm>
-          <a:prstGeom prst="rect">
-            <a:avLst/>
-          </a:prstGeom>
-          <a:noFill/>
-          <a:ln/>
-        </p:spPr>
-        <p:txBody>
-          <a:bodyPr wrap="square" lIns="0" tIns="0" rIns="0" bIns="0" rtlCol="0" anchor="ctr"/>
-          <a:lstStyle/>
-          <a:p>
-            <a:pPr indent="0" marL="0">
-              <a:buNone/>
-            </a:pPr>
-            <a:r>
-              <a:rPr lang="en-US" sz="2600" b="1" dirty="0">
-                <a:solidFill>
-                  <a:srgbClr val="FFFFFF"/>
-                </a:solidFill>
-                <a:latin typeface="Cambria" pitchFamily="34" charset="0"/>
-                <a:ea typeface="Cambria" pitchFamily="34" charset="-122"/>
-                <a:cs typeface="Cambria" pitchFamily="34" charset="-120"/>
-              </a:rPr>
-              <a:t>Клинический компас</a:t>
-            </a:r>
-            <a:endParaRPr lang="en-US" sz="2600" dirty="0"/>
-          </a:p>
-        </p:txBody>
-      </p:sp>
-      <p:sp>
-        <p:nvSpPr>
-          <p:cNvPr id="4" name="Text 1"/>
-          <p:cNvSpPr txBox="1"/>
-          <p:nvPr/>
-        </p:nvSpPr>
-        <p:spPr>
-          <a:xfrm>
-            <a:off x="548640" y="2011680"/>
-            <a:ext cx="9601200" cy="1737360"/>
-          </a:xfrm>
-          <a:prstGeom prst="rect">
-            <a:avLst/>
-          </a:prstGeom>
-          <a:noFill/>
-          <a:ln/>
-        </p:spPr>
-        <p:txBody>
-          <a:bodyPr wrap="square" lIns="0" tIns="0" rIns="0" bIns="0" rtlCol="0" anchor="t"/>
-          <a:lstStyle/>
-          <a:p>
-            <a:pPr indent="0" marL="0">
-              <a:buNone/>
-            </a:pPr>
-            <a:r>
-              <a:rPr lang="en-US" sz="3200" dirty="0">
-                <a:solidFill>
-                  <a:srgbClr val="FFFFFF"/>
-                </a:solidFill>
-                <a:latin typeface="Cambria" pitchFamily="34" charset="0"/>
-                <a:ea typeface="Cambria" pitchFamily="34" charset="-122"/>
-                <a:cs typeface="Cambria" pitchFamily="34" charset="-120"/>
-              </a:rPr>
-              <a:t>Врач за минуту видит, что изменилось у пациента между приёмами. Решение всегда остаётся за врачом.</a:t>
-            </a:r>
-            <a:endParaRPr lang="en-US" sz="3200" dirty="0"/>
-          </a:p>
-        </p:txBody>
-      </p:sp>
-      <p:sp>
-        <p:nvSpPr>
-          <p:cNvPr id="5" name="Text 2"/>
-          <p:cNvSpPr txBox="1"/>
-          <p:nvPr/>
-        </p:nvSpPr>
-        <p:spPr>
-          <a:xfrm>
-            <a:off x="548640" y="4069080"/>
-            <a:ext cx="2286000" cy="548640"/>
-          </a:xfrm>
-          <a:prstGeom prst="rect">
-            <a:avLst/>
-          </a:prstGeom>
-          <a:noFill/>
-          <a:ln/>
-        </p:spPr>
-        <p:txBody>
-          <a:bodyPr wrap="square" lIns="0" tIns="0" rIns="0" bIns="0" rtlCol="0" anchor="t"/>
-          <a:lstStyle/>
-          <a:p>
-            <a:pPr indent="0" marL="0">
-              <a:buNone/>
-            </a:pPr>
-            <a:r>
-              <a:rPr lang="en-US" sz="2800" b="1" dirty="0">
-                <a:solidFill>
-                  <a:srgbClr val="D9822B"/>
-                </a:solidFill>
-                <a:latin typeface="Cambria" pitchFamily="34" charset="0"/>
-                <a:ea typeface="Cambria" pitchFamily="34" charset="-122"/>
-                <a:cs typeface="Cambria" pitchFamily="34" charset="-120"/>
-              </a:rPr>
-              <a:t>588</a:t>
-            </a:r>
-            <a:endParaRPr lang="en-US" sz="2800" dirty="0"/>
-          </a:p>
-        </p:txBody>
-      </p:sp>
-      <p:sp>
-        <p:nvSpPr>
-          <p:cNvPr id="6" name="Text 3"/>
-          <p:cNvSpPr txBox="1"/>
-          <p:nvPr/>
-        </p:nvSpPr>
-        <p:spPr>
-          <a:xfrm>
-            <a:off x="548640" y="4617720"/>
-            <a:ext cx="2286000" cy="274320"/>
-          </a:xfrm>
-          <a:prstGeom prst="rect">
-            <a:avLst/>
-          </a:prstGeom>
-          <a:noFill/>
-          <a:ln/>
-        </p:spPr>
-        <p:txBody>
-          <a:bodyPr wrap="square" lIns="0" tIns="0" rIns="0" bIns="0" rtlCol="0" anchor="t"/>
-          <a:lstStyle/>
-          <a:p>
-            <a:pPr indent="0" marL="0">
-              <a:buNone/>
-            </a:pPr>
-            <a:r>
-              <a:rPr lang="en-US" sz="1200" dirty="0">
-                <a:solidFill>
-                  <a:srgbClr val="8FB9B2"/>
-                </a:solidFill>
-                <a:latin typeface="Calibri" pitchFamily="34" charset="0"/>
-                <a:ea typeface="Calibri" pitchFamily="34" charset="-122"/>
-                <a:cs typeface="Calibri" pitchFamily="34" charset="-120"/>
-              </a:rPr>
-              <a:t>автотестов</a:t>
-            </a:r>
-            <a:endParaRPr lang="en-US" sz="1200" dirty="0"/>
-          </a:p>
-        </p:txBody>
-      </p:sp>
-      <p:sp>
-        <p:nvSpPr>
-          <p:cNvPr id="7" name="Text 4"/>
-          <p:cNvSpPr txBox="1"/>
-          <p:nvPr/>
-        </p:nvSpPr>
-        <p:spPr>
-          <a:xfrm>
-            <a:off x="3017520" y="4069080"/>
-            <a:ext cx="2286000" cy="548640"/>
-          </a:xfrm>
-          <a:prstGeom prst="rect">
-            <a:avLst/>
-          </a:prstGeom>
-          <a:noFill/>
-          <a:ln/>
-        </p:spPr>
-        <p:txBody>
-          <a:bodyPr wrap="square" lIns="0" tIns="0" rIns="0" bIns="0" rtlCol="0" anchor="t"/>
-          <a:lstStyle/>
-          <a:p>
-            <a:pPr indent="0" marL="0">
-              <a:buNone/>
-            </a:pPr>
-            <a:r>
-              <a:rPr lang="en-US" sz="2800" b="1" dirty="0">
-                <a:solidFill>
-                  <a:srgbClr val="D9822B"/>
-                </a:solidFill>
-                <a:latin typeface="Cambria" pitchFamily="34" charset="0"/>
-                <a:ea typeface="Cambria" pitchFamily="34" charset="-122"/>
-                <a:cs typeface="Cambria" pitchFamily="34" charset="-120"/>
-              </a:rPr>
-              <a:t>95 %</a:t>
-            </a:r>
-            <a:endParaRPr lang="en-US" sz="2800" dirty="0"/>
-          </a:p>
-        </p:txBody>
-      </p:sp>
-      <p:sp>
-        <p:nvSpPr>
-          <p:cNvPr id="8" name="Text 5"/>
-          <p:cNvSpPr txBox="1"/>
-          <p:nvPr/>
-        </p:nvSpPr>
-        <p:spPr>
-          <a:xfrm>
-            <a:off x="3017520" y="4617720"/>
-            <a:ext cx="2286000" cy="274320"/>
-          </a:xfrm>
-          <a:prstGeom prst="rect">
-            <a:avLst/>
-          </a:prstGeom>
-          <a:noFill/>
-          <a:ln/>
-        </p:spPr>
-        <p:txBody>
-          <a:bodyPr wrap="square" lIns="0" tIns="0" rIns="0" bIns="0" rtlCol="0" anchor="t"/>
-          <a:lstStyle/>
-          <a:p>
-            <a:pPr indent="0" marL="0">
-              <a:buNone/>
-            </a:pPr>
-            <a:r>
-              <a:rPr lang="en-US" sz="1200" dirty="0">
-                <a:solidFill>
-                  <a:srgbClr val="8FB9B2"/>
-                </a:solidFill>
-                <a:latin typeface="Calibri" pitchFamily="34" charset="0"/>
-                <a:ea typeface="Calibri" pitchFamily="34" charset="-122"/>
-                <a:cs typeface="Calibri" pitchFamily="34" charset="-120"/>
-              </a:rPr>
-              <a:t>покрытие кода сервиса</a:t>
-            </a:r>
-            <a:endParaRPr lang="en-US" sz="1200" dirty="0"/>
-          </a:p>
-        </p:txBody>
-      </p:sp>
-      <p:sp>
-        <p:nvSpPr>
-          <p:cNvPr id="9" name="Text 6"/>
-          <p:cNvSpPr txBox="1"/>
-          <p:nvPr/>
-        </p:nvSpPr>
-        <p:spPr>
-          <a:xfrm>
-            <a:off x="5486400" y="4069080"/>
-            <a:ext cx="2286000" cy="548640"/>
-          </a:xfrm>
-          <a:prstGeom prst="rect">
-            <a:avLst/>
-          </a:prstGeom>
-          <a:noFill/>
-          <a:ln/>
-        </p:spPr>
-        <p:txBody>
-          <a:bodyPr wrap="square" lIns="0" tIns="0" rIns="0" bIns="0" rtlCol="0" anchor="t"/>
-          <a:lstStyle/>
-          <a:p>
-            <a:pPr indent="0" marL="0">
-              <a:buNone/>
-            </a:pPr>
-            <a:r>
-              <a:rPr lang="en-US" sz="2800" b="1" dirty="0">
-                <a:solidFill>
-                  <a:srgbClr val="D9822B"/>
-                </a:solidFill>
-                <a:latin typeface="Cambria" pitchFamily="34" charset="0"/>
-                <a:ea typeface="Cambria" pitchFamily="34" charset="-122"/>
-                <a:cs typeface="Cambria" pitchFamily="34" charset="-120"/>
-              </a:rPr>
-              <a:t>2</a:t>
-            </a:r>
-            <a:endParaRPr lang="en-US" sz="2800" dirty="0"/>
-          </a:p>
-        </p:txBody>
-      </p:sp>
-      <p:sp>
-        <p:nvSpPr>
-          <p:cNvPr id="10" name="Text 7"/>
-          <p:cNvSpPr txBox="1"/>
-          <p:nvPr/>
-        </p:nvSpPr>
-        <p:spPr>
-          <a:xfrm>
-            <a:off x="5486400" y="4617720"/>
-            <a:ext cx="2286000" cy="274320"/>
-          </a:xfrm>
-          <a:prstGeom prst="rect">
-            <a:avLst/>
-          </a:prstGeom>
-          <a:noFill/>
-          <a:ln/>
-        </p:spPr>
-        <p:txBody>
-          <a:bodyPr wrap="square" lIns="0" tIns="0" rIns="0" bIns="0" rtlCol="0" anchor="t"/>
-          <a:lstStyle/>
-          <a:p>
-            <a:pPr indent="0" marL="0">
-              <a:buNone/>
-            </a:pPr>
-            <a:r>
-              <a:rPr lang="en-US" sz="1200" dirty="0">
-                <a:solidFill>
-                  <a:srgbClr val="8FB9B2"/>
-                </a:solidFill>
-                <a:latin typeface="Calibri" pitchFamily="34" charset="0"/>
-                <a:ea typeface="Calibri" pitchFamily="34" charset="-122"/>
-                <a:cs typeface="Calibri" pitchFamily="34" charset="-120"/>
-              </a:rPr>
-              <a:t>кабинета: врач и пациент</a:t>
-            </a:r>
-            <a:endParaRPr lang="en-US" sz="1200" dirty="0"/>
-          </a:p>
-        </p:txBody>
-      </p:sp>
-      <p:sp>
-        <p:nvSpPr>
-          <p:cNvPr id="11" name="Text 8"/>
-          <p:cNvSpPr txBox="1"/>
-          <p:nvPr/>
-        </p:nvSpPr>
-        <p:spPr>
-          <a:xfrm>
-            <a:off x="7955280" y="4069080"/>
-            <a:ext cx="2286000" cy="548640"/>
-          </a:xfrm>
-          <a:prstGeom prst="rect">
-            <a:avLst/>
-          </a:prstGeom>
-          <a:noFill/>
-          <a:ln/>
-        </p:spPr>
-        <p:txBody>
-          <a:bodyPr wrap="square" lIns="0" tIns="0" rIns="0" bIns="0" rtlCol="0" anchor="t"/>
-          <a:lstStyle/>
-          <a:p>
-            <a:pPr indent="0" marL="0">
-              <a:buNone/>
-            </a:pPr>
-            <a:r>
-              <a:rPr lang="en-US" sz="2800" b="1" dirty="0">
-                <a:solidFill>
-                  <a:srgbClr val="D9822B"/>
-                </a:solidFill>
-                <a:latin typeface="Cambria" pitchFamily="34" charset="0"/>
-                <a:ea typeface="Cambria" pitchFamily="34" charset="-122"/>
-                <a:cs typeface="Cambria" pitchFamily="34" charset="-120"/>
-              </a:rPr>
-              <a:t>3</a:t>
-            </a:r>
-            <a:endParaRPr lang="en-US" sz="2800" dirty="0"/>
-          </a:p>
-        </p:txBody>
-      </p:sp>
-      <p:sp>
-        <p:nvSpPr>
-          <p:cNvPr id="12" name="Text 9"/>
-          <p:cNvSpPr txBox="1"/>
-          <p:nvPr/>
-        </p:nvSpPr>
-        <p:spPr>
-          <a:xfrm>
-            <a:off x="7955280" y="4617720"/>
-            <a:ext cx="2286000" cy="274320"/>
-          </a:xfrm>
-          <a:prstGeom prst="rect">
-            <a:avLst/>
-          </a:prstGeom>
-          <a:noFill/>
-          <a:ln/>
-        </p:spPr>
-        <p:txBody>
-          <a:bodyPr wrap="square" lIns="0" tIns="0" rIns="0" bIns="0" rtlCol="0" anchor="t"/>
-          <a:lstStyle/>
-          <a:p>
-            <a:pPr indent="0" marL="0">
-              <a:buNone/>
-            </a:pPr>
-            <a:r>
-              <a:rPr lang="en-US" sz="1200" dirty="0">
-                <a:solidFill>
-                  <a:srgbClr val="8FB9B2"/>
-                </a:solidFill>
-                <a:latin typeface="Calibri" pitchFamily="34" charset="0"/>
-                <a:ea typeface="Calibri" pitchFamily="34" charset="-122"/>
-                <a:cs typeface="Calibri" pitchFamily="34" charset="-120"/>
-              </a:rPr>
-              <a:t>проверенные анкеты</a:t>
-            </a:r>
-            <a:endParaRPr lang="en-US" sz="1200" dirty="0"/>
-          </a:p>
-        </p:txBody>
-      </p:sp>
-      <p:sp>
-        <p:nvSpPr>
-          <p:cNvPr id="13" name="Text 10"/>
-          <p:cNvSpPr txBox="1"/>
-          <p:nvPr/>
-        </p:nvSpPr>
-        <p:spPr>
-          <a:xfrm>
-            <a:off x="548640" y="5440680"/>
-            <a:ext cx="8229600" cy="457200"/>
-          </a:xfrm>
-          <a:prstGeom prst="rect">
-            <a:avLst/>
-          </a:prstGeom>
-          <a:noFill/>
-          <a:ln/>
-        </p:spPr>
-        <p:txBody>
-          <a:bodyPr wrap="square" lIns="0" tIns="0" rIns="0" bIns="0" rtlCol="0" anchor="t"/>
-          <a:lstStyle/>
-          <a:p>
-            <a:pPr indent="0" marL="0">
-              <a:buNone/>
-            </a:pPr>
-            <a:r>
-              <a:rPr lang="en-US" sz="2000" b="1" dirty="0">
-                <a:solidFill>
-                  <a:srgbClr val="FBEBD9"/>
-                </a:solidFill>
-                <a:latin typeface="Cambria" pitchFamily="34" charset="0"/>
-                <a:ea typeface="Cambria" pitchFamily="34" charset="-122"/>
-                <a:cs typeface="Cambria" pitchFamily="34" charset="-120"/>
-              </a:rPr>
-              <a:t>Спасибо! Готовы ответить на вопросы</a:t>
-            </a:r>
-            <a:endParaRPr lang="en-US" sz="2000" dirty="0"/>
-          </a:p>
-        </p:txBody>
-      </p:sp>
-      <p:sp>
-        <p:nvSpPr>
-          <p:cNvPr id="14" name="Text 11"/>
-          <p:cNvSpPr txBox="1"/>
-          <p:nvPr/>
-        </p:nvSpPr>
-        <p:spPr>
-          <a:xfrm>
-            <a:off x="548640" y="6263640"/>
-            <a:ext cx="8229600" cy="274320"/>
-          </a:xfrm>
-          <a:prstGeom prst="rect">
-            <a:avLst/>
-          </a:prstGeom>
-          <a:noFill/>
-          <a:ln/>
-        </p:spPr>
-        <p:txBody>
-          <a:bodyPr wrap="square" lIns="0" tIns="0" rIns="0" bIns="0" rtlCol="0" anchor="t"/>
-          <a:lstStyle/>
-          <a:p>
-            <a:pPr indent="0" marL="0">
-              <a:buNone/>
-            </a:pPr>
-            <a:r>
-              <a:rPr lang="en-US" sz="1000" dirty="0">
-                <a:solidFill>
-                  <a:srgbClr val="8FB9B2"/>
-                </a:solidFill>
-                <a:latin typeface="Calibri" pitchFamily="34" charset="0"/>
-                <a:ea typeface="Calibri" pitchFamily="34" charset="-122"/>
-                <a:cs typeface="Calibri" pitchFamily="34" charset="-120"/>
-              </a:rPr>
-              <a:t>Азамат Сибгатуллин и команда · кейс-чемпионат Авинейро · 2026</a:t>
-            </a:r>
-            <a:endParaRPr lang="en-US" sz="1000" dirty="0"/>
-          </a:p>
-        </p:txBody>
-      </p:sp>
-    </p:spTree>
-  </p:cSld>
-  <p:clrMapOvr>
-    <a:masterClrMapping/>
-  </p:clrMapOvr>
-</p:sld>
-</file>
-
-<file path=ppt/slides/slide17.xml><?xml version="1.0" encoding="utf-8"?>
-<p:sld xmlns:a="http://schemas.openxmlformats.org/drawingml/2006/main" xmlns:r="http://schemas.openxmlformats.org/officeDocument/2006/relationships" xmlns:p="http://schemas.openxmlformats.org/presentationml/2006/main">
-  <p:cSld name="Slide 17">
-    <p:spTree>
-      <p:nvGrpSpPr>
-        <p:cNvPr id="1" name=""/>
-        <p:cNvGrpSpPr/>
-        <p:nvPr/>
-      </p:nvGrpSpPr>
-      <p:grpSpPr>
-        <a:xfrm>
-          <a:off x="0" y="0"/>
-          <a:ext cx="0" cy="0"/>
-          <a:chOff x="0" y="0"/>
-          <a:chExt cx="0" cy="0"/>
-        </a:xfrm>
-      </p:grpSpPr>
       <p:sp>
         <p:nvSpPr>
           <p:cNvPr id="2" name="Shape 0"/>
@@ -11886,7 +11640,7 @@
       </p:sp>
       <p:graphicFrame>
         <p:nvGraphicFramePr>
-          <p:cNvPr id="18" name="Table 0"/>
+          <p:cNvPr id="17" name="Table 0"/>
           <p:cNvGraphicFramePr>
             <a:graphicFrameLocks noGrp="1"/>
           </p:cNvGraphicFramePr>
@@ -13811,6 +13565,810 @@
             <a:pPr algn="r"/>
             <a:fld id="{F7021451-1387-4CA6-816F-3879F97B5CBC}" type="slidenum">
               <a:rPr b="0" lang="en-US"/>
+              <a:t>16</a:t>
+            </a:fld>
+            <a:endParaRPr lang="en-US"/>
+          </a:p>
+        </p:txBody>
+      </p:sp>
+    </p:spTree>
+  </p:cSld>
+  <p:clrMapOvr>
+    <a:masterClrMapping/>
+  </p:clrMapOvr>
+</p:sld>
+</file>
+
+<file path=ppt/slides/slide17.xml><?xml version="1.0" encoding="utf-8"?>
+<p:sld xmlns:a="http://schemas.openxmlformats.org/drawingml/2006/main" xmlns:r="http://schemas.openxmlformats.org/officeDocument/2006/relationships" xmlns:p="http://schemas.openxmlformats.org/presentationml/2006/main">
+  <p:cSld name="Slide 17">
+    <p:spTree>
+      <p:nvGrpSpPr>
+        <p:cNvPr id="1" name=""/>
+        <p:cNvGrpSpPr/>
+        <p:nvPr/>
+      </p:nvGrpSpPr>
+      <p:grpSpPr>
+        <a:xfrm>
+          <a:off x="0" y="0"/>
+          <a:ext cx="0" cy="0"/>
+          <a:chOff x="0" y="0"/>
+          <a:chExt cx="0" cy="0"/>
+        </a:xfrm>
+      </p:grpSpPr>
+      <p:sp>
+        <p:nvSpPr>
+          <p:cNvPr id="2" name="Shape 0"/>
+          <p:cNvSpPr/>
+          <p:nvPr/>
+        </p:nvSpPr>
+        <p:spPr>
+          <a:xfrm>
+            <a:off x="548640" y="384048"/>
+            <a:ext cx="2362810" cy="256032"/>
+          </a:xfrm>
+          <a:prstGeom prst="roundRect">
+            <a:avLst>
+              <a:gd name="adj" fmla="val 50000"/>
+            </a:avLst>
+          </a:prstGeom>
+          <a:solidFill>
+            <a:srgbClr val="DCEBE8"/>
+          </a:solidFill>
+          <a:ln w="12700">
+            <a:solidFill>
+              <a:srgbClr val="DCEBE8"/>
+            </a:solidFill>
+            <a:prstDash val="solid"/>
+          </a:ln>
+        </p:spPr>
+      </p:sp>
+      <p:sp>
+        <p:nvSpPr>
+          <p:cNvPr id="3" name="Text 1"/>
+          <p:cNvSpPr txBox="1"/>
+          <p:nvPr/>
+        </p:nvSpPr>
+        <p:spPr>
+          <a:xfrm>
+            <a:off x="548640" y="384048"/>
+            <a:ext cx="2362810" cy="256032"/>
+          </a:xfrm>
+          <a:prstGeom prst="rect">
+            <a:avLst/>
+          </a:prstGeom>
+          <a:noFill/>
+          <a:ln/>
+        </p:spPr>
+        <p:txBody>
+          <a:bodyPr wrap="square" lIns="0" tIns="0" rIns="0" bIns="0" rtlCol="0" anchor="ctr"/>
+          <a:lstStyle/>
+          <a:p>
+            <a:pPr algn="ctr" indent="0" marL="0">
+              <a:buNone/>
+            </a:pPr>
+            <a:r>
+              <a:rPr lang="en-US" sz="900" b="1" spc="150" kern="0" dirty="0">
+                <a:solidFill>
+                  <a:srgbClr val="1F6F68"/>
+                </a:solidFill>
+                <a:latin typeface="Calibri" pitchFamily="34" charset="0"/>
+                <a:ea typeface="Calibri" pitchFamily="34" charset="-122"/>
+                <a:cs typeface="Calibri" pitchFamily="34" charset="-120"/>
+              </a:rPr>
+              <a:t>ПРИЛОЖЕНИЕ · ИСТОЧНИКИ</a:t>
+            </a:r>
+            <a:endParaRPr lang="en-US" sz="900" dirty="0"/>
+          </a:p>
+        </p:txBody>
+      </p:sp>
+      <p:sp>
+        <p:nvSpPr>
+          <p:cNvPr id="4" name="Text 2"/>
+          <p:cNvSpPr/>
+          <p:nvPr>
+            <p:ph idx="103" type="title" hasCustomPrompt="1"/>
+          </p:nvPr>
+        </p:nvSpPr>
+        <p:spPr>
+          <a:xfrm>
+            <a:off x="548640" y="731520"/>
+            <a:ext cx="9418320" cy="658368"/>
+          </a:xfrm>
+          <a:prstGeom prst="rect">
+            <a:avLst/>
+          </a:prstGeom>
+          <a:noFill/>
+          <a:ln/>
+        </p:spPr>
+        <p:txBody>
+          <a:bodyPr wrap="square" lIns="0" tIns="0" rIns="0" bIns="0" rtlCol="0" anchor="t"/>
+          <a:lstStyle/>
+          <a:p>
+            <a:pPr algn="l" indent="0" marL="0">
+              <a:buNone/>
+            </a:pPr>
+            <a:r>
+              <a:rPr lang="en-US" sz="2800" b="1" dirty="0">
+                <a:solidFill>
+                  <a:srgbClr val="123A40"/>
+                </a:solidFill>
+                <a:latin typeface="Cambria" pitchFamily="34" charset="0"/>
+                <a:ea typeface="Cambria" pitchFamily="34" charset="-122"/>
+                <a:cs typeface="Cambria" pitchFamily="34" charset="-120"/>
+              </a:rPr>
+              <a:t>Источники цифр и норм</a:t>
+            </a:r>
+            <a:endParaRPr lang="en-US" sz="2800" dirty="0"/>
+          </a:p>
+        </p:txBody>
+      </p:sp>
+      <p:sp>
+        <p:nvSpPr>
+          <p:cNvPr id="5" name="Text 3"/>
+          <p:cNvSpPr txBox="1"/>
+          <p:nvPr/>
+        </p:nvSpPr>
+        <p:spPr>
+          <a:xfrm>
+            <a:off x="548640" y="1600200"/>
+            <a:ext cx="320040" cy="457200"/>
+          </a:xfrm>
+          <a:prstGeom prst="rect">
+            <a:avLst/>
+          </a:prstGeom>
+          <a:noFill/>
+          <a:ln/>
+        </p:spPr>
+        <p:txBody>
+          <a:bodyPr wrap="square" lIns="0" tIns="0" rIns="0" bIns="0" rtlCol="0" anchor="t"/>
+          <a:lstStyle/>
+          <a:p>
+            <a:pPr indent="0" marL="0">
+              <a:buNone/>
+            </a:pPr>
+            <a:r>
+              <a:rPr lang="en-US" sz="1300" b="1" dirty="0">
+                <a:solidFill>
+                  <a:srgbClr val="1F6F68"/>
+                </a:solidFill>
+                <a:latin typeface="Cambria" pitchFamily="34" charset="0"/>
+                <a:ea typeface="Cambria" pitchFamily="34" charset="-122"/>
+                <a:cs typeface="Cambria" pitchFamily="34" charset="-120"/>
+              </a:rPr>
+              <a:t>1</a:t>
+            </a:r>
+            <a:endParaRPr lang="en-US" sz="1300" dirty="0"/>
+          </a:p>
+        </p:txBody>
+      </p:sp>
+      <p:sp>
+        <p:nvSpPr>
+          <p:cNvPr id="6" name="Text 4"/>
+          <p:cNvSpPr txBox="1"/>
+          <p:nvPr/>
+        </p:nvSpPr>
+        <p:spPr>
+          <a:xfrm>
+            <a:off x="960120" y="1600200"/>
+            <a:ext cx="10682935" cy="457200"/>
+          </a:xfrm>
+          <a:prstGeom prst="rect">
+            <a:avLst/>
+          </a:prstGeom>
+          <a:noFill/>
+          <a:ln/>
+        </p:spPr>
+        <p:txBody>
+          <a:bodyPr wrap="square" lIns="0" tIns="0" rIns="0" bIns="0" rtlCol="0" anchor="t"/>
+          <a:lstStyle/>
+          <a:p>
+            <a:pPr indent="0" marL="0">
+              <a:buNone/>
+            </a:pPr>
+            <a:r>
+              <a:rPr lang="en-US" sz="1100" dirty="0">
+                <a:solidFill>
+                  <a:srgbClr val="16252B"/>
+                </a:solidFill>
+                <a:latin typeface="Calibri" pitchFamily="34" charset="0"/>
+                <a:ea typeface="Calibri" pitchFamily="34" charset="-122"/>
+                <a:cs typeface="Calibri" pitchFamily="34" charset="-120"/>
+              </a:rPr>
+              <a:t>ВОЗ / ПАОЗ. Over a billion people living with mental health conditions, 02.09.2025. paho.org/en/news/2-9-2025-over-billion-people-living-mental-health-conditions-services-require-urgent-scale-up</a:t>
+            </a:r>
+            <a:endParaRPr lang="en-US" sz="1100" dirty="0"/>
+          </a:p>
+        </p:txBody>
+      </p:sp>
+      <p:sp>
+        <p:nvSpPr>
+          <p:cNvPr id="7" name="Text 5"/>
+          <p:cNvSpPr txBox="1"/>
+          <p:nvPr/>
+        </p:nvSpPr>
+        <p:spPr>
+          <a:xfrm>
+            <a:off x="548640" y="2112264"/>
+            <a:ext cx="320040" cy="457200"/>
+          </a:xfrm>
+          <a:prstGeom prst="rect">
+            <a:avLst/>
+          </a:prstGeom>
+          <a:noFill/>
+          <a:ln/>
+        </p:spPr>
+        <p:txBody>
+          <a:bodyPr wrap="square" lIns="0" tIns="0" rIns="0" bIns="0" rtlCol="0" anchor="t"/>
+          <a:lstStyle/>
+          <a:p>
+            <a:pPr indent="0" marL="0">
+              <a:buNone/>
+            </a:pPr>
+            <a:r>
+              <a:rPr lang="en-US" sz="1300" b="1" dirty="0">
+                <a:solidFill>
+                  <a:srgbClr val="1F6F68"/>
+                </a:solidFill>
+                <a:latin typeface="Cambria" pitchFamily="34" charset="0"/>
+                <a:ea typeface="Cambria" pitchFamily="34" charset="-122"/>
+                <a:cs typeface="Cambria" pitchFamily="34" charset="-120"/>
+              </a:rPr>
+              <a:t>2</a:t>
+            </a:r>
+            <a:endParaRPr lang="en-US" sz="1300" dirty="0"/>
+          </a:p>
+        </p:txBody>
+      </p:sp>
+      <p:sp>
+        <p:nvSpPr>
+          <p:cNvPr id="8" name="Text 6"/>
+          <p:cNvSpPr txBox="1"/>
+          <p:nvPr/>
+        </p:nvSpPr>
+        <p:spPr>
+          <a:xfrm>
+            <a:off x="960120" y="2112264"/>
+            <a:ext cx="10682935" cy="457200"/>
+          </a:xfrm>
+          <a:prstGeom prst="rect">
+            <a:avLst/>
+          </a:prstGeom>
+          <a:noFill/>
+          <a:ln/>
+        </p:spPr>
+        <p:txBody>
+          <a:bodyPr wrap="square" lIns="0" tIns="0" rIns="0" bIns="0" rtlCol="0" anchor="t"/>
+          <a:lstStyle/>
+          <a:p>
+            <a:pPr indent="0" marL="0">
+              <a:buNone/>
+            </a:pPr>
+            <a:r>
+              <a:rPr lang="en-US" sz="1100" dirty="0">
+                <a:solidFill>
+                  <a:srgbClr val="16252B"/>
+                </a:solidFill>
+                <a:latin typeface="Calibri" pitchFamily="34" charset="0"/>
+                <a:ea typeface="Calibri" pitchFamily="34" charset="-122"/>
+                <a:cs typeface="Calibri" pitchFamily="34" charset="-120"/>
+              </a:rPr>
+              <a:t>Consortium Psychiatricum, 2024: распространённость тревоги и депрессии в Москве по скринингу. consortium-psy.com/jour/article/view/15487</a:t>
+            </a:r>
+            <a:endParaRPr lang="en-US" sz="1100" dirty="0"/>
+          </a:p>
+        </p:txBody>
+      </p:sp>
+      <p:sp>
+        <p:nvSpPr>
+          <p:cNvPr id="9" name="Text 7"/>
+          <p:cNvSpPr txBox="1"/>
+          <p:nvPr/>
+        </p:nvSpPr>
+        <p:spPr>
+          <a:xfrm>
+            <a:off x="548640" y="2624328"/>
+            <a:ext cx="320040" cy="457200"/>
+          </a:xfrm>
+          <a:prstGeom prst="rect">
+            <a:avLst/>
+          </a:prstGeom>
+          <a:noFill/>
+          <a:ln/>
+        </p:spPr>
+        <p:txBody>
+          <a:bodyPr wrap="square" lIns="0" tIns="0" rIns="0" bIns="0" rtlCol="0" anchor="t"/>
+          <a:lstStyle/>
+          <a:p>
+            <a:pPr indent="0" marL="0">
+              <a:buNone/>
+            </a:pPr>
+            <a:r>
+              <a:rPr lang="en-US" sz="1300" b="1" dirty="0">
+                <a:solidFill>
+                  <a:srgbClr val="1F6F68"/>
+                </a:solidFill>
+                <a:latin typeface="Cambria" pitchFamily="34" charset="0"/>
+                <a:ea typeface="Cambria" pitchFamily="34" charset="-122"/>
+                <a:cs typeface="Cambria" pitchFamily="34" charset="-120"/>
+              </a:rPr>
+              <a:t>3</a:t>
+            </a:r>
+            <a:endParaRPr lang="en-US" sz="1300" dirty="0"/>
+          </a:p>
+        </p:txBody>
+      </p:sp>
+      <p:sp>
+        <p:nvSpPr>
+          <p:cNvPr id="10" name="Text 8"/>
+          <p:cNvSpPr txBox="1"/>
+          <p:nvPr/>
+        </p:nvSpPr>
+        <p:spPr>
+          <a:xfrm>
+            <a:off x="960120" y="2624328"/>
+            <a:ext cx="10682935" cy="457200"/>
+          </a:xfrm>
+          <a:prstGeom prst="rect">
+            <a:avLst/>
+          </a:prstGeom>
+          <a:noFill/>
+          <a:ln/>
+        </p:spPr>
+        <p:txBody>
+          <a:bodyPr wrap="square" lIns="0" tIns="0" rIns="0" bIns="0" rtlCol="0" anchor="t"/>
+          <a:lstStyle/>
+          <a:p>
+            <a:pPr indent="0" marL="0">
+              <a:buNone/>
+            </a:pPr>
+            <a:r>
+              <a:rPr lang="en-US" sz="1100" dirty="0">
+                <a:solidFill>
+                  <a:srgbClr val="16252B"/>
+                </a:solidFill>
+                <a:latin typeface="Calibri" pitchFamily="34" charset="0"/>
+                <a:ea typeface="Calibri" pitchFamily="34" charset="-122"/>
+                <a:cs typeface="Calibri" pitchFamily="34" charset="-120"/>
+              </a:rPr>
+              <a:t>Guo T. et al. Measurement-based care versus standard care for major depression. Am J Psychiatry, 2015; 172(10): 1004–1013. doi:10.1176/appi.ajp.2015.14050652</a:t>
+            </a:r>
+            <a:endParaRPr lang="en-US" sz="1100" dirty="0"/>
+          </a:p>
+        </p:txBody>
+      </p:sp>
+      <p:sp>
+        <p:nvSpPr>
+          <p:cNvPr id="11" name="Text 9"/>
+          <p:cNvSpPr txBox="1"/>
+          <p:nvPr/>
+        </p:nvSpPr>
+        <p:spPr>
+          <a:xfrm>
+            <a:off x="548640" y="3136392"/>
+            <a:ext cx="320040" cy="457200"/>
+          </a:xfrm>
+          <a:prstGeom prst="rect">
+            <a:avLst/>
+          </a:prstGeom>
+          <a:noFill/>
+          <a:ln/>
+        </p:spPr>
+        <p:txBody>
+          <a:bodyPr wrap="square" lIns="0" tIns="0" rIns="0" bIns="0" rtlCol="0" anchor="t"/>
+          <a:lstStyle/>
+          <a:p>
+            <a:pPr indent="0" marL="0">
+              <a:buNone/>
+            </a:pPr>
+            <a:r>
+              <a:rPr lang="en-US" sz="1300" b="1" dirty="0">
+                <a:solidFill>
+                  <a:srgbClr val="1F6F68"/>
+                </a:solidFill>
+                <a:latin typeface="Cambria" pitchFamily="34" charset="0"/>
+                <a:ea typeface="Cambria" pitchFamily="34" charset="-122"/>
+                <a:cs typeface="Cambria" pitchFamily="34" charset="-120"/>
+              </a:rPr>
+              <a:t>4</a:t>
+            </a:r>
+            <a:endParaRPr lang="en-US" sz="1300" dirty="0"/>
+          </a:p>
+        </p:txBody>
+      </p:sp>
+      <p:sp>
+        <p:nvSpPr>
+          <p:cNvPr id="12" name="Text 10"/>
+          <p:cNvSpPr txBox="1"/>
+          <p:nvPr/>
+        </p:nvSpPr>
+        <p:spPr>
+          <a:xfrm>
+            <a:off x="960120" y="3136392"/>
+            <a:ext cx="10682935" cy="457200"/>
+          </a:xfrm>
+          <a:prstGeom prst="rect">
+            <a:avLst/>
+          </a:prstGeom>
+          <a:noFill/>
+          <a:ln/>
+        </p:spPr>
+        <p:txBody>
+          <a:bodyPr wrap="square" lIns="0" tIns="0" rIns="0" bIns="0" rtlCol="0" anchor="t"/>
+          <a:lstStyle/>
+          <a:p>
+            <a:pPr indent="0" marL="0">
+              <a:buNone/>
+            </a:pPr>
+            <a:r>
+              <a:rPr lang="en-US" sz="1100" dirty="0">
+                <a:solidFill>
+                  <a:srgbClr val="16252B"/>
+                </a:solidFill>
+                <a:latin typeface="Calibri" pitchFamily="34" charset="0"/>
+                <a:ea typeface="Calibri" pitchFamily="34" charset="-122"/>
+                <a:cs typeface="Calibri" pitchFamily="34" charset="-120"/>
+              </a:rPr>
+              <a:t>Fortney J.C. et al. A Tipping Point for Measurement-Based Care. Psychiatric Services, 2017; 68(2): 179–188</a:t>
+            </a:r>
+            <a:endParaRPr lang="en-US" sz="1100" dirty="0"/>
+          </a:p>
+        </p:txBody>
+      </p:sp>
+      <p:sp>
+        <p:nvSpPr>
+          <p:cNvPr id="13" name="Text 11"/>
+          <p:cNvSpPr txBox="1"/>
+          <p:nvPr/>
+        </p:nvSpPr>
+        <p:spPr>
+          <a:xfrm>
+            <a:off x="548640" y="3648456"/>
+            <a:ext cx="320040" cy="457200"/>
+          </a:xfrm>
+          <a:prstGeom prst="rect">
+            <a:avLst/>
+          </a:prstGeom>
+          <a:noFill/>
+          <a:ln/>
+        </p:spPr>
+        <p:txBody>
+          <a:bodyPr wrap="square" lIns="0" tIns="0" rIns="0" bIns="0" rtlCol="0" anchor="t"/>
+          <a:lstStyle/>
+          <a:p>
+            <a:pPr indent="0" marL="0">
+              <a:buNone/>
+            </a:pPr>
+            <a:r>
+              <a:rPr lang="en-US" sz="1300" b="1" dirty="0">
+                <a:solidFill>
+                  <a:srgbClr val="1F6F68"/>
+                </a:solidFill>
+                <a:latin typeface="Cambria" pitchFamily="34" charset="0"/>
+                <a:ea typeface="Cambria" pitchFamily="34" charset="-122"/>
+                <a:cs typeface="Cambria" pitchFamily="34" charset="-120"/>
+              </a:rPr>
+              <a:t>5</a:t>
+            </a:r>
+            <a:endParaRPr lang="en-US" sz="1300" dirty="0"/>
+          </a:p>
+        </p:txBody>
+      </p:sp>
+      <p:sp>
+        <p:nvSpPr>
+          <p:cNvPr id="14" name="Text 12"/>
+          <p:cNvSpPr txBox="1"/>
+          <p:nvPr/>
+        </p:nvSpPr>
+        <p:spPr>
+          <a:xfrm>
+            <a:off x="960120" y="3648456"/>
+            <a:ext cx="10682935" cy="457200"/>
+          </a:xfrm>
+          <a:prstGeom prst="rect">
+            <a:avLst/>
+          </a:prstGeom>
+          <a:noFill/>
+          <a:ln/>
+        </p:spPr>
+        <p:txBody>
+          <a:bodyPr wrap="square" lIns="0" tIns="0" rIns="0" bIns="0" rtlCol="0" anchor="t"/>
+          <a:lstStyle/>
+          <a:p>
+            <a:pPr indent="0" marL="0">
+              <a:buNone/>
+            </a:pPr>
+            <a:r>
+              <a:rPr lang="en-US" sz="1100" dirty="0">
+                <a:solidFill>
+                  <a:srgbClr val="16252B"/>
+                </a:solidFill>
+                <a:latin typeface="Calibri" pitchFamily="34" charset="0"/>
+                <a:ea typeface="Calibri" pitchFamily="34" charset="-122"/>
+                <a:cs typeface="Calibri" pitchFamily="34" charset="-120"/>
+              </a:rPr>
+              <a:t>Федеральный закон № 152-ФЗ «О персональных данных», ст. 10</a:t>
+            </a:r>
+            <a:endParaRPr lang="en-US" sz="1100" dirty="0"/>
+          </a:p>
+        </p:txBody>
+      </p:sp>
+      <p:sp>
+        <p:nvSpPr>
+          <p:cNvPr id="15" name="Text 13"/>
+          <p:cNvSpPr txBox="1"/>
+          <p:nvPr/>
+        </p:nvSpPr>
+        <p:spPr>
+          <a:xfrm>
+            <a:off x="548640" y="4160520"/>
+            <a:ext cx="320040" cy="457200"/>
+          </a:xfrm>
+          <a:prstGeom prst="rect">
+            <a:avLst/>
+          </a:prstGeom>
+          <a:noFill/>
+          <a:ln/>
+        </p:spPr>
+        <p:txBody>
+          <a:bodyPr wrap="square" lIns="0" tIns="0" rIns="0" bIns="0" rtlCol="0" anchor="t"/>
+          <a:lstStyle/>
+          <a:p>
+            <a:pPr indent="0" marL="0">
+              <a:buNone/>
+            </a:pPr>
+            <a:r>
+              <a:rPr lang="en-US" sz="1300" b="1" dirty="0">
+                <a:solidFill>
+                  <a:srgbClr val="1F6F68"/>
+                </a:solidFill>
+                <a:latin typeface="Cambria" pitchFamily="34" charset="0"/>
+                <a:ea typeface="Cambria" pitchFamily="34" charset="-122"/>
+                <a:cs typeface="Cambria" pitchFamily="34" charset="-120"/>
+              </a:rPr>
+              <a:t>6</a:t>
+            </a:r>
+            <a:endParaRPr lang="en-US" sz="1300" dirty="0"/>
+          </a:p>
+        </p:txBody>
+      </p:sp>
+      <p:sp>
+        <p:nvSpPr>
+          <p:cNvPr id="16" name="Text 14"/>
+          <p:cNvSpPr txBox="1"/>
+          <p:nvPr/>
+        </p:nvSpPr>
+        <p:spPr>
+          <a:xfrm>
+            <a:off x="960120" y="4160520"/>
+            <a:ext cx="10682935" cy="457200"/>
+          </a:xfrm>
+          <a:prstGeom prst="rect">
+            <a:avLst/>
+          </a:prstGeom>
+          <a:noFill/>
+          <a:ln/>
+        </p:spPr>
+        <p:txBody>
+          <a:bodyPr wrap="square" lIns="0" tIns="0" rIns="0" bIns="0" rtlCol="0" anchor="t"/>
+          <a:lstStyle/>
+          <a:p>
+            <a:pPr indent="0" marL="0">
+              <a:buNone/>
+            </a:pPr>
+            <a:r>
+              <a:rPr lang="en-US" sz="1100" dirty="0">
+                <a:solidFill>
+                  <a:srgbClr val="16252B"/>
+                </a:solidFill>
+                <a:latin typeface="Calibri" pitchFamily="34" charset="0"/>
+                <a:ea typeface="Calibri" pitchFamily="34" charset="-122"/>
+                <a:cs typeface="Calibri" pitchFamily="34" charset="-120"/>
+              </a:rPr>
+              <a:t>Федеральный закон № 323-ФЗ «Об основах охраны здоровья граждан в РФ», ст. 13 и ст. 38</a:t>
+            </a:r>
+            <a:endParaRPr lang="en-US" sz="1100" dirty="0"/>
+          </a:p>
+        </p:txBody>
+      </p:sp>
+      <p:sp>
+        <p:nvSpPr>
+          <p:cNvPr id="17" name="Text 15"/>
+          <p:cNvSpPr txBox="1"/>
+          <p:nvPr/>
+        </p:nvSpPr>
+        <p:spPr>
+          <a:xfrm>
+            <a:off x="548640" y="4672584"/>
+            <a:ext cx="320040" cy="457200"/>
+          </a:xfrm>
+          <a:prstGeom prst="rect">
+            <a:avLst/>
+          </a:prstGeom>
+          <a:noFill/>
+          <a:ln/>
+        </p:spPr>
+        <p:txBody>
+          <a:bodyPr wrap="square" lIns="0" tIns="0" rIns="0" bIns="0" rtlCol="0" anchor="t"/>
+          <a:lstStyle/>
+          <a:p>
+            <a:pPr indent="0" marL="0">
+              <a:buNone/>
+            </a:pPr>
+            <a:r>
+              <a:rPr lang="en-US" sz="1300" b="1" dirty="0">
+                <a:solidFill>
+                  <a:srgbClr val="1F6F68"/>
+                </a:solidFill>
+                <a:latin typeface="Cambria" pitchFamily="34" charset="0"/>
+                <a:ea typeface="Cambria" pitchFamily="34" charset="-122"/>
+                <a:cs typeface="Cambria" pitchFamily="34" charset="-120"/>
+              </a:rPr>
+              <a:t>7</a:t>
+            </a:r>
+            <a:endParaRPr lang="en-US" sz="1300" dirty="0"/>
+          </a:p>
+        </p:txBody>
+      </p:sp>
+      <p:sp>
+        <p:nvSpPr>
+          <p:cNvPr id="18" name="Text 16"/>
+          <p:cNvSpPr txBox="1"/>
+          <p:nvPr/>
+        </p:nvSpPr>
+        <p:spPr>
+          <a:xfrm>
+            <a:off x="960120" y="4672584"/>
+            <a:ext cx="10682935" cy="457200"/>
+          </a:xfrm>
+          <a:prstGeom prst="rect">
+            <a:avLst/>
+          </a:prstGeom>
+          <a:noFill/>
+          <a:ln/>
+        </p:spPr>
+        <p:txBody>
+          <a:bodyPr wrap="square" lIns="0" tIns="0" rIns="0" bIns="0" rtlCol="0" anchor="t"/>
+          <a:lstStyle/>
+          <a:p>
+            <a:pPr indent="0" marL="0">
+              <a:buNone/>
+            </a:pPr>
+            <a:r>
+              <a:rPr lang="en-US" sz="1100" dirty="0">
+                <a:solidFill>
+                  <a:srgbClr val="16252B"/>
+                </a:solidFill>
+                <a:latin typeface="Calibri" pitchFamily="34" charset="0"/>
+                <a:ea typeface="Calibri" pitchFamily="34" charset="-122"/>
+                <a:cs typeface="Calibri" pitchFamily="34" charset="-120"/>
+              </a:rPr>
+              <a:t>Постановление Правительства РФ от 30.11.2024 № 1684 «Об утверждении Правил государственной регистрации медицинских изделий» (действует с 01.03.2025)</a:t>
+            </a:r>
+            <a:endParaRPr lang="en-US" sz="1100" dirty="0"/>
+          </a:p>
+        </p:txBody>
+      </p:sp>
+      <p:sp>
+        <p:nvSpPr>
+          <p:cNvPr id="19" name="Text 17"/>
+          <p:cNvSpPr txBox="1"/>
+          <p:nvPr/>
+        </p:nvSpPr>
+        <p:spPr>
+          <a:xfrm>
+            <a:off x="548640" y="5184648"/>
+            <a:ext cx="320040" cy="457200"/>
+          </a:xfrm>
+          <a:prstGeom prst="rect">
+            <a:avLst/>
+          </a:prstGeom>
+          <a:noFill/>
+          <a:ln/>
+        </p:spPr>
+        <p:txBody>
+          <a:bodyPr wrap="square" lIns="0" tIns="0" rIns="0" bIns="0" rtlCol="0" anchor="t"/>
+          <a:lstStyle/>
+          <a:p>
+            <a:pPr indent="0" marL="0">
+              <a:buNone/>
+            </a:pPr>
+            <a:r>
+              <a:rPr lang="en-US" sz="1300" b="1" dirty="0">
+                <a:solidFill>
+                  <a:srgbClr val="1F6F68"/>
+                </a:solidFill>
+                <a:latin typeface="Cambria" pitchFamily="34" charset="0"/>
+                <a:ea typeface="Cambria" pitchFamily="34" charset="-122"/>
+                <a:cs typeface="Cambria" pitchFamily="34" charset="-120"/>
+              </a:rPr>
+              <a:t>8</a:t>
+            </a:r>
+            <a:endParaRPr lang="en-US" sz="1300" dirty="0"/>
+          </a:p>
+        </p:txBody>
+      </p:sp>
+      <p:sp>
+        <p:nvSpPr>
+          <p:cNvPr id="20" name="Text 18"/>
+          <p:cNvSpPr txBox="1"/>
+          <p:nvPr/>
+        </p:nvSpPr>
+        <p:spPr>
+          <a:xfrm>
+            <a:off x="960120" y="5184648"/>
+            <a:ext cx="10682935" cy="457200"/>
+          </a:xfrm>
+          <a:prstGeom prst="rect">
+            <a:avLst/>
+          </a:prstGeom>
+          <a:noFill/>
+          <a:ln/>
+        </p:spPr>
+        <p:txBody>
+          <a:bodyPr wrap="square" lIns="0" tIns="0" rIns="0" bIns="0" rtlCol="0" anchor="t"/>
+          <a:lstStyle/>
+          <a:p>
+            <a:pPr indent="0" marL="0">
+              <a:buNone/>
+            </a:pPr>
+            <a:r>
+              <a:rPr lang="en-US" sz="1100" dirty="0">
+                <a:solidFill>
+                  <a:srgbClr val="16252B"/>
+                </a:solidFill>
+                <a:latin typeface="Calibri" pitchFamily="34" charset="0"/>
+                <a:ea typeface="Calibri" pitchFamily="34" charset="-122"/>
+                <a:cs typeface="Calibri" pitchFamily="34" charset="-120"/>
+              </a:rPr>
+              <a:t>Золотарева А.А., 2023: русские версии PHQ-9 и GAD-7; Фаттахов, Горобец: русская версия DASS-42 (источники и права — evidence/S34/research.md, docs/clinical/scales-rights.md)</a:t>
+            </a:r>
+            <a:endParaRPr lang="en-US" sz="1100" dirty="0"/>
+          </a:p>
+        </p:txBody>
+      </p:sp>
+      <p:sp>
+        <p:nvSpPr>
+          <p:cNvPr id="25" name="Slide Number Placeholder 0"/>
+          <p:cNvSpPr>
+            <a:spLocks noGrp="1"/>
+          </p:cNvSpPr>
+          <p:nvPr>
+            <p:ph type="sldNum" sz="quarter" idx="4294967295"/>
+          </p:nvPr>
+        </p:nvSpPr>
+        <p:spPr>
+          <a:xfrm>
+            <a:off x="11274552" y="6419088"/>
+            <a:ext cx="365760" cy="256032"/>
+          </a:xfrm>
+          <a:prstGeom prst="rect">
+            <a:avLst/>
+          </a:prstGeom>
+          <a:extLst>
+            <a:ext uri="{C572A759-6A51-4108-AA02-DFA0A04FC94B}">
+              <ma14:wrappingTextBoxFlag xmlns:ma14="http://schemas.microsoft.com/office/mac/drawingml/2011/main" val="0"/>
+            </a:ext>
+          </a:extLst>
+        </p:spPr>
+        <p:txBody>
+          <a:bodyPr/>
+          <a:lstStyle>
+            <a:lvl1pPr>
+              <a:defRPr sz="900">
+                <a:solidFill>
+                  <a:srgbClr val="5A6B71"/>
+                </a:solidFill>
+                <a:latin typeface="Calibri"/>
+                <a:ea typeface="Calibri"/>
+                <a:cs typeface="Calibri"/>
+              </a:defRPr>
+            </a:lvl1pPr>
+          </a:lstStyle>
+          <a:p>
+            <a:pPr algn="r"/>
+            <a:fld id="{F7021451-1387-4CA6-816F-3879F97B5CBC}" type="slidenum">
+              <a:rPr b="0" lang="en-US"/>
               <a:t>17</a:t>
             </a:fld>
             <a:endParaRPr lang="en-US"/>
@@ -13842,43 +14400,40 @@
           <a:chExt cx="0" cy="0"/>
         </a:xfrm>
       </p:grpSpPr>
-      <p:sp>
-        <p:nvSpPr>
-          <p:cNvPr id="2" name="Shape 0"/>
-          <p:cNvSpPr/>
-          <p:nvPr/>
-        </p:nvSpPr>
-        <p:spPr>
-          <a:xfrm>
-            <a:off x="548640" y="384048"/>
-            <a:ext cx="2362810" cy="256032"/>
-          </a:xfrm>
-          <a:prstGeom prst="roundRect">
-            <a:avLst>
-              <a:gd name="adj" fmla="val 50000"/>
-            </a:avLst>
-          </a:prstGeom>
-          <a:solidFill>
-            <a:srgbClr val="DCEBE8"/>
-          </a:solidFill>
-          <a:ln w="12700">
-            <a:solidFill>
-              <a:srgbClr val="DCEBE8"/>
-            </a:solidFill>
-            <a:prstDash val="solid"/>
-          </a:ln>
-        </p:spPr>
-      </p:sp>
-      <p:sp>
-        <p:nvSpPr>
-          <p:cNvPr id="3" name="Text 1"/>
-          <p:cNvSpPr txBox="1"/>
-          <p:nvPr/>
-        </p:nvSpPr>
-        <p:spPr>
-          <a:xfrm>
-            <a:off x="548640" y="384048"/>
-            <a:ext cx="2362810" cy="256032"/>
+      <p:pic>
+        <p:nvPicPr>
+          <p:cNvPr id="2" name="Image 0" descr="preencoded.png">    </p:cNvPr>
+          <p:cNvPicPr>
+            <a:picLocks noChangeAspect="1"/>
+          </p:cNvPicPr>
+          <p:nvPr/>
+        </p:nvPicPr>
+        <p:blipFill>
+          <a:blip r:embed="rId1"/>
+          <a:stretch>
+            <a:fillRect/>
+          </a:stretch>
+        </p:blipFill>
+        <p:spPr>
+          <a:xfrm>
+            <a:off x="548640" y="640080"/>
+            <a:ext cx="822960" cy="822960"/>
+          </a:xfrm>
+          <a:prstGeom prst="rect">
+            <a:avLst/>
+          </a:prstGeom>
+        </p:spPr>
+      </p:pic>
+      <p:sp>
+        <p:nvSpPr>
+          <p:cNvPr id="3" name="Text 0"/>
+          <p:cNvSpPr txBox="1"/>
+          <p:nvPr/>
+        </p:nvSpPr>
+        <p:spPr>
+          <a:xfrm>
+            <a:off x="1554480" y="640080"/>
+            <a:ext cx="5486400" cy="822960"/>
           </a:xfrm>
           <a:prstGeom prst="rect">
             <a:avLst/>
@@ -13890,36 +14445,151 @@
           <a:bodyPr wrap="square" lIns="0" tIns="0" rIns="0" bIns="0" rtlCol="0" anchor="ctr"/>
           <a:lstStyle/>
           <a:p>
-            <a:pPr algn="ctr" indent="0" marL="0">
-              <a:buNone/>
-            </a:pPr>
-            <a:r>
-              <a:rPr lang="en-US" sz="900" b="1" spc="150" kern="0" dirty="0">
-                <a:solidFill>
-                  <a:srgbClr val="1F6F68"/>
+            <a:pPr indent="0" marL="0">
+              <a:buNone/>
+            </a:pPr>
+            <a:r>
+              <a:rPr lang="en-US" sz="2600" b="1" dirty="0">
+                <a:solidFill>
+                  <a:srgbClr val="FFFFFF"/>
+                </a:solidFill>
+                <a:latin typeface="Cambria" pitchFamily="34" charset="0"/>
+                <a:ea typeface="Cambria" pitchFamily="34" charset="-122"/>
+                <a:cs typeface="Cambria" pitchFamily="34" charset="-120"/>
+              </a:rPr>
+              <a:t>Клинический компас</a:t>
+            </a:r>
+            <a:endParaRPr lang="en-US" sz="2600" dirty="0"/>
+          </a:p>
+        </p:txBody>
+      </p:sp>
+      <p:sp>
+        <p:nvSpPr>
+          <p:cNvPr id="4" name="Text 1"/>
+          <p:cNvSpPr txBox="1"/>
+          <p:nvPr/>
+        </p:nvSpPr>
+        <p:spPr>
+          <a:xfrm>
+            <a:off x="548640" y="2011680"/>
+            <a:ext cx="9601200" cy="1737360"/>
+          </a:xfrm>
+          <a:prstGeom prst="rect">
+            <a:avLst/>
+          </a:prstGeom>
+          <a:noFill/>
+          <a:ln/>
+        </p:spPr>
+        <p:txBody>
+          <a:bodyPr wrap="square" lIns="0" tIns="0" rIns="0" bIns="0" rtlCol="0" anchor="t"/>
+          <a:lstStyle/>
+          <a:p>
+            <a:pPr indent="0" marL="0">
+              <a:buNone/>
+            </a:pPr>
+            <a:r>
+              <a:rPr lang="en-US" sz="3200" dirty="0">
+                <a:solidFill>
+                  <a:srgbClr val="FFFFFF"/>
+                </a:solidFill>
+                <a:latin typeface="Cambria" pitchFamily="34" charset="0"/>
+                <a:ea typeface="Cambria" pitchFamily="34" charset="-122"/>
+                <a:cs typeface="Cambria" pitchFamily="34" charset="-120"/>
+              </a:rPr>
+              <a:t>Врач за минуту видит, что изменилось у пациента между приёмами. Решение всегда остаётся за врачом.</a:t>
+            </a:r>
+            <a:endParaRPr lang="en-US" sz="3200" dirty="0"/>
+          </a:p>
+        </p:txBody>
+      </p:sp>
+      <p:sp>
+        <p:nvSpPr>
+          <p:cNvPr id="5" name="Text 2"/>
+          <p:cNvSpPr txBox="1"/>
+          <p:nvPr/>
+        </p:nvSpPr>
+        <p:spPr>
+          <a:xfrm>
+            <a:off x="548640" y="4069080"/>
+            <a:ext cx="2286000" cy="548640"/>
+          </a:xfrm>
+          <a:prstGeom prst="rect">
+            <a:avLst/>
+          </a:prstGeom>
+          <a:noFill/>
+          <a:ln/>
+        </p:spPr>
+        <p:txBody>
+          <a:bodyPr wrap="square" lIns="0" tIns="0" rIns="0" bIns="0" rtlCol="0" anchor="t"/>
+          <a:lstStyle/>
+          <a:p>
+            <a:pPr indent="0" marL="0">
+              <a:buNone/>
+            </a:pPr>
+            <a:r>
+              <a:rPr lang="en-US" sz="2800" b="1" dirty="0">
+                <a:solidFill>
+                  <a:srgbClr val="D9822B"/>
+                </a:solidFill>
+                <a:latin typeface="Cambria" pitchFamily="34" charset="0"/>
+                <a:ea typeface="Cambria" pitchFamily="34" charset="-122"/>
+                <a:cs typeface="Cambria" pitchFamily="34" charset="-120"/>
+              </a:rPr>
+              <a:t>588</a:t>
+            </a:r>
+            <a:endParaRPr lang="en-US" sz="2800" dirty="0"/>
+          </a:p>
+        </p:txBody>
+      </p:sp>
+      <p:sp>
+        <p:nvSpPr>
+          <p:cNvPr id="6" name="Text 3"/>
+          <p:cNvSpPr txBox="1"/>
+          <p:nvPr/>
+        </p:nvSpPr>
+        <p:spPr>
+          <a:xfrm>
+            <a:off x="548640" y="4617720"/>
+            <a:ext cx="2286000" cy="274320"/>
+          </a:xfrm>
+          <a:prstGeom prst="rect">
+            <a:avLst/>
+          </a:prstGeom>
+          <a:noFill/>
+          <a:ln/>
+        </p:spPr>
+        <p:txBody>
+          <a:bodyPr wrap="square" lIns="0" tIns="0" rIns="0" bIns="0" rtlCol="0" anchor="t"/>
+          <a:lstStyle/>
+          <a:p>
+            <a:pPr indent="0" marL="0">
+              <a:buNone/>
+            </a:pPr>
+            <a:r>
+              <a:rPr lang="en-US" sz="1200" dirty="0">
+                <a:solidFill>
+                  <a:srgbClr val="8FB9B2"/>
                 </a:solidFill>
                 <a:latin typeface="Calibri" pitchFamily="34" charset="0"/>
                 <a:ea typeface="Calibri" pitchFamily="34" charset="-122"/>
                 <a:cs typeface="Calibri" pitchFamily="34" charset="-120"/>
               </a:rPr>
-              <a:t>ПРИЛОЖЕНИЕ · ИСТОЧНИКИ</a:t>
-            </a:r>
-            <a:endParaRPr lang="en-US" sz="900" dirty="0"/>
-          </a:p>
-        </p:txBody>
-      </p:sp>
-      <p:sp>
-        <p:nvSpPr>
-          <p:cNvPr id="4" name="Text 2"/>
-          <p:cNvSpPr/>
-          <p:nvPr>
-            <p:ph idx="103" type="title" hasCustomPrompt="1"/>
-          </p:nvPr>
-        </p:nvSpPr>
-        <p:spPr>
-          <a:xfrm>
-            <a:off x="548640" y="731520"/>
-            <a:ext cx="9418320" cy="658368"/>
+              <a:t>автотестов</a:t>
+            </a:r>
+            <a:endParaRPr lang="en-US" sz="1200" dirty="0"/>
+          </a:p>
+        </p:txBody>
+      </p:sp>
+      <p:sp>
+        <p:nvSpPr>
+          <p:cNvPr id="7" name="Text 4"/>
+          <p:cNvSpPr txBox="1"/>
+          <p:nvPr/>
+        </p:nvSpPr>
+        <p:spPr>
+          <a:xfrm>
+            <a:off x="3017520" y="4069080"/>
+            <a:ext cx="2286000" cy="548640"/>
           </a:xfrm>
           <a:prstGeom prst="rect">
             <a:avLst/>
@@ -13931,19 +14601,19 @@
           <a:bodyPr wrap="square" lIns="0" tIns="0" rIns="0" bIns="0" rtlCol="0" anchor="t"/>
           <a:lstStyle/>
           <a:p>
-            <a:pPr algn="l" indent="0" marL="0">
+            <a:pPr indent="0" marL="0">
               <a:buNone/>
             </a:pPr>
             <a:r>
               <a:rPr lang="en-US" sz="2800" b="1" dirty="0">
                 <a:solidFill>
-                  <a:srgbClr val="123A40"/>
+                  <a:srgbClr val="D9822B"/>
                 </a:solidFill>
                 <a:latin typeface="Cambria" pitchFamily="34" charset="0"/>
                 <a:ea typeface="Cambria" pitchFamily="34" charset="-122"/>
                 <a:cs typeface="Cambria" pitchFamily="34" charset="-120"/>
               </a:rPr>
-              <a:t>Источники цифр и норм</a:t>
+              <a:t>95 %</a:t>
             </a:r>
             <a:endParaRPr lang="en-US" sz="2800" dirty="0"/>
           </a:p>
@@ -13951,14 +14621,14 @@
       </p:sp>
       <p:sp>
         <p:nvSpPr>
-          <p:cNvPr id="5" name="Text 3"/>
-          <p:cNvSpPr txBox="1"/>
-          <p:nvPr/>
-        </p:nvSpPr>
-        <p:spPr>
-          <a:xfrm>
-            <a:off x="548640" y="1600200"/>
-            <a:ext cx="320040" cy="457200"/>
+          <p:cNvPr id="8" name="Text 5"/>
+          <p:cNvSpPr txBox="1"/>
+          <p:nvPr/>
+        </p:nvSpPr>
+        <p:spPr>
+          <a:xfrm>
+            <a:off x="3017520" y="4617720"/>
+            <a:ext cx="2286000" cy="274320"/>
           </a:xfrm>
           <a:prstGeom prst="rect">
             <a:avLst/>
@@ -13974,30 +14644,69 @@
               <a:buNone/>
             </a:pPr>
             <a:r>
-              <a:rPr lang="en-US" sz="1300" b="1" dirty="0">
-                <a:solidFill>
-                  <a:srgbClr val="1F6F68"/>
+              <a:rPr lang="en-US" sz="1200" dirty="0">
+                <a:solidFill>
+                  <a:srgbClr val="8FB9B2"/>
+                </a:solidFill>
+                <a:latin typeface="Calibri" pitchFamily="34" charset="0"/>
+                <a:ea typeface="Calibri" pitchFamily="34" charset="-122"/>
+                <a:cs typeface="Calibri" pitchFamily="34" charset="-120"/>
+              </a:rPr>
+              <a:t>покрытие кода сервиса</a:t>
+            </a:r>
+            <a:endParaRPr lang="en-US" sz="1200" dirty="0"/>
+          </a:p>
+        </p:txBody>
+      </p:sp>
+      <p:sp>
+        <p:nvSpPr>
+          <p:cNvPr id="9" name="Text 6"/>
+          <p:cNvSpPr txBox="1"/>
+          <p:nvPr/>
+        </p:nvSpPr>
+        <p:spPr>
+          <a:xfrm>
+            <a:off x="5486400" y="4069080"/>
+            <a:ext cx="2286000" cy="548640"/>
+          </a:xfrm>
+          <a:prstGeom prst="rect">
+            <a:avLst/>
+          </a:prstGeom>
+          <a:noFill/>
+          <a:ln/>
+        </p:spPr>
+        <p:txBody>
+          <a:bodyPr wrap="square" lIns="0" tIns="0" rIns="0" bIns="0" rtlCol="0" anchor="t"/>
+          <a:lstStyle/>
+          <a:p>
+            <a:pPr indent="0" marL="0">
+              <a:buNone/>
+            </a:pPr>
+            <a:r>
+              <a:rPr lang="en-US" sz="2800" b="1" dirty="0">
+                <a:solidFill>
+                  <a:srgbClr val="D9822B"/>
                 </a:solidFill>
                 <a:latin typeface="Cambria" pitchFamily="34" charset="0"/>
                 <a:ea typeface="Cambria" pitchFamily="34" charset="-122"/>
                 <a:cs typeface="Cambria" pitchFamily="34" charset="-120"/>
               </a:rPr>
-              <a:t>1</a:t>
-            </a:r>
-            <a:endParaRPr lang="en-US" sz="1300" dirty="0"/>
-          </a:p>
-        </p:txBody>
-      </p:sp>
-      <p:sp>
-        <p:nvSpPr>
-          <p:cNvPr id="6" name="Text 4"/>
-          <p:cNvSpPr txBox="1"/>
-          <p:nvPr/>
-        </p:nvSpPr>
-        <p:spPr>
-          <a:xfrm>
-            <a:off x="960120" y="1600200"/>
-            <a:ext cx="10682935" cy="457200"/>
+              <a:t>2</a:t>
+            </a:r>
+            <a:endParaRPr lang="en-US" sz="2800" dirty="0"/>
+          </a:p>
+        </p:txBody>
+      </p:sp>
+      <p:sp>
+        <p:nvSpPr>
+          <p:cNvPr id="10" name="Text 7"/>
+          <p:cNvSpPr txBox="1"/>
+          <p:nvPr/>
+        </p:nvSpPr>
+        <p:spPr>
+          <a:xfrm>
+            <a:off x="5486400" y="4617720"/>
+            <a:ext cx="2286000" cy="274320"/>
           </a:xfrm>
           <a:prstGeom prst="rect">
             <a:avLst/>
@@ -14013,30 +14722,30 @@
               <a:buNone/>
             </a:pPr>
             <a:r>
-              <a:rPr lang="en-US" sz="1100" dirty="0">
-                <a:solidFill>
-                  <a:srgbClr val="16252B"/>
+              <a:rPr lang="en-US" sz="1200" dirty="0">
+                <a:solidFill>
+                  <a:srgbClr val="8FB9B2"/>
                 </a:solidFill>
                 <a:latin typeface="Calibri" pitchFamily="34" charset="0"/>
                 <a:ea typeface="Calibri" pitchFamily="34" charset="-122"/>
                 <a:cs typeface="Calibri" pitchFamily="34" charset="-120"/>
               </a:rPr>
-              <a:t>ВОЗ / ПАОЗ. Over a billion people living with mental health conditions, 02.09.2025. paho.org/en/news/2-9-2025-over-billion-people-living-mental-health-conditions-services-require-urgent-scale-up</a:t>
-            </a:r>
-            <a:endParaRPr lang="en-US" sz="1100" dirty="0"/>
-          </a:p>
-        </p:txBody>
-      </p:sp>
-      <p:sp>
-        <p:nvSpPr>
-          <p:cNvPr id="7" name="Text 5"/>
-          <p:cNvSpPr txBox="1"/>
-          <p:nvPr/>
-        </p:nvSpPr>
-        <p:spPr>
-          <a:xfrm>
-            <a:off x="548640" y="2112264"/>
-            <a:ext cx="320040" cy="457200"/>
+              <a:t>кабинета: врач и пациент</a:t>
+            </a:r>
+            <a:endParaRPr lang="en-US" sz="1200" dirty="0"/>
+          </a:p>
+        </p:txBody>
+      </p:sp>
+      <p:sp>
+        <p:nvSpPr>
+          <p:cNvPr id="11" name="Text 8"/>
+          <p:cNvSpPr txBox="1"/>
+          <p:nvPr/>
+        </p:nvSpPr>
+        <p:spPr>
+          <a:xfrm>
+            <a:off x="7955280" y="4069080"/>
+            <a:ext cx="2286000" cy="548640"/>
           </a:xfrm>
           <a:prstGeom prst="rect">
             <a:avLst/>
@@ -14052,30 +14761,30 @@
               <a:buNone/>
             </a:pPr>
             <a:r>
-              <a:rPr lang="en-US" sz="1300" b="1" dirty="0">
-                <a:solidFill>
-                  <a:srgbClr val="1F6F68"/>
+              <a:rPr lang="en-US" sz="2800" b="1" dirty="0">
+                <a:solidFill>
+                  <a:srgbClr val="D9822B"/>
                 </a:solidFill>
                 <a:latin typeface="Cambria" pitchFamily="34" charset="0"/>
                 <a:ea typeface="Cambria" pitchFamily="34" charset="-122"/>
                 <a:cs typeface="Cambria" pitchFamily="34" charset="-120"/>
               </a:rPr>
-              <a:t>2</a:t>
-            </a:r>
-            <a:endParaRPr lang="en-US" sz="1300" dirty="0"/>
-          </a:p>
-        </p:txBody>
-      </p:sp>
-      <p:sp>
-        <p:nvSpPr>
-          <p:cNvPr id="8" name="Text 6"/>
-          <p:cNvSpPr txBox="1"/>
-          <p:nvPr/>
-        </p:nvSpPr>
-        <p:spPr>
-          <a:xfrm>
-            <a:off x="960120" y="2112264"/>
-            <a:ext cx="10682935" cy="457200"/>
+              <a:t>3</a:t>
+            </a:r>
+            <a:endParaRPr lang="en-US" sz="2800" dirty="0"/>
+          </a:p>
+        </p:txBody>
+      </p:sp>
+      <p:sp>
+        <p:nvSpPr>
+          <p:cNvPr id="12" name="Text 9"/>
+          <p:cNvSpPr txBox="1"/>
+          <p:nvPr/>
+        </p:nvSpPr>
+        <p:spPr>
+          <a:xfrm>
+            <a:off x="7955280" y="4617720"/>
+            <a:ext cx="2286000" cy="274320"/>
           </a:xfrm>
           <a:prstGeom prst="rect">
             <a:avLst/>
@@ -14091,30 +14800,30 @@
               <a:buNone/>
             </a:pPr>
             <a:r>
-              <a:rPr lang="en-US" sz="1100" dirty="0">
-                <a:solidFill>
-                  <a:srgbClr val="16252B"/>
+              <a:rPr lang="en-US" sz="1200" dirty="0">
+                <a:solidFill>
+                  <a:srgbClr val="8FB9B2"/>
                 </a:solidFill>
                 <a:latin typeface="Calibri" pitchFamily="34" charset="0"/>
                 <a:ea typeface="Calibri" pitchFamily="34" charset="-122"/>
                 <a:cs typeface="Calibri" pitchFamily="34" charset="-120"/>
               </a:rPr>
-              <a:t>Consortium Psychiatricum, 2024: распространённость тревоги и депрессии в Москве по скринингу. consortium-psy.com/jour/article/view/15487</a:t>
-            </a:r>
-            <a:endParaRPr lang="en-US" sz="1100" dirty="0"/>
-          </a:p>
-        </p:txBody>
-      </p:sp>
-      <p:sp>
-        <p:nvSpPr>
-          <p:cNvPr id="9" name="Text 7"/>
-          <p:cNvSpPr txBox="1"/>
-          <p:nvPr/>
-        </p:nvSpPr>
-        <p:spPr>
-          <a:xfrm>
-            <a:off x="548640" y="2624328"/>
-            <a:ext cx="320040" cy="457200"/>
+              <a:t>проверенные анкеты</a:t>
+            </a:r>
+            <a:endParaRPr lang="en-US" sz="1200" dirty="0"/>
+          </a:p>
+        </p:txBody>
+      </p:sp>
+      <p:sp>
+        <p:nvSpPr>
+          <p:cNvPr id="13" name="Text 10"/>
+          <p:cNvSpPr txBox="1"/>
+          <p:nvPr/>
+        </p:nvSpPr>
+        <p:spPr>
+          <a:xfrm>
+            <a:off x="548640" y="5440680"/>
+            <a:ext cx="8229600" cy="457200"/>
           </a:xfrm>
           <a:prstGeom prst="rect">
             <a:avLst/>
@@ -14130,30 +14839,30 @@
               <a:buNone/>
             </a:pPr>
             <a:r>
-              <a:rPr lang="en-US" sz="1300" b="1" dirty="0">
-                <a:solidFill>
-                  <a:srgbClr val="1F6F68"/>
+              <a:rPr lang="en-US" sz="2000" b="1" dirty="0">
+                <a:solidFill>
+                  <a:srgbClr val="FBEBD9"/>
                 </a:solidFill>
                 <a:latin typeface="Cambria" pitchFamily="34" charset="0"/>
                 <a:ea typeface="Cambria" pitchFamily="34" charset="-122"/>
                 <a:cs typeface="Cambria" pitchFamily="34" charset="-120"/>
               </a:rPr>
-              <a:t>3</a:t>
-            </a:r>
-            <a:endParaRPr lang="en-US" sz="1300" dirty="0"/>
-          </a:p>
-        </p:txBody>
-      </p:sp>
-      <p:sp>
-        <p:nvSpPr>
-          <p:cNvPr id="10" name="Text 8"/>
-          <p:cNvSpPr txBox="1"/>
-          <p:nvPr/>
-        </p:nvSpPr>
-        <p:spPr>
-          <a:xfrm>
-            <a:off x="960120" y="2624328"/>
-            <a:ext cx="10682935" cy="457200"/>
+              <a:t>Спасибо! Готовы ответить на вопросы</a:t>
+            </a:r>
+            <a:endParaRPr lang="en-US" sz="2000" dirty="0"/>
+          </a:p>
+        </p:txBody>
+      </p:sp>
+      <p:sp>
+        <p:nvSpPr>
+          <p:cNvPr id="14" name="Text 11"/>
+          <p:cNvSpPr txBox="1"/>
+          <p:nvPr/>
+        </p:nvSpPr>
+        <p:spPr>
+          <a:xfrm>
+            <a:off x="548640" y="6263640"/>
+            <a:ext cx="8229600" cy="274320"/>
           </a:xfrm>
           <a:prstGeom prst="rect">
             <a:avLst/>
@@ -14169,455 +14878,17 @@
               <a:buNone/>
             </a:pPr>
             <a:r>
-              <a:rPr lang="en-US" sz="1100" dirty="0">
-                <a:solidFill>
-                  <a:srgbClr val="16252B"/>
+              <a:rPr lang="en-US" sz="1000" dirty="0">
+                <a:solidFill>
+                  <a:srgbClr val="8FB9B2"/>
                 </a:solidFill>
                 <a:latin typeface="Calibri" pitchFamily="34" charset="0"/>
                 <a:ea typeface="Calibri" pitchFamily="34" charset="-122"/>
                 <a:cs typeface="Calibri" pitchFamily="34" charset="-120"/>
               </a:rPr>
-              <a:t>Guo T. et al. Measurement-based care versus standard care for major depression. Am J Psychiatry, 2015; 172(10): 1004–1013. doi:10.1176/appi.ajp.2015.14050652</a:t>
-            </a:r>
-            <a:endParaRPr lang="en-US" sz="1100" dirty="0"/>
-          </a:p>
-        </p:txBody>
-      </p:sp>
-      <p:sp>
-        <p:nvSpPr>
-          <p:cNvPr id="11" name="Text 9"/>
-          <p:cNvSpPr txBox="1"/>
-          <p:nvPr/>
-        </p:nvSpPr>
-        <p:spPr>
-          <a:xfrm>
-            <a:off x="548640" y="3136392"/>
-            <a:ext cx="320040" cy="457200"/>
-          </a:xfrm>
-          <a:prstGeom prst="rect">
-            <a:avLst/>
-          </a:prstGeom>
-          <a:noFill/>
-          <a:ln/>
-        </p:spPr>
-        <p:txBody>
-          <a:bodyPr wrap="square" lIns="0" tIns="0" rIns="0" bIns="0" rtlCol="0" anchor="t"/>
-          <a:lstStyle/>
-          <a:p>
-            <a:pPr indent="0" marL="0">
-              <a:buNone/>
-            </a:pPr>
-            <a:r>
-              <a:rPr lang="en-US" sz="1300" b="1" dirty="0">
-                <a:solidFill>
-                  <a:srgbClr val="1F6F68"/>
-                </a:solidFill>
-                <a:latin typeface="Cambria" pitchFamily="34" charset="0"/>
-                <a:ea typeface="Cambria" pitchFamily="34" charset="-122"/>
-                <a:cs typeface="Cambria" pitchFamily="34" charset="-120"/>
-              </a:rPr>
-              <a:t>4</a:t>
-            </a:r>
-            <a:endParaRPr lang="en-US" sz="1300" dirty="0"/>
-          </a:p>
-        </p:txBody>
-      </p:sp>
-      <p:sp>
-        <p:nvSpPr>
-          <p:cNvPr id="12" name="Text 10"/>
-          <p:cNvSpPr txBox="1"/>
-          <p:nvPr/>
-        </p:nvSpPr>
-        <p:spPr>
-          <a:xfrm>
-            <a:off x="960120" y="3136392"/>
-            <a:ext cx="10682935" cy="457200"/>
-          </a:xfrm>
-          <a:prstGeom prst="rect">
-            <a:avLst/>
-          </a:prstGeom>
-          <a:noFill/>
-          <a:ln/>
-        </p:spPr>
-        <p:txBody>
-          <a:bodyPr wrap="square" lIns="0" tIns="0" rIns="0" bIns="0" rtlCol="0" anchor="t"/>
-          <a:lstStyle/>
-          <a:p>
-            <a:pPr indent="0" marL="0">
-              <a:buNone/>
-            </a:pPr>
-            <a:r>
-              <a:rPr lang="en-US" sz="1100" dirty="0">
-                <a:solidFill>
-                  <a:srgbClr val="16252B"/>
-                </a:solidFill>
-                <a:latin typeface="Calibri" pitchFamily="34" charset="0"/>
-                <a:ea typeface="Calibri" pitchFamily="34" charset="-122"/>
-                <a:cs typeface="Calibri" pitchFamily="34" charset="-120"/>
-              </a:rPr>
-              <a:t>Fortney J.C. et al. A Tipping Point for Measurement-Based Care. Psychiatric Services, 2017; 68(2): 179–188</a:t>
-            </a:r>
-            <a:endParaRPr lang="en-US" sz="1100" dirty="0"/>
-          </a:p>
-        </p:txBody>
-      </p:sp>
-      <p:sp>
-        <p:nvSpPr>
-          <p:cNvPr id="13" name="Text 11"/>
-          <p:cNvSpPr txBox="1"/>
-          <p:nvPr/>
-        </p:nvSpPr>
-        <p:spPr>
-          <a:xfrm>
-            <a:off x="548640" y="3648456"/>
-            <a:ext cx="320040" cy="457200"/>
-          </a:xfrm>
-          <a:prstGeom prst="rect">
-            <a:avLst/>
-          </a:prstGeom>
-          <a:noFill/>
-          <a:ln/>
-        </p:spPr>
-        <p:txBody>
-          <a:bodyPr wrap="square" lIns="0" tIns="0" rIns="0" bIns="0" rtlCol="0" anchor="t"/>
-          <a:lstStyle/>
-          <a:p>
-            <a:pPr indent="0" marL="0">
-              <a:buNone/>
-            </a:pPr>
-            <a:r>
-              <a:rPr lang="en-US" sz="1300" b="1" dirty="0">
-                <a:solidFill>
-                  <a:srgbClr val="1F6F68"/>
-                </a:solidFill>
-                <a:latin typeface="Cambria" pitchFamily="34" charset="0"/>
-                <a:ea typeface="Cambria" pitchFamily="34" charset="-122"/>
-                <a:cs typeface="Cambria" pitchFamily="34" charset="-120"/>
-              </a:rPr>
-              <a:t>5</a:t>
-            </a:r>
-            <a:endParaRPr lang="en-US" sz="1300" dirty="0"/>
-          </a:p>
-        </p:txBody>
-      </p:sp>
-      <p:sp>
-        <p:nvSpPr>
-          <p:cNvPr id="14" name="Text 12"/>
-          <p:cNvSpPr txBox="1"/>
-          <p:nvPr/>
-        </p:nvSpPr>
-        <p:spPr>
-          <a:xfrm>
-            <a:off x="960120" y="3648456"/>
-            <a:ext cx="10682935" cy="457200"/>
-          </a:xfrm>
-          <a:prstGeom prst="rect">
-            <a:avLst/>
-          </a:prstGeom>
-          <a:noFill/>
-          <a:ln/>
-        </p:spPr>
-        <p:txBody>
-          <a:bodyPr wrap="square" lIns="0" tIns="0" rIns="0" bIns="0" rtlCol="0" anchor="t"/>
-          <a:lstStyle/>
-          <a:p>
-            <a:pPr indent="0" marL="0">
-              <a:buNone/>
-            </a:pPr>
-            <a:r>
-              <a:rPr lang="en-US" sz="1100" dirty="0">
-                <a:solidFill>
-                  <a:srgbClr val="16252B"/>
-                </a:solidFill>
-                <a:latin typeface="Calibri" pitchFamily="34" charset="0"/>
-                <a:ea typeface="Calibri" pitchFamily="34" charset="-122"/>
-                <a:cs typeface="Calibri" pitchFamily="34" charset="-120"/>
-              </a:rPr>
-              <a:t>Федеральный закон № 152-ФЗ «О персональных данных», ст. 10</a:t>
-            </a:r>
-            <a:endParaRPr lang="en-US" sz="1100" dirty="0"/>
-          </a:p>
-        </p:txBody>
-      </p:sp>
-      <p:sp>
-        <p:nvSpPr>
-          <p:cNvPr id="15" name="Text 13"/>
-          <p:cNvSpPr txBox="1"/>
-          <p:nvPr/>
-        </p:nvSpPr>
-        <p:spPr>
-          <a:xfrm>
-            <a:off x="548640" y="4160520"/>
-            <a:ext cx="320040" cy="457200"/>
-          </a:xfrm>
-          <a:prstGeom prst="rect">
-            <a:avLst/>
-          </a:prstGeom>
-          <a:noFill/>
-          <a:ln/>
-        </p:spPr>
-        <p:txBody>
-          <a:bodyPr wrap="square" lIns="0" tIns="0" rIns="0" bIns="0" rtlCol="0" anchor="t"/>
-          <a:lstStyle/>
-          <a:p>
-            <a:pPr indent="0" marL="0">
-              <a:buNone/>
-            </a:pPr>
-            <a:r>
-              <a:rPr lang="en-US" sz="1300" b="1" dirty="0">
-                <a:solidFill>
-                  <a:srgbClr val="1F6F68"/>
-                </a:solidFill>
-                <a:latin typeface="Cambria" pitchFamily="34" charset="0"/>
-                <a:ea typeface="Cambria" pitchFamily="34" charset="-122"/>
-                <a:cs typeface="Cambria" pitchFamily="34" charset="-120"/>
-              </a:rPr>
-              <a:t>6</a:t>
-            </a:r>
-            <a:endParaRPr lang="en-US" sz="1300" dirty="0"/>
-          </a:p>
-        </p:txBody>
-      </p:sp>
-      <p:sp>
-        <p:nvSpPr>
-          <p:cNvPr id="16" name="Text 14"/>
-          <p:cNvSpPr txBox="1"/>
-          <p:nvPr/>
-        </p:nvSpPr>
-        <p:spPr>
-          <a:xfrm>
-            <a:off x="960120" y="4160520"/>
-            <a:ext cx="10682935" cy="457200"/>
-          </a:xfrm>
-          <a:prstGeom prst="rect">
-            <a:avLst/>
-          </a:prstGeom>
-          <a:noFill/>
-          <a:ln/>
-        </p:spPr>
-        <p:txBody>
-          <a:bodyPr wrap="square" lIns="0" tIns="0" rIns="0" bIns="0" rtlCol="0" anchor="t"/>
-          <a:lstStyle/>
-          <a:p>
-            <a:pPr indent="0" marL="0">
-              <a:buNone/>
-            </a:pPr>
-            <a:r>
-              <a:rPr lang="en-US" sz="1100" dirty="0">
-                <a:solidFill>
-                  <a:srgbClr val="16252B"/>
-                </a:solidFill>
-                <a:latin typeface="Calibri" pitchFamily="34" charset="0"/>
-                <a:ea typeface="Calibri" pitchFamily="34" charset="-122"/>
-                <a:cs typeface="Calibri" pitchFamily="34" charset="-120"/>
-              </a:rPr>
-              <a:t>Федеральный закон № 323-ФЗ «Об основах охраны здоровья граждан в РФ», ст. 13 и ст. 38</a:t>
-            </a:r>
-            <a:endParaRPr lang="en-US" sz="1100" dirty="0"/>
-          </a:p>
-        </p:txBody>
-      </p:sp>
-      <p:sp>
-        <p:nvSpPr>
-          <p:cNvPr id="17" name="Text 15"/>
-          <p:cNvSpPr txBox="1"/>
-          <p:nvPr/>
-        </p:nvSpPr>
-        <p:spPr>
-          <a:xfrm>
-            <a:off x="548640" y="4672584"/>
-            <a:ext cx="320040" cy="457200"/>
-          </a:xfrm>
-          <a:prstGeom prst="rect">
-            <a:avLst/>
-          </a:prstGeom>
-          <a:noFill/>
-          <a:ln/>
-        </p:spPr>
-        <p:txBody>
-          <a:bodyPr wrap="square" lIns="0" tIns="0" rIns="0" bIns="0" rtlCol="0" anchor="t"/>
-          <a:lstStyle/>
-          <a:p>
-            <a:pPr indent="0" marL="0">
-              <a:buNone/>
-            </a:pPr>
-            <a:r>
-              <a:rPr lang="en-US" sz="1300" b="1" dirty="0">
-                <a:solidFill>
-                  <a:srgbClr val="1F6F68"/>
-                </a:solidFill>
-                <a:latin typeface="Cambria" pitchFamily="34" charset="0"/>
-                <a:ea typeface="Cambria" pitchFamily="34" charset="-122"/>
-                <a:cs typeface="Cambria" pitchFamily="34" charset="-120"/>
-              </a:rPr>
-              <a:t>7</a:t>
-            </a:r>
-            <a:endParaRPr lang="en-US" sz="1300" dirty="0"/>
-          </a:p>
-        </p:txBody>
-      </p:sp>
-      <p:sp>
-        <p:nvSpPr>
-          <p:cNvPr id="18" name="Text 16"/>
-          <p:cNvSpPr txBox="1"/>
-          <p:nvPr/>
-        </p:nvSpPr>
-        <p:spPr>
-          <a:xfrm>
-            <a:off x="960120" y="4672584"/>
-            <a:ext cx="10682935" cy="457200"/>
-          </a:xfrm>
-          <a:prstGeom prst="rect">
-            <a:avLst/>
-          </a:prstGeom>
-          <a:noFill/>
-          <a:ln/>
-        </p:spPr>
-        <p:txBody>
-          <a:bodyPr wrap="square" lIns="0" tIns="0" rIns="0" bIns="0" rtlCol="0" anchor="t"/>
-          <a:lstStyle/>
-          <a:p>
-            <a:pPr indent="0" marL="0">
-              <a:buNone/>
-            </a:pPr>
-            <a:r>
-              <a:rPr lang="en-US" sz="1100" dirty="0">
-                <a:solidFill>
-                  <a:srgbClr val="16252B"/>
-                </a:solidFill>
-                <a:latin typeface="Calibri" pitchFamily="34" charset="0"/>
-                <a:ea typeface="Calibri" pitchFamily="34" charset="-122"/>
-                <a:cs typeface="Calibri" pitchFamily="34" charset="-120"/>
-              </a:rPr>
-              <a:t>Постановление Правительства РФ от 30.11.2024 № 1684 «Об утверждении Правил государственной регистрации медицинских изделий» (действует с 01.03.2025)</a:t>
-            </a:r>
-            <a:endParaRPr lang="en-US" sz="1100" dirty="0"/>
-          </a:p>
-        </p:txBody>
-      </p:sp>
-      <p:sp>
-        <p:nvSpPr>
-          <p:cNvPr id="19" name="Text 17"/>
-          <p:cNvSpPr txBox="1"/>
-          <p:nvPr/>
-        </p:nvSpPr>
-        <p:spPr>
-          <a:xfrm>
-            <a:off x="548640" y="5184648"/>
-            <a:ext cx="320040" cy="457200"/>
-          </a:xfrm>
-          <a:prstGeom prst="rect">
-            <a:avLst/>
-          </a:prstGeom>
-          <a:noFill/>
-          <a:ln/>
-        </p:spPr>
-        <p:txBody>
-          <a:bodyPr wrap="square" lIns="0" tIns="0" rIns="0" bIns="0" rtlCol="0" anchor="t"/>
-          <a:lstStyle/>
-          <a:p>
-            <a:pPr indent="0" marL="0">
-              <a:buNone/>
-            </a:pPr>
-            <a:r>
-              <a:rPr lang="en-US" sz="1300" b="1" dirty="0">
-                <a:solidFill>
-                  <a:srgbClr val="1F6F68"/>
-                </a:solidFill>
-                <a:latin typeface="Cambria" pitchFamily="34" charset="0"/>
-                <a:ea typeface="Cambria" pitchFamily="34" charset="-122"/>
-                <a:cs typeface="Cambria" pitchFamily="34" charset="-120"/>
-              </a:rPr>
-              <a:t>8</a:t>
-            </a:r>
-            <a:endParaRPr lang="en-US" sz="1300" dirty="0"/>
-          </a:p>
-        </p:txBody>
-      </p:sp>
-      <p:sp>
-        <p:nvSpPr>
-          <p:cNvPr id="20" name="Text 18"/>
-          <p:cNvSpPr txBox="1"/>
-          <p:nvPr/>
-        </p:nvSpPr>
-        <p:spPr>
-          <a:xfrm>
-            <a:off x="960120" y="5184648"/>
-            <a:ext cx="10682935" cy="457200"/>
-          </a:xfrm>
-          <a:prstGeom prst="rect">
-            <a:avLst/>
-          </a:prstGeom>
-          <a:noFill/>
-          <a:ln/>
-        </p:spPr>
-        <p:txBody>
-          <a:bodyPr wrap="square" lIns="0" tIns="0" rIns="0" bIns="0" rtlCol="0" anchor="t"/>
-          <a:lstStyle/>
-          <a:p>
-            <a:pPr indent="0" marL="0">
-              <a:buNone/>
-            </a:pPr>
-            <a:r>
-              <a:rPr lang="en-US" sz="1100" dirty="0">
-                <a:solidFill>
-                  <a:srgbClr val="16252B"/>
-                </a:solidFill>
-                <a:latin typeface="Calibri" pitchFamily="34" charset="0"/>
-                <a:ea typeface="Calibri" pitchFamily="34" charset="-122"/>
-                <a:cs typeface="Calibri" pitchFamily="34" charset="-120"/>
-              </a:rPr>
-              <a:t>Золотарева А.А., 2023: русские версии PHQ-9 и GAD-7; Фаттахов, Горобец: русская версия DASS-42 (источники и права — evidence/S34/research.md, docs/clinical/scales-rights.md)</a:t>
-            </a:r>
-            <a:endParaRPr lang="en-US" sz="1100" dirty="0"/>
-          </a:p>
-        </p:txBody>
-      </p:sp>
-      <p:sp>
-        <p:nvSpPr>
-          <p:cNvPr id="25" name="Slide Number Placeholder 0"/>
-          <p:cNvSpPr>
-            <a:spLocks noGrp="1"/>
-          </p:cNvSpPr>
-          <p:nvPr>
-            <p:ph type="sldNum" sz="quarter" idx="4294967295"/>
-          </p:nvPr>
-        </p:nvSpPr>
-        <p:spPr>
-          <a:xfrm>
-            <a:off x="11274552" y="6419088"/>
-            <a:ext cx="365760" cy="256032"/>
-          </a:xfrm>
-          <a:prstGeom prst="rect">
-            <a:avLst/>
-          </a:prstGeom>
-          <a:extLst>
-            <a:ext uri="{C572A759-6A51-4108-AA02-DFA0A04FC94B}">
-              <ma14:wrappingTextBoxFlag xmlns:ma14="http://schemas.microsoft.com/office/mac/drawingml/2011/main" val="0"/>
-            </a:ext>
-          </a:extLst>
-        </p:spPr>
-        <p:txBody>
-          <a:bodyPr/>
-          <a:lstStyle>
-            <a:lvl1pPr>
-              <a:defRPr sz="900">
-                <a:solidFill>
-                  <a:srgbClr val="5A6B71"/>
-                </a:solidFill>
-                <a:latin typeface="Calibri"/>
-                <a:ea typeface="Calibri"/>
-                <a:cs typeface="Calibri"/>
-              </a:defRPr>
-            </a:lvl1pPr>
-          </a:lstStyle>
-          <a:p>
-            <a:pPr algn="r"/>
-            <a:fld id="{F7021451-1387-4CA6-816F-3879F97B5CBC}" type="slidenum">
-              <a:rPr b="0" lang="en-US"/>
-              <a:t>18</a:t>
-            </a:fld>
-            <a:endParaRPr lang="en-US"/>
+              <a:t>Команда «Шаг вперёд» · Казанский ГМУ · кейс-чемпионат Авинейро · 2026</a:t>
+            </a:r>
+            <a:endParaRPr lang="en-US" sz="1000" dirty="0"/>
           </a:p>
         </p:txBody>
       </p:sp>
@@ -18937,7 +19208,7 @@
         <p:spPr>
           <a:xfrm>
             <a:off x="548640" y="1572768"/>
-            <a:ext cx="6400800" cy="4000500"/>
+            <a:ext cx="5760720" cy="4291736"/>
           </a:xfrm>
           <a:prstGeom prst="rect">
             <a:avLst/>
@@ -18962,7 +19233,7 @@
       </p:sp>
       <p:pic>
         <p:nvPicPr>
-          <p:cNvPr id="6" name="Image 0" descr="/Users/azamatsibgatullin/Documents/HAC/deliverables/presentation/assets/doctor-patients.jpg">    </p:cNvPr>
+          <p:cNvPr id="6" name="Image 0" descr="/Users/azamatsibgatullin/Documents/HAC/deliverables/presentation/assets/doctor-patients-crop.jpg">    </p:cNvPr>
           <p:cNvPicPr>
             <a:picLocks noChangeAspect="1"/>
           </p:cNvPicPr>
@@ -18977,7 +19248,7 @@
         <p:spPr>
           <a:xfrm>
             <a:off x="576072" y="1600200"/>
-            <a:ext cx="6345936" cy="3945636"/>
+            <a:ext cx="5705856" cy="4236872"/>
           </a:xfrm>
           <a:prstGeom prst="rect">
             <a:avLst/>
@@ -18986,14 +19257,39 @@
       </p:pic>
       <p:sp>
         <p:nvSpPr>
-          <p:cNvPr id="7" name="Text 4"/>
-          <p:cNvSpPr txBox="1"/>
-          <p:nvPr/>
-        </p:nvSpPr>
-        <p:spPr>
-          <a:xfrm>
-            <a:off x="548640" y="5710428"/>
-            <a:ext cx="6400800" cy="365760"/>
+          <p:cNvPr id="7" name="Shape 4"/>
+          <p:cNvSpPr/>
+          <p:nvPr/>
+        </p:nvSpPr>
+        <p:spPr>
+          <a:xfrm>
+            <a:off x="6903720" y="1691640"/>
+            <a:ext cx="438912" cy="438912"/>
+          </a:xfrm>
+          <a:prstGeom prst="ellipse">
+            <a:avLst/>
+          </a:prstGeom>
+          <a:solidFill>
+            <a:srgbClr val="1F6F68"/>
+          </a:solidFill>
+          <a:ln w="12700">
+            <a:solidFill>
+              <a:srgbClr val="1F6F68"/>
+            </a:solidFill>
+            <a:prstDash val="solid"/>
+          </a:ln>
+        </p:spPr>
+      </p:sp>
+      <p:sp>
+        <p:nvSpPr>
+          <p:cNvPr id="8" name="Text 5"/>
+          <p:cNvSpPr txBox="1"/>
+          <p:nvPr/>
+        </p:nvSpPr>
+        <p:spPr>
+          <a:xfrm>
+            <a:off x="6903720" y="1691640"/>
+            <a:ext cx="438912" cy="438912"/>
           </a:xfrm>
           <a:prstGeom prst="rect">
             <a:avLst/>
@@ -19005,11 +19301,50 @@
           <a:bodyPr wrap="square" lIns="0" tIns="0" rIns="0" bIns="0" rtlCol="0" anchor="ctr"/>
           <a:lstStyle/>
           <a:p>
+            <a:pPr algn="ctr" indent="0" marL="0">
+              <a:buNone/>
+            </a:pPr>
+            <a:r>
+              <a:rPr lang="en-US" sz="1100" b="1" dirty="0">
+                <a:solidFill>
+                  <a:srgbClr val="FFFFFF"/>
+                </a:solidFill>
+                <a:latin typeface="Calibri" pitchFamily="34" charset="0"/>
+                <a:ea typeface="Calibri" pitchFamily="34" charset="-122"/>
+                <a:cs typeface="Calibri" pitchFamily="34" charset="-120"/>
+              </a:rPr>
+              <a:t>1</a:t>
+            </a:r>
+            <a:endParaRPr lang="en-US" sz="1100" dirty="0"/>
+          </a:p>
+        </p:txBody>
+      </p:sp>
+      <p:sp>
+        <p:nvSpPr>
+          <p:cNvPr id="9" name="Text 6"/>
+          <p:cNvSpPr txBox="1"/>
+          <p:nvPr/>
+        </p:nvSpPr>
+        <p:spPr>
+          <a:xfrm>
+            <a:off x="7543800" y="1673352"/>
+            <a:ext cx="4069080" cy="329184"/>
+          </a:xfrm>
+          <a:prstGeom prst="rect">
+            <a:avLst/>
+          </a:prstGeom>
+          <a:noFill/>
+          <a:ln/>
+        </p:spPr>
+        <p:txBody>
+          <a:bodyPr wrap="square" lIns="0" tIns="0" rIns="0" bIns="0" rtlCol="0" anchor="t"/>
+          <a:lstStyle/>
+          <a:p>
             <a:pPr indent="0" marL="0">
               <a:buNone/>
             </a:pPr>
             <a:r>
-              <a:rPr lang="en-US" sz="1500" b="1" dirty="0">
+              <a:rPr lang="en-US" sz="1600" b="1" dirty="0">
                 <a:solidFill>
                   <a:srgbClr val="123A40"/>
                 </a:solidFill>
@@ -19017,13 +19352,38 @@
                 <a:ea typeface="Cambria" pitchFamily="34" charset="-122"/>
                 <a:cs typeface="Cambria" pitchFamily="34" charset="-120"/>
               </a:rPr>
-              <a:t>Пациенты  </a:t>
-            </a:r>
+              <a:t>Причина рядом с именем</a:t>
+            </a:r>
+            <a:endParaRPr lang="en-US" sz="1600" dirty="0"/>
+          </a:p>
+        </p:txBody>
+      </p:sp>
+      <p:sp>
+        <p:nvSpPr>
+          <p:cNvPr id="10" name="Text 7"/>
+          <p:cNvSpPr txBox="1"/>
+          <p:nvPr/>
+        </p:nvSpPr>
+        <p:spPr>
+          <a:xfrm>
+            <a:off x="7543800" y="2020824"/>
+            <a:ext cx="4069080" cy="822960"/>
+          </a:xfrm>
+          <a:prstGeom prst="rect">
+            <a:avLst/>
+          </a:prstGeom>
+          <a:noFill/>
+          <a:ln/>
+        </p:spPr>
+        <p:txBody>
+          <a:bodyPr wrap="square" lIns="0" tIns="0" rIns="0" bIns="0" rtlCol="0" anchor="t"/>
+          <a:lstStyle/>
+          <a:p>
             <a:pPr indent="0" marL="0">
               <a:buNone/>
             </a:pPr>
             <a:r>
-              <a:rPr lang="en-US" sz="1200" dirty="0">
+              <a:rPr lang="en-US" sz="1300" dirty="0">
                 <a:solidFill>
                   <a:srgbClr val="16252B"/>
                 </a:solidFill>
@@ -19031,78 +19391,86 @@
                 <a:ea typeface="Calibri" pitchFamily="34" charset="-122"/>
                 <a:cs typeface="Calibri" pitchFamily="34" charset="-120"/>
               </a:rPr>
-              <a:t>Список с причинами для проверки и последними отметками самочувствия</a:t>
-            </a:r>
-            <a:endParaRPr lang="en-US" sz="1400" dirty="0"/>
-          </a:p>
-        </p:txBody>
-      </p:sp>
-      <p:sp>
-        <p:nvSpPr>
-          <p:cNvPr id="8" name="Shape 5"/>
+              <a:t>Пропуск в плане или нежелательное явление, с датой и ссылкой на исходную запись</a:t>
+            </a:r>
+            <a:endParaRPr lang="en-US" sz="1300" dirty="0"/>
+          </a:p>
+        </p:txBody>
+      </p:sp>
+      <p:sp>
+        <p:nvSpPr>
+          <p:cNvPr id="11" name="Shape 8"/>
           <p:cNvSpPr/>
           <p:nvPr/>
         </p:nvSpPr>
         <p:spPr>
           <a:xfrm>
-            <a:off x="7269480" y="1572768"/>
-            <a:ext cx="2606040" cy="1628775"/>
-          </a:xfrm>
-          <a:prstGeom prst="rect">
+            <a:off x="6903720" y="3063240"/>
+            <a:ext cx="438912" cy="438912"/>
+          </a:xfrm>
+          <a:prstGeom prst="ellipse">
             <a:avLst/>
           </a:prstGeom>
           <a:solidFill>
-            <a:srgbClr val="FFFFFF"/>
+            <a:srgbClr val="1F6F68"/>
           </a:solidFill>
-          <a:ln w="9525">
+          <a:ln w="12700">
             <a:solidFill>
-              <a:srgbClr val="D3DEDB"/>
+              <a:srgbClr val="1F6F68"/>
             </a:solidFill>
             <a:prstDash val="solid"/>
           </a:ln>
-          <a:effectLst>
-            <a:outerShdw sx="100000" sy="100000" kx="0" ky="0" algn="bl" rotWithShape="0" blurRad="127000" dist="38100" dir="5400000">
-              <a:srgbClr val="0B2226">
-                <a:alpha val="16000"/>
-              </a:srgbClr>
-            </a:outerShdw>
-          </a:effectLst>
-        </p:spPr>
-      </p:sp>
-      <p:pic>
-        <p:nvPicPr>
-          <p:cNvPr id="9" name="Image 1" descr="/Users/azamatsibgatullin/Documents/HAC/deliverables/presentation/assets/doctor-followup.jpg">    </p:cNvPr>
-          <p:cNvPicPr>
-            <a:picLocks noChangeAspect="1"/>
-          </p:cNvPicPr>
-          <p:nvPr/>
-        </p:nvPicPr>
-        <p:blipFill>
-          <a:blip r:embed="rId2"/>
-          <a:stretch>
-            <a:fillRect/>
-          </a:stretch>
-        </p:blipFill>
-        <p:spPr>
-          <a:xfrm>
-            <a:off x="7296912" y="1600200"/>
-            <a:ext cx="2551176" cy="1573911"/>
-          </a:xfrm>
-          <a:prstGeom prst="rect">
-            <a:avLst/>
-          </a:prstGeom>
-        </p:spPr>
-      </p:pic>
-      <p:sp>
-        <p:nvSpPr>
-          <p:cNvPr id="10" name="Text 6"/>
-          <p:cNvSpPr txBox="1"/>
-          <p:nvPr/>
-        </p:nvSpPr>
-        <p:spPr>
-          <a:xfrm>
-            <a:off x="10058400" y="1572768"/>
-            <a:ext cx="1600200" cy="548640"/>
+        </p:spPr>
+      </p:sp>
+      <p:sp>
+        <p:nvSpPr>
+          <p:cNvPr id="12" name="Text 9"/>
+          <p:cNvSpPr txBox="1"/>
+          <p:nvPr/>
+        </p:nvSpPr>
+        <p:spPr>
+          <a:xfrm>
+            <a:off x="6903720" y="3063240"/>
+            <a:ext cx="438912" cy="438912"/>
+          </a:xfrm>
+          <a:prstGeom prst="rect">
+            <a:avLst/>
+          </a:prstGeom>
+          <a:noFill/>
+          <a:ln/>
+        </p:spPr>
+        <p:txBody>
+          <a:bodyPr wrap="square" lIns="0" tIns="0" rIns="0" bIns="0" rtlCol="0" anchor="ctr"/>
+          <a:lstStyle/>
+          <a:p>
+            <a:pPr algn="ctr" indent="0" marL="0">
+              <a:buNone/>
+            </a:pPr>
+            <a:r>
+              <a:rPr lang="en-US" sz="1100" b="1" dirty="0">
+                <a:solidFill>
+                  <a:srgbClr val="FFFFFF"/>
+                </a:solidFill>
+                <a:latin typeface="Calibri" pitchFamily="34" charset="0"/>
+                <a:ea typeface="Calibri" pitchFamily="34" charset="-122"/>
+                <a:cs typeface="Calibri" pitchFamily="34" charset="-120"/>
+              </a:rPr>
+              <a:t>2</a:t>
+            </a:r>
+            <a:endParaRPr lang="en-US" sz="1100" dirty="0"/>
+          </a:p>
+        </p:txBody>
+      </p:sp>
+      <p:sp>
+        <p:nvSpPr>
+          <p:cNvPr id="13" name="Text 10"/>
+          <p:cNvSpPr txBox="1"/>
+          <p:nvPr/>
+        </p:nvSpPr>
+        <p:spPr>
+          <a:xfrm>
+            <a:off x="7543800" y="3044952"/>
+            <a:ext cx="4069080" cy="329184"/>
           </a:xfrm>
           <a:prstGeom prst="rect">
             <a:avLst/>
@@ -19118,7 +19486,7 @@
               <a:buNone/>
             </a:pPr>
             <a:r>
-              <a:rPr lang="en-US" sz="1400" b="1" dirty="0">
+              <a:rPr lang="en-US" sz="1600" b="1" dirty="0">
                 <a:solidFill>
                   <a:srgbClr val="123A40"/>
                 </a:solidFill>
@@ -19126,22 +19494,22 @@
                 <a:ea typeface="Cambria" pitchFamily="34" charset="-122"/>
                 <a:cs typeface="Cambria" pitchFamily="34" charset="-120"/>
               </a:rPr>
-              <a:t>Сводка к приёму</a:t>
-            </a:r>
-            <a:endParaRPr lang="en-US" sz="1400" dirty="0"/>
-          </a:p>
-        </p:txBody>
-      </p:sp>
-      <p:sp>
-        <p:nvSpPr>
-          <p:cNvPr id="11" name="Text 7"/>
-          <p:cNvSpPr txBox="1"/>
-          <p:nvPr/>
-        </p:nvSpPr>
-        <p:spPr>
-          <a:xfrm>
-            <a:off x="10058400" y="2139696"/>
-            <a:ext cx="1600200" cy="1097280"/>
+              <a:t>Последние отметки</a:t>
+            </a:r>
+            <a:endParaRPr lang="en-US" sz="1600" dirty="0"/>
+          </a:p>
+        </p:txBody>
+      </p:sp>
+      <p:sp>
+        <p:nvSpPr>
+          <p:cNvPr id="14" name="Text 11"/>
+          <p:cNvSpPr txBox="1"/>
+          <p:nvPr/>
+        </p:nvSpPr>
+        <p:spPr>
+          <a:xfrm>
+            <a:off x="7543800" y="3392424"/>
+            <a:ext cx="4069080" cy="822960"/>
           </a:xfrm>
           <a:prstGeom prst="rect">
             <a:avLst/>
@@ -19157,7 +19525,7 @@
               <a:buNone/>
             </a:pPr>
             <a:r>
-              <a:rPr lang="en-US" sz="1100" dirty="0">
+              <a:rPr lang="en-US" sz="1300" dirty="0">
                 <a:solidFill>
                   <a:srgbClr val="16252B"/>
                 </a:solidFill>
@@ -19165,78 +19533,86 @@
                 <a:ea typeface="Calibri" pitchFamily="34" charset="-122"/>
                 <a:cs typeface="Calibri" pitchFamily="34" charset="-120"/>
               </a:rPr>
-              <a:t>Записи за выбранный период; у каждой автор, время и неизвестные поля</a:t>
-            </a:r>
-            <a:endParaRPr lang="en-US" sz="1100" dirty="0"/>
-          </a:p>
-        </p:txBody>
-      </p:sp>
-      <p:sp>
-        <p:nvSpPr>
-          <p:cNvPr id="12" name="Shape 8"/>
+              <a:t>Пять последних дней самочувствия: лучше, без изменений, хуже или не указано</a:t>
+            </a:r>
+            <a:endParaRPr lang="en-US" sz="1300" dirty="0"/>
+          </a:p>
+        </p:txBody>
+      </p:sp>
+      <p:sp>
+        <p:nvSpPr>
+          <p:cNvPr id="15" name="Shape 12"/>
           <p:cNvSpPr/>
           <p:nvPr/>
         </p:nvSpPr>
         <p:spPr>
           <a:xfrm>
-            <a:off x="7269480" y="3694176"/>
-            <a:ext cx="2606040" cy="1628775"/>
-          </a:xfrm>
-          <a:prstGeom prst="rect">
+            <a:off x="6903720" y="4434840"/>
+            <a:ext cx="438912" cy="438912"/>
+          </a:xfrm>
+          <a:prstGeom prst="ellipse">
             <a:avLst/>
           </a:prstGeom>
           <a:solidFill>
-            <a:srgbClr val="FFFFFF"/>
+            <a:srgbClr val="1F6F68"/>
           </a:solidFill>
-          <a:ln w="9525">
+          <a:ln w="12700">
             <a:solidFill>
-              <a:srgbClr val="D3DEDB"/>
+              <a:srgbClr val="1F6F68"/>
             </a:solidFill>
             <a:prstDash val="solid"/>
           </a:ln>
-          <a:effectLst>
-            <a:outerShdw sx="100000" sy="100000" kx="0" ky="0" algn="bl" rotWithShape="0" blurRad="127000" dist="38100" dir="5400000">
-              <a:srgbClr val="0B2226">
-                <a:alpha val="16000"/>
-              </a:srgbClr>
-            </a:outerShdw>
-          </a:effectLst>
-        </p:spPr>
-      </p:sp>
-      <p:pic>
-        <p:nvPicPr>
-          <p:cNvPr id="13" name="Image 2" descr="/Users/azamatsibgatullin/Documents/HAC/deliverables/presentation/assets/doctor-plan.jpg">    </p:cNvPr>
-          <p:cNvPicPr>
-            <a:picLocks noChangeAspect="1"/>
-          </p:cNvPicPr>
-          <p:nvPr/>
-        </p:nvPicPr>
-        <p:blipFill>
-          <a:blip r:embed="rId3"/>
-          <a:stretch>
-            <a:fillRect/>
-          </a:stretch>
-        </p:blipFill>
-        <p:spPr>
-          <a:xfrm>
-            <a:off x="7296912" y="3721608"/>
-            <a:ext cx="2551176" cy="1573911"/>
-          </a:xfrm>
-          <a:prstGeom prst="rect">
-            <a:avLst/>
-          </a:prstGeom>
-        </p:spPr>
-      </p:pic>
-      <p:sp>
-        <p:nvSpPr>
-          <p:cNvPr id="14" name="Text 9"/>
-          <p:cNvSpPr txBox="1"/>
-          <p:nvPr/>
-        </p:nvSpPr>
-        <p:spPr>
-          <a:xfrm>
-            <a:off x="10058400" y="3694176"/>
-            <a:ext cx="1600200" cy="548640"/>
+        </p:spPr>
+      </p:sp>
+      <p:sp>
+        <p:nvSpPr>
+          <p:cNvPr id="16" name="Text 13"/>
+          <p:cNvSpPr txBox="1"/>
+          <p:nvPr/>
+        </p:nvSpPr>
+        <p:spPr>
+          <a:xfrm>
+            <a:off x="6903720" y="4434840"/>
+            <a:ext cx="438912" cy="438912"/>
+          </a:xfrm>
+          <a:prstGeom prst="rect">
+            <a:avLst/>
+          </a:prstGeom>
+          <a:noFill/>
+          <a:ln/>
+        </p:spPr>
+        <p:txBody>
+          <a:bodyPr wrap="square" lIns="0" tIns="0" rIns="0" bIns="0" rtlCol="0" anchor="ctr"/>
+          <a:lstStyle/>
+          <a:p>
+            <a:pPr algn="ctr" indent="0" marL="0">
+              <a:buNone/>
+            </a:pPr>
+            <a:r>
+              <a:rPr lang="en-US" sz="1100" b="1" dirty="0">
+                <a:solidFill>
+                  <a:srgbClr val="FFFFFF"/>
+                </a:solidFill>
+                <a:latin typeface="Calibri" pitchFamily="34" charset="0"/>
+                <a:ea typeface="Calibri" pitchFamily="34" charset="-122"/>
+                <a:cs typeface="Calibri" pitchFamily="34" charset="-120"/>
+              </a:rPr>
+              <a:t>3</a:t>
+            </a:r>
+            <a:endParaRPr lang="en-US" sz="1100" dirty="0"/>
+          </a:p>
+        </p:txBody>
+      </p:sp>
+      <p:sp>
+        <p:nvSpPr>
+          <p:cNvPr id="17" name="Text 14"/>
+          <p:cNvSpPr txBox="1"/>
+          <p:nvPr/>
+        </p:nvSpPr>
+        <p:spPr>
+          <a:xfrm>
+            <a:off x="7543800" y="4416552"/>
+            <a:ext cx="4069080" cy="329184"/>
           </a:xfrm>
           <a:prstGeom prst="rect">
             <a:avLst/>
@@ -19252,7 +19628,7 @@
               <a:buNone/>
             </a:pPr>
             <a:r>
-              <a:rPr lang="en-US" sz="1400" b="1" dirty="0">
+              <a:rPr lang="en-US" sz="1600" b="1" dirty="0">
                 <a:solidFill>
                   <a:srgbClr val="123A40"/>
                 </a:solidFill>
@@ -19260,22 +19636,22 @@
                 <a:ea typeface="Cambria" pitchFamily="34" charset="-122"/>
                 <a:cs typeface="Cambria" pitchFamily="34" charset="-120"/>
               </a:rPr>
-              <a:t>План и решения</a:t>
-            </a:r>
-            <a:endParaRPr lang="en-US" sz="1400" dirty="0"/>
-          </a:p>
-        </p:txBody>
-      </p:sp>
-      <p:sp>
-        <p:nvSpPr>
-          <p:cNvPr id="15" name="Text 10"/>
-          <p:cNvSpPr txBox="1"/>
-          <p:nvPr/>
-        </p:nvSpPr>
-        <p:spPr>
-          <a:xfrm>
-            <a:off x="10058400" y="4261104"/>
-            <a:ext cx="1600200" cy="1097280"/>
+              <a:t>Два режима списка</a:t>
+            </a:r>
+            <a:endParaRPr lang="en-US" sz="1600" dirty="0"/>
+          </a:p>
+        </p:txBody>
+      </p:sp>
+      <p:sp>
+        <p:nvSpPr>
+          <p:cNvPr id="18" name="Text 15"/>
+          <p:cNvSpPr txBox="1"/>
+          <p:nvPr/>
+        </p:nvSpPr>
+        <p:spPr>
+          <a:xfrm>
+            <a:off x="7543800" y="4764024"/>
+            <a:ext cx="4069080" cy="822960"/>
           </a:xfrm>
           <a:prstGeom prst="rect">
             <a:avLst/>
@@ -19291,7 +19667,7 @@
               <a:buNone/>
             </a:pPr>
             <a:r>
-              <a:rPr lang="en-US" sz="1100" dirty="0">
+              <a:rPr lang="en-US" sz="1300" dirty="0">
                 <a:solidFill>
                   <a:srgbClr val="16252B"/>
                 </a:solidFill>
@@ -19299,15 +19675,15 @@
                 <a:ea typeface="Calibri" pitchFamily="34" charset="-122"/>
                 <a:cs typeface="Calibri" pitchFamily="34" charset="-120"/>
               </a:rPr>
-              <a:t>Текущий план с подтверждением врача и недельный календарь препаратов</a:t>
-            </a:r>
-            <a:endParaRPr lang="en-US" sz="1100" dirty="0"/>
-          </a:p>
-        </p:txBody>
-      </p:sp>
-      <p:sp>
-        <p:nvSpPr>
-          <p:cNvPr id="16" name="Text 11"/>
+              <a:t>«Все пациенты» и «Нужно проверить», поиск по имени, коду и словам из записей</a:t>
+            </a:r>
+            <a:endParaRPr lang="en-US" sz="1300" dirty="0"/>
+          </a:p>
+        </p:txBody>
+      </p:sp>
+      <p:sp>
+        <p:nvSpPr>
+          <p:cNvPr id="19" name="Text 16"/>
           <p:cNvSpPr txBox="1"/>
           <p:nvPr/>
         </p:nvSpPr>
@@ -19426,7 +19802,7 @@
         <p:spPr>
           <a:xfrm>
             <a:off x="548640" y="384048"/>
-            <a:ext cx="1989734" cy="256032"/>
+            <a:ext cx="1709928" cy="256032"/>
           </a:xfrm>
           <a:prstGeom prst="roundRect">
             <a:avLst>
@@ -19453,7 +19829,7 @@
         <p:spPr>
           <a:xfrm>
             <a:off x="548640" y="384048"/>
-            <a:ext cx="1989734" cy="256032"/>
+            <a:ext cx="1709928" cy="256032"/>
           </a:xfrm>
           <a:prstGeom prst="rect">
             <a:avLst/>
@@ -19477,7 +19853,7 @@
                 <a:ea typeface="Calibri" pitchFamily="34" charset="-122"/>
                 <a:cs typeface="Calibri" pitchFamily="34" charset="-120"/>
               </a:rPr>
-              <a:t>ПРОТОТИП · ПАЦИЕНТ</a:t>
+              <a:t>ПРОТОТИП · ВРАЧ</a:t>
             </a:r>
             <a:endParaRPr lang="en-US" sz="900" dirty="0"/>
           </a:p>
@@ -19518,7 +19894,7 @@
                 <a:ea typeface="Cambria" pitchFamily="34" charset="-122"/>
                 <a:cs typeface="Cambria" pitchFamily="34" charset="-120"/>
               </a:rPr>
-              <a:t>Пациенту достаточно телефона</a:t>
+              <a:t>Перед приёмом всё за период собрано на одном экране</a:t>
             </a:r>
             <a:endParaRPr lang="en-US" sz="2800" dirty="0"/>
           </a:p>
@@ -19532,401 +19908,18 @@
         </p:nvSpPr>
         <p:spPr>
           <a:xfrm>
-            <a:off x="548640" y="1691640"/>
-            <a:ext cx="512064" cy="512064"/>
-          </a:xfrm>
-          <a:prstGeom prst="ellipse">
+            <a:off x="548640" y="1572768"/>
+            <a:ext cx="5257800" cy="3917061"/>
+          </a:xfrm>
+          <a:prstGeom prst="rect">
             <a:avLst/>
           </a:prstGeom>
           <a:solidFill>
-            <a:srgbClr val="FBEBD9"/>
+            <a:srgbClr val="FFFFFF"/>
           </a:solidFill>
-          <a:ln w="12700">
+          <a:ln w="9525">
             <a:solidFill>
-              <a:srgbClr val="FBEBD9"/>
-            </a:solidFill>
-            <a:prstDash val="solid"/>
-          </a:ln>
-        </p:spPr>
-      </p:sp>
-      <p:pic>
-        <p:nvPicPr>
-          <p:cNvPr id="6" name="Image 0" descr="preencoded.png">    </p:cNvPr>
-          <p:cNvPicPr>
-            <a:picLocks noChangeAspect="1"/>
-          </p:cNvPicPr>
-          <p:nvPr/>
-        </p:nvPicPr>
-        <p:blipFill>
-          <a:blip r:embed="rId1"/>
-          <a:stretch>
-            <a:fillRect/>
-          </a:stretch>
-        </p:blipFill>
-        <p:spPr>
-          <a:xfrm>
-            <a:off x="686897" y="1829897"/>
-            <a:ext cx="235549" cy="235549"/>
-          </a:xfrm>
-          <a:prstGeom prst="rect">
-            <a:avLst/>
-          </a:prstGeom>
-        </p:spPr>
-      </p:pic>
-      <p:sp>
-        <p:nvSpPr>
-          <p:cNvPr id="7" name="Text 4"/>
-          <p:cNvSpPr txBox="1"/>
-          <p:nvPr/>
-        </p:nvSpPr>
-        <p:spPr>
-          <a:xfrm>
-            <a:off x="1234440" y="1673352"/>
-            <a:ext cx="2377440" cy="292608"/>
-          </a:xfrm>
-          <a:prstGeom prst="rect">
-            <a:avLst/>
-          </a:prstGeom>
-          <a:noFill/>
-          <a:ln/>
-        </p:spPr>
-        <p:txBody>
-          <a:bodyPr wrap="square" lIns="0" tIns="0" rIns="0" bIns="0" rtlCol="0" anchor="t"/>
-          <a:lstStyle/>
-          <a:p>
-            <a:pPr indent="0" marL="0">
-              <a:buNone/>
-            </a:pPr>
-            <a:r>
-              <a:rPr lang="en-US" sz="1400" b="1" dirty="0">
-                <a:solidFill>
-                  <a:srgbClr val="123A40"/>
-                </a:solidFill>
-                <a:latin typeface="Cambria" pitchFamily="34" charset="0"/>
-                <a:ea typeface="Cambria" pitchFamily="34" charset="-122"/>
-                <a:cs typeface="Cambria" pitchFamily="34" charset="-120"/>
-              </a:rPr>
-              <a:t>Одно главное действие</a:t>
-            </a:r>
-            <a:endParaRPr lang="en-US" sz="1400" dirty="0"/>
-          </a:p>
-        </p:txBody>
-      </p:sp>
-      <p:sp>
-        <p:nvSpPr>
-          <p:cNvPr id="8" name="Text 5"/>
-          <p:cNvSpPr txBox="1"/>
-          <p:nvPr/>
-        </p:nvSpPr>
-        <p:spPr>
-          <a:xfrm>
-            <a:off x="1234440" y="1984248"/>
-            <a:ext cx="2377440" cy="822960"/>
-          </a:xfrm>
-          <a:prstGeom prst="rect">
-            <a:avLst/>
-          </a:prstGeom>
-          <a:noFill/>
-          <a:ln/>
-        </p:spPr>
-        <p:txBody>
-          <a:bodyPr wrap="square" lIns="0" tIns="0" rIns="0" bIns="0" rtlCol="0" anchor="t"/>
-          <a:lstStyle/>
-          <a:p>
-            <a:pPr indent="0" marL="0">
-              <a:buNone/>
-            </a:pPr>
-            <a:r>
-              <a:rPr lang="en-US" sz="1200" dirty="0">
-                <a:solidFill>
-                  <a:srgbClr val="16252B"/>
-                </a:solidFill>
-                <a:latin typeface="Calibri" pitchFamily="34" charset="0"/>
-                <a:ea typeface="Calibri" pitchFamily="34" charset="-122"/>
-                <a:cs typeface="Calibri" pitchFamily="34" charset="-120"/>
-              </a:rPr>
-              <a:t>На каждом экране сразу видно, что сделать сейчас, без прокрутки</a:t>
-            </a:r>
-            <a:endParaRPr lang="en-US" sz="1200" dirty="0"/>
-          </a:p>
-        </p:txBody>
-      </p:sp>
-      <p:sp>
-        <p:nvSpPr>
-          <p:cNvPr id="9" name="Shape 6"/>
-          <p:cNvSpPr/>
-          <p:nvPr/>
-        </p:nvSpPr>
-        <p:spPr>
-          <a:xfrm>
-            <a:off x="548640" y="3063240"/>
-            <a:ext cx="512064" cy="512064"/>
-          </a:xfrm>
-          <a:prstGeom prst="ellipse">
-            <a:avLst/>
-          </a:prstGeom>
-          <a:solidFill>
-            <a:srgbClr val="FBEBD9"/>
-          </a:solidFill>
-          <a:ln w="12700">
-            <a:solidFill>
-              <a:srgbClr val="FBEBD9"/>
-            </a:solidFill>
-            <a:prstDash val="solid"/>
-          </a:ln>
-        </p:spPr>
-      </p:sp>
-      <p:pic>
-        <p:nvPicPr>
-          <p:cNvPr id="10" name="Image 1" descr="preencoded.png">    </p:cNvPr>
-          <p:cNvPicPr>
-            <a:picLocks noChangeAspect="1"/>
-          </p:cNvPicPr>
-          <p:nvPr/>
-        </p:nvPicPr>
-        <p:blipFill>
-          <a:blip r:embed="rId2"/>
-          <a:stretch>
-            <a:fillRect/>
-          </a:stretch>
-        </p:blipFill>
-        <p:spPr>
-          <a:xfrm>
-            <a:off x="686897" y="3201497"/>
-            <a:ext cx="235549" cy="235549"/>
-          </a:xfrm>
-          <a:prstGeom prst="rect">
-            <a:avLst/>
-          </a:prstGeom>
-        </p:spPr>
-      </p:pic>
-      <p:sp>
-        <p:nvSpPr>
-          <p:cNvPr id="11" name="Text 7"/>
-          <p:cNvSpPr txBox="1"/>
-          <p:nvPr/>
-        </p:nvSpPr>
-        <p:spPr>
-          <a:xfrm>
-            <a:off x="1234440" y="3044952"/>
-            <a:ext cx="2377440" cy="292608"/>
-          </a:xfrm>
-          <a:prstGeom prst="rect">
-            <a:avLst/>
-          </a:prstGeom>
-          <a:noFill/>
-          <a:ln/>
-        </p:spPr>
-        <p:txBody>
-          <a:bodyPr wrap="square" lIns="0" tIns="0" rIns="0" bIns="0" rtlCol="0" anchor="t"/>
-          <a:lstStyle/>
-          <a:p>
-            <a:pPr indent="0" marL="0">
-              <a:buNone/>
-            </a:pPr>
-            <a:r>
-              <a:rPr lang="en-US" sz="1400" b="1" dirty="0">
-                <a:solidFill>
-                  <a:srgbClr val="123A40"/>
-                </a:solidFill>
-                <a:latin typeface="Cambria" pitchFamily="34" charset="0"/>
-                <a:ea typeface="Cambria" pitchFamily="34" charset="-122"/>
-                <a:cs typeface="Cambria" pitchFamily="34" charset="-120"/>
-              </a:rPr>
-              <a:t>Запись дошла</a:t>
-            </a:r>
-            <a:endParaRPr lang="en-US" sz="1400" dirty="0"/>
-          </a:p>
-        </p:txBody>
-      </p:sp>
-      <p:sp>
-        <p:nvSpPr>
-          <p:cNvPr id="12" name="Text 8"/>
-          <p:cNvSpPr txBox="1"/>
-          <p:nvPr/>
-        </p:nvSpPr>
-        <p:spPr>
-          <a:xfrm>
-            <a:off x="1234440" y="3355848"/>
-            <a:ext cx="2377440" cy="822960"/>
-          </a:xfrm>
-          <a:prstGeom prst="rect">
-            <a:avLst/>
-          </a:prstGeom>
-          <a:noFill/>
-          <a:ln/>
-        </p:spPr>
-        <p:txBody>
-          <a:bodyPr wrap="square" lIns="0" tIns="0" rIns="0" bIns="0" rtlCol="0" anchor="t"/>
-          <a:lstStyle/>
-          <a:p>
-            <a:pPr indent="0" marL="0">
-              <a:buNone/>
-            </a:pPr>
-            <a:r>
-              <a:rPr lang="en-US" sz="1200" dirty="0">
-                <a:solidFill>
-                  <a:srgbClr val="16252B"/>
-                </a:solidFill>
-                <a:latin typeface="Calibri" pitchFamily="34" charset="0"/>
-                <a:ea typeface="Calibri" pitchFamily="34" charset="-122"/>
-                <a:cs typeface="Calibri" pitchFamily="34" charset="-120"/>
-              </a:rPr>
-              <a:t>Пациент видит время сохранения на сервере и квитанцию об анкете</a:t>
-            </a:r>
-            <a:endParaRPr lang="en-US" sz="1200" dirty="0"/>
-          </a:p>
-        </p:txBody>
-      </p:sp>
-      <p:sp>
-        <p:nvSpPr>
-          <p:cNvPr id="13" name="Shape 9"/>
-          <p:cNvSpPr/>
-          <p:nvPr/>
-        </p:nvSpPr>
-        <p:spPr>
-          <a:xfrm>
-            <a:off x="548640" y="4434840"/>
-            <a:ext cx="512064" cy="512064"/>
-          </a:xfrm>
-          <a:prstGeom prst="ellipse">
-            <a:avLst/>
-          </a:prstGeom>
-          <a:solidFill>
-            <a:srgbClr val="FBEBD9"/>
-          </a:solidFill>
-          <a:ln w="12700">
-            <a:solidFill>
-              <a:srgbClr val="FBEBD9"/>
-            </a:solidFill>
-            <a:prstDash val="solid"/>
-          </a:ln>
-        </p:spPr>
-      </p:sp>
-      <p:pic>
-        <p:nvPicPr>
-          <p:cNvPr id="14" name="Image 2" descr="preencoded.png">    </p:cNvPr>
-          <p:cNvPicPr>
-            <a:picLocks noChangeAspect="1"/>
-          </p:cNvPicPr>
-          <p:nvPr/>
-        </p:nvPicPr>
-        <p:blipFill>
-          <a:blip r:embed="rId3"/>
-          <a:stretch>
-            <a:fillRect/>
-          </a:stretch>
-        </p:blipFill>
-        <p:spPr>
-          <a:xfrm>
-            <a:off x="686897" y="4573097"/>
-            <a:ext cx="235549" cy="235549"/>
-          </a:xfrm>
-          <a:prstGeom prst="rect">
-            <a:avLst/>
-          </a:prstGeom>
-        </p:spPr>
-      </p:pic>
-      <p:sp>
-        <p:nvSpPr>
-          <p:cNvPr id="15" name="Text 10"/>
-          <p:cNvSpPr txBox="1"/>
-          <p:nvPr/>
-        </p:nvSpPr>
-        <p:spPr>
-          <a:xfrm>
-            <a:off x="1234440" y="4416552"/>
-            <a:ext cx="2377440" cy="292608"/>
-          </a:xfrm>
-          <a:prstGeom prst="rect">
-            <a:avLst/>
-          </a:prstGeom>
-          <a:noFill/>
-          <a:ln/>
-        </p:spPr>
-        <p:txBody>
-          <a:bodyPr wrap="square" lIns="0" tIns="0" rIns="0" bIns="0" rtlCol="0" anchor="t"/>
-          <a:lstStyle/>
-          <a:p>
-            <a:pPr indent="0" marL="0">
-              <a:buNone/>
-            </a:pPr>
-            <a:r>
-              <a:rPr lang="en-US" sz="1400" b="1" dirty="0">
-                <a:solidFill>
-                  <a:srgbClr val="123A40"/>
-                </a:solidFill>
-                <a:latin typeface="Cambria" pitchFamily="34" charset="0"/>
-                <a:ea typeface="Cambria" pitchFamily="34" charset="-122"/>
-                <a:cs typeface="Cambria" pitchFamily="34" charset="-120"/>
-              </a:rPr>
-              <a:t>Баллы видит врач</a:t>
-            </a:r>
-            <a:endParaRPr lang="en-US" sz="1400" dirty="0"/>
-          </a:p>
-        </p:txBody>
-      </p:sp>
-      <p:sp>
-        <p:nvSpPr>
-          <p:cNvPr id="16" name="Text 11"/>
-          <p:cNvSpPr txBox="1"/>
-          <p:nvPr/>
-        </p:nvSpPr>
-        <p:spPr>
-          <a:xfrm>
-            <a:off x="1234440" y="4727448"/>
-            <a:ext cx="2377440" cy="822960"/>
-          </a:xfrm>
-          <a:prstGeom prst="rect">
-            <a:avLst/>
-          </a:prstGeom>
-          <a:noFill/>
-          <a:ln/>
-        </p:spPr>
-        <p:txBody>
-          <a:bodyPr wrap="square" lIns="0" tIns="0" rIns="0" bIns="0" rtlCol="0" anchor="t"/>
-          <a:lstStyle/>
-          <a:p>
-            <a:pPr indent="0" marL="0">
-              <a:buNone/>
-            </a:pPr>
-            <a:r>
-              <a:rPr lang="en-US" sz="1200" dirty="0">
-                <a:solidFill>
-                  <a:srgbClr val="16252B"/>
-                </a:solidFill>
-                <a:latin typeface="Calibri" pitchFamily="34" charset="0"/>
-                <a:ea typeface="Calibri" pitchFamily="34" charset="-122"/>
-                <a:cs typeface="Calibri" pitchFamily="34" charset="-120"/>
-              </a:rPr>
-              <a:t>Пациент получает квитанцию, а суммы и графики анкет остаются у врача</a:t>
-            </a:r>
-            <a:endParaRPr lang="en-US" sz="1200" dirty="0"/>
-          </a:p>
-        </p:txBody>
-      </p:sp>
-      <p:sp>
-        <p:nvSpPr>
-          <p:cNvPr id="17" name="Shape 12"/>
-          <p:cNvSpPr/>
-          <p:nvPr/>
-        </p:nvSpPr>
-        <p:spPr>
-          <a:xfrm>
-            <a:off x="3886200" y="1554480"/>
-            <a:ext cx="1847088" cy="3826975"/>
-          </a:xfrm>
-          <a:prstGeom prst="roundRect">
-            <a:avLst>
-              <a:gd name="adj" fmla="val 7921"/>
-            </a:avLst>
-          </a:prstGeom>
-          <a:solidFill>
-            <a:srgbClr val="16252B"/>
-          </a:solidFill>
-          <a:ln w="12700">
-            <a:solidFill>
-              <a:srgbClr val="16252B"/>
+              <a:srgbClr val="D3DEDB"/>
             </a:solidFill>
             <a:prstDash val="solid"/>
           </a:ln>
@@ -19941,22 +19934,22 @@
       </p:sp>
       <p:pic>
         <p:nvPicPr>
-          <p:cNvPr id="18" name="Image 3" descr="/Users/azamatsibgatullin/Documents/HAC/deliverables/presentation/assets/patient-today.jpg">    </p:cNvPr>
+          <p:cNvPr id="6" name="Image 0" descr="/Users/azamatsibgatullin/Documents/HAC/deliverables/presentation/assets/doctor-followup-crop.jpg">    </p:cNvPr>
           <p:cNvPicPr>
             <a:picLocks noChangeAspect="1"/>
           </p:cNvPicPr>
           <p:nvPr/>
         </p:nvPicPr>
         <p:blipFill>
-          <a:blip r:embed="rId4"/>
+          <a:blip r:embed="rId1"/>
           <a:stretch>
             <a:fillRect/>
           </a:stretch>
         </p:blipFill>
         <p:spPr>
           <a:xfrm>
-            <a:off x="3959352" y="1627632"/>
-            <a:ext cx="1700784" cy="3680671"/>
+            <a:off x="576072" y="1600200"/>
+            <a:ext cx="5202936" cy="3862197"/>
           </a:xfrm>
           <a:prstGeom prst="rect">
             <a:avLst/>
@@ -19965,30 +19958,30 @@
       </p:pic>
       <p:sp>
         <p:nvSpPr>
-          <p:cNvPr id="19" name="Text 13"/>
-          <p:cNvSpPr txBox="1"/>
-          <p:nvPr/>
-        </p:nvSpPr>
-        <p:spPr>
-          <a:xfrm>
-            <a:off x="3886200" y="5472895"/>
-            <a:ext cx="1847088" cy="274320"/>
-          </a:xfrm>
-          <a:prstGeom prst="rect">
-            <a:avLst/>
-          </a:prstGeom>
-          <a:noFill/>
-          <a:ln/>
-        </p:spPr>
-        <p:txBody>
-          <a:bodyPr wrap="square" lIns="0" tIns="0" rIns="0" bIns="0" rtlCol="0" anchor="t"/>
-          <a:lstStyle/>
-          <a:p>
-            <a:pPr algn="ctr" indent="0" marL="0">
-              <a:buNone/>
-            </a:pPr>
-            <a:r>
-              <a:rPr lang="en-US" sz="1200" b="1" dirty="0">
+          <p:cNvPr id="7" name="Text 4"/>
+          <p:cNvSpPr txBox="1"/>
+          <p:nvPr/>
+        </p:nvSpPr>
+        <p:spPr>
+          <a:xfrm>
+            <a:off x="548640" y="5599557"/>
+            <a:ext cx="5257800" cy="384048"/>
+          </a:xfrm>
+          <a:prstGeom prst="rect">
+            <a:avLst/>
+          </a:prstGeom>
+          <a:noFill/>
+          <a:ln/>
+        </p:spPr>
+        <p:txBody>
+          <a:bodyPr wrap="square" lIns="0" tIns="0" rIns="0" bIns="0" rtlCol="0" anchor="ctr"/>
+          <a:lstStyle/>
+          <a:p>
+            <a:pPr indent="0" marL="0">
+              <a:buNone/>
+            </a:pPr>
+            <a:r>
+              <a:rPr lang="en-US" sz="1500" b="1" dirty="0">
                 <a:solidFill>
                   <a:srgbClr val="123A40"/>
                 </a:solidFill>
@@ -19996,34 +19989,46 @@
                 <a:ea typeface="Cambria" pitchFamily="34" charset="-122"/>
                 <a:cs typeface="Cambria" pitchFamily="34" charset="-120"/>
               </a:rPr>
-              <a:t>Сегодня</a:t>
-            </a:r>
-            <a:endParaRPr lang="en-US" sz="1200" dirty="0"/>
-          </a:p>
-        </p:txBody>
-      </p:sp>
-      <p:sp>
-        <p:nvSpPr>
-          <p:cNvPr id="20" name="Shape 14"/>
+              <a:t>Сводка к приёму  </a:t>
+            </a:r>
+            <a:pPr indent="0" marL="0">
+              <a:buNone/>
+            </a:pPr>
+            <a:r>
+              <a:rPr lang="en-US" sz="1200" dirty="0">
+                <a:solidFill>
+                  <a:srgbClr val="16252B"/>
+                </a:solidFill>
+                <a:latin typeface="Calibri" pitchFamily="34" charset="0"/>
+                <a:ea typeface="Calibri" pitchFamily="34" charset="-122"/>
+                <a:cs typeface="Calibri" pitchFamily="34" charset="-120"/>
+              </a:rPr>
+              <a:t>записи за период: автор, время, неизвестное</a:t>
+            </a:r>
+            <a:endParaRPr lang="en-US" sz="1400" dirty="0"/>
+          </a:p>
+        </p:txBody>
+      </p:sp>
+      <p:sp>
+        <p:nvSpPr>
+          <p:cNvPr id="8" name="Shape 5"/>
           <p:cNvSpPr/>
           <p:nvPr/>
         </p:nvSpPr>
         <p:spPr>
           <a:xfrm>
-            <a:off x="5852160" y="1554480"/>
-            <a:ext cx="1847088" cy="3826975"/>
-          </a:xfrm>
-          <a:prstGeom prst="roundRect">
-            <a:avLst>
-              <a:gd name="adj" fmla="val 7921"/>
-            </a:avLst>
+            <a:off x="6385255" y="1572768"/>
+            <a:ext cx="5257800" cy="3917061"/>
+          </a:xfrm>
+          <a:prstGeom prst="rect">
+            <a:avLst/>
           </a:prstGeom>
           <a:solidFill>
-            <a:srgbClr val="16252B"/>
+            <a:srgbClr val="FFFFFF"/>
           </a:solidFill>
-          <a:ln w="12700">
+          <a:ln w="9525">
             <a:solidFill>
-              <a:srgbClr val="16252B"/>
+              <a:srgbClr val="D3DEDB"/>
             </a:solidFill>
             <a:prstDash val="solid"/>
           </a:ln>
@@ -20038,22 +20043,22 @@
       </p:sp>
       <p:pic>
         <p:nvPicPr>
-          <p:cNvPr id="21" name="Image 4" descr="/Users/azamatsibgatullin/Documents/HAC/deliverables/presentation/assets/patient-diary.jpg">    </p:cNvPr>
+          <p:cNvPr id="9" name="Image 1" descr="/Users/azamatsibgatullin/Documents/HAC/deliverables/presentation/assets/doctor-plan-crop.jpg">    </p:cNvPr>
           <p:cNvPicPr>
             <a:picLocks noChangeAspect="1"/>
           </p:cNvPicPr>
           <p:nvPr/>
         </p:nvPicPr>
         <p:blipFill>
-          <a:blip r:embed="rId5"/>
+          <a:blip r:embed="rId2"/>
           <a:stretch>
             <a:fillRect/>
           </a:stretch>
         </p:blipFill>
         <p:spPr>
           <a:xfrm>
-            <a:off x="5925312" y="1627632"/>
-            <a:ext cx="1700784" cy="3680671"/>
+            <a:off x="6412687" y="1600200"/>
+            <a:ext cx="5202936" cy="3862197"/>
           </a:xfrm>
           <a:prstGeom prst="rect">
             <a:avLst/>
@@ -20062,30 +20067,30 @@
       </p:pic>
       <p:sp>
         <p:nvSpPr>
-          <p:cNvPr id="22" name="Text 15"/>
-          <p:cNvSpPr txBox="1"/>
-          <p:nvPr/>
-        </p:nvSpPr>
-        <p:spPr>
-          <a:xfrm>
-            <a:off x="5852160" y="5472895"/>
-            <a:ext cx="1847088" cy="274320"/>
-          </a:xfrm>
-          <a:prstGeom prst="rect">
-            <a:avLst/>
-          </a:prstGeom>
-          <a:noFill/>
-          <a:ln/>
-        </p:spPr>
-        <p:txBody>
-          <a:bodyPr wrap="square" lIns="0" tIns="0" rIns="0" bIns="0" rtlCol="0" anchor="t"/>
-          <a:lstStyle/>
-          <a:p>
-            <a:pPr algn="ctr" indent="0" marL="0">
-              <a:buNone/>
-            </a:pPr>
-            <a:r>
-              <a:rPr lang="en-US" sz="1200" b="1" dirty="0">
+          <p:cNvPr id="10" name="Text 6"/>
+          <p:cNvSpPr txBox="1"/>
+          <p:nvPr/>
+        </p:nvSpPr>
+        <p:spPr>
+          <a:xfrm>
+            <a:off x="6385255" y="5599557"/>
+            <a:ext cx="5257800" cy="384048"/>
+          </a:xfrm>
+          <a:prstGeom prst="rect">
+            <a:avLst/>
+          </a:prstGeom>
+          <a:noFill/>
+          <a:ln/>
+        </p:spPr>
+        <p:txBody>
+          <a:bodyPr wrap="square" lIns="0" tIns="0" rIns="0" bIns="0" rtlCol="0" anchor="ctr"/>
+          <a:lstStyle/>
+          <a:p>
+            <a:pPr indent="0" marL="0">
+              <a:buNone/>
+            </a:pPr>
+            <a:r>
+              <a:rPr lang="en-US" sz="1500" b="1" dirty="0">
                 <a:solidFill>
                   <a:srgbClr val="123A40"/>
                 </a:solidFill>
@@ -20093,80 +20098,36 @@
                 <a:ea typeface="Cambria" pitchFamily="34" charset="-122"/>
                 <a:cs typeface="Cambria" pitchFamily="34" charset="-120"/>
               </a:rPr>
-              <a:t>Дневник</a:t>
-            </a:r>
-            <a:endParaRPr lang="en-US" sz="1200" dirty="0"/>
-          </a:p>
-        </p:txBody>
-      </p:sp>
-      <p:sp>
-        <p:nvSpPr>
-          <p:cNvPr id="23" name="Shape 16"/>
-          <p:cNvSpPr/>
-          <p:nvPr/>
-        </p:nvSpPr>
-        <p:spPr>
-          <a:xfrm>
-            <a:off x="7818120" y="1554480"/>
-            <a:ext cx="1847088" cy="3826975"/>
-          </a:xfrm>
-          <a:prstGeom prst="roundRect">
-            <a:avLst>
-              <a:gd name="adj" fmla="val 7921"/>
-            </a:avLst>
-          </a:prstGeom>
-          <a:solidFill>
-            <a:srgbClr val="16252B"/>
-          </a:solidFill>
-          <a:ln w="12700">
-            <a:solidFill>
-              <a:srgbClr val="16252B"/>
-            </a:solidFill>
-            <a:prstDash val="solid"/>
-          </a:ln>
-          <a:effectLst>
-            <a:outerShdw sx="100000" sy="100000" kx="0" ky="0" algn="bl" rotWithShape="0" blurRad="127000" dist="38100" dir="5400000">
-              <a:srgbClr val="0B2226">
-                <a:alpha val="16000"/>
-              </a:srgbClr>
-            </a:outerShdw>
-          </a:effectLst>
-        </p:spPr>
-      </p:sp>
-      <p:pic>
-        <p:nvPicPr>
-          <p:cNvPr id="24" name="Image 5" descr="/Users/azamatsibgatullin/Documents/HAC/deliverables/presentation/assets/patient-forms.jpg">    </p:cNvPr>
-          <p:cNvPicPr>
-            <a:picLocks noChangeAspect="1"/>
-          </p:cNvPicPr>
-          <p:nvPr/>
-        </p:nvPicPr>
-        <p:blipFill>
-          <a:blip r:embed="rId6"/>
-          <a:stretch>
-            <a:fillRect/>
-          </a:stretch>
-        </p:blipFill>
-        <p:spPr>
-          <a:xfrm>
-            <a:off x="7891272" y="1627632"/>
-            <a:ext cx="1700784" cy="3680671"/>
-          </a:xfrm>
-          <a:prstGeom prst="rect">
-            <a:avLst/>
-          </a:prstGeom>
-        </p:spPr>
-      </p:pic>
-      <p:sp>
-        <p:nvSpPr>
-          <p:cNvPr id="25" name="Text 17"/>
-          <p:cNvSpPr txBox="1"/>
-          <p:nvPr/>
-        </p:nvSpPr>
-        <p:spPr>
-          <a:xfrm>
-            <a:off x="7818120" y="5472895"/>
-            <a:ext cx="1847088" cy="274320"/>
+              <a:t>План и решения  </a:t>
+            </a:r>
+            <a:pPr indent="0" marL="0">
+              <a:buNone/>
+            </a:pPr>
+            <a:r>
+              <a:rPr lang="en-US" sz="1200" dirty="0">
+                <a:solidFill>
+                  <a:srgbClr val="16252B"/>
+                </a:solidFill>
+                <a:latin typeface="Calibri" pitchFamily="34" charset="0"/>
+                <a:ea typeface="Calibri" pitchFamily="34" charset="-122"/>
+                <a:cs typeface="Calibri" pitchFamily="34" charset="-120"/>
+              </a:rPr>
+              <a:t>план с подтверждением врача и календарь препаратов</a:t>
+            </a:r>
+            <a:endParaRPr lang="en-US" sz="1400" dirty="0"/>
+          </a:p>
+        </p:txBody>
+      </p:sp>
+      <p:sp>
+        <p:nvSpPr>
+          <p:cNvPr id="11" name="Text 7"/>
+          <p:cNvSpPr txBox="1"/>
+          <p:nvPr/>
+        </p:nvSpPr>
+        <p:spPr>
+          <a:xfrm>
+            <a:off x="548640" y="6053328"/>
+            <a:ext cx="11094415" cy="274320"/>
           </a:xfrm>
           <a:prstGeom prst="rect">
             <a:avLst/>
@@ -20178,118 +20139,21 @@
           <a:bodyPr wrap="square" lIns="0" tIns="0" rIns="0" bIns="0" rtlCol="0" anchor="t"/>
           <a:lstStyle/>
           <a:p>
-            <a:pPr algn="ctr" indent="0" marL="0">
-              <a:buNone/>
-            </a:pPr>
-            <a:r>
-              <a:rPr lang="en-US" sz="1200" b="1" dirty="0">
-                <a:solidFill>
-                  <a:srgbClr val="123A40"/>
-                </a:solidFill>
-                <a:latin typeface="Cambria" pitchFamily="34" charset="0"/>
-                <a:ea typeface="Cambria" pitchFamily="34" charset="-122"/>
-                <a:cs typeface="Cambria" pitchFamily="34" charset="-120"/>
-              </a:rPr>
-              <a:t>Анкеты</a:t>
-            </a:r>
-            <a:endParaRPr lang="en-US" sz="1200" dirty="0"/>
-          </a:p>
-        </p:txBody>
-      </p:sp>
-      <p:sp>
-        <p:nvSpPr>
-          <p:cNvPr id="26" name="Shape 18"/>
-          <p:cNvSpPr/>
-          <p:nvPr/>
-        </p:nvSpPr>
-        <p:spPr>
-          <a:xfrm>
-            <a:off x="9784080" y="1554480"/>
-            <a:ext cx="1847088" cy="3826975"/>
-          </a:xfrm>
-          <a:prstGeom prst="roundRect">
-            <a:avLst>
-              <a:gd name="adj" fmla="val 7921"/>
-            </a:avLst>
-          </a:prstGeom>
-          <a:solidFill>
-            <a:srgbClr val="16252B"/>
-          </a:solidFill>
-          <a:ln w="12700">
-            <a:solidFill>
-              <a:srgbClr val="16252B"/>
-            </a:solidFill>
-            <a:prstDash val="solid"/>
-          </a:ln>
-          <a:effectLst>
-            <a:outerShdw sx="100000" sy="100000" kx="0" ky="0" algn="bl" rotWithShape="0" blurRad="127000" dist="38100" dir="5400000">
-              <a:srgbClr val="0B2226">
-                <a:alpha val="16000"/>
-              </a:srgbClr>
-            </a:outerShdw>
-          </a:effectLst>
-        </p:spPr>
-      </p:sp>
-      <p:pic>
-        <p:nvPicPr>
-          <p:cNvPr id="27" name="Image 6" descr="/Users/azamatsibgatullin/Documents/HAC/deliverables/presentation/assets/patient-plan.jpg">    </p:cNvPr>
-          <p:cNvPicPr>
-            <a:picLocks noChangeAspect="1"/>
-          </p:cNvPicPr>
-          <p:nvPr/>
-        </p:nvPicPr>
-        <p:blipFill>
-          <a:blip r:embed="rId7"/>
-          <a:stretch>
-            <a:fillRect/>
-          </a:stretch>
-        </p:blipFill>
-        <p:spPr>
-          <a:xfrm>
-            <a:off x="9857232" y="1627632"/>
-            <a:ext cx="1700784" cy="3680671"/>
-          </a:xfrm>
-          <a:prstGeom prst="rect">
-            <a:avLst/>
-          </a:prstGeom>
-        </p:spPr>
-      </p:pic>
-      <p:sp>
-        <p:nvSpPr>
-          <p:cNvPr id="28" name="Text 19"/>
-          <p:cNvSpPr txBox="1"/>
-          <p:nvPr/>
-        </p:nvSpPr>
-        <p:spPr>
-          <a:xfrm>
-            <a:off x="9784080" y="5472895"/>
-            <a:ext cx="1847088" cy="274320"/>
-          </a:xfrm>
-          <a:prstGeom prst="rect">
-            <a:avLst/>
-          </a:prstGeom>
-          <a:noFill/>
-          <a:ln/>
-        </p:spPr>
-        <p:txBody>
-          <a:bodyPr wrap="square" lIns="0" tIns="0" rIns="0" bIns="0" rtlCol="0" anchor="t"/>
-          <a:lstStyle/>
-          <a:p>
-            <a:pPr algn="ctr" indent="0" marL="0">
-              <a:buNone/>
-            </a:pPr>
-            <a:r>
-              <a:rPr lang="en-US" sz="1200" b="1" dirty="0">
-                <a:solidFill>
-                  <a:srgbClr val="123A40"/>
-                </a:solidFill>
-                <a:latin typeface="Cambria" pitchFamily="34" charset="0"/>
-                <a:ea typeface="Cambria" pitchFamily="34" charset="-122"/>
-                <a:cs typeface="Cambria" pitchFamily="34" charset="-120"/>
-              </a:rPr>
-              <a:t>План</a:t>
-            </a:r>
-            <a:endParaRPr lang="en-US" sz="1200" dirty="0"/>
+            <a:pPr indent="0" marL="0">
+              <a:buNone/>
+            </a:pPr>
+            <a:r>
+              <a:rPr lang="en-US" sz="1000" dirty="0">
+                <a:solidFill>
+                  <a:srgbClr val="5A6B71"/>
+                </a:solidFill>
+                <a:latin typeface="Calibri" pitchFamily="34" charset="0"/>
+                <a:ea typeface="Calibri" pitchFamily="34" charset="-122"/>
+                <a:cs typeface="Calibri" pitchFamily="34" charset="-120"/>
+              </a:rPr>
+              <a:t>Снимки работающего сервиса от 23.10.2026. Все пациенты, врачи и препараты в демонстрации вымышленные.</a:t>
+            </a:r>
+            <a:endParaRPr lang="en-US" sz="1000" dirty="0"/>
           </a:p>
         </p:txBody>
       </p:sp>
@@ -20375,7 +20239,7 @@
         <p:spPr>
           <a:xfrm>
             <a:off x="548640" y="384048"/>
-            <a:ext cx="1896466" cy="256032"/>
+            <a:ext cx="1989734" cy="256032"/>
           </a:xfrm>
           <a:prstGeom prst="roundRect">
             <a:avLst>
@@ -20402,7 +20266,7 @@
         <p:spPr>
           <a:xfrm>
             <a:off x="548640" y="384048"/>
-            <a:ext cx="1896466" cy="256032"/>
+            <a:ext cx="1989734" cy="256032"/>
           </a:xfrm>
           <a:prstGeom prst="rect">
             <a:avLst/>
@@ -20426,7 +20290,7 @@
                 <a:ea typeface="Calibri" pitchFamily="34" charset="-122"/>
                 <a:cs typeface="Calibri" pitchFamily="34" charset="-120"/>
               </a:rPr>
-              <a:t>ПРОТОТИП · АНКЕТЫ</a:t>
+              <a:t>ПРОТОТИП · ПАЦИЕНТ</a:t>
             </a:r>
             <a:endParaRPr lang="en-US" sz="900" dirty="0"/>
           </a:p>
@@ -20467,7 +20331,7 @@
                 <a:ea typeface="Cambria" pitchFamily="34" charset="-122"/>
                 <a:cs typeface="Cambria" pitchFamily="34" charset="-120"/>
               </a:rPr>
-              <a:t>Динамика анкет видна сразу, ответы под рукой</a:t>
+              <a:t>Пациенту достаточно телефона</a:t>
             </a:r>
             <a:endParaRPr lang="en-US" sz="2800" dirty="0"/>
           </a:p>
@@ -20481,18 +20345,401 @@
         </p:nvSpPr>
         <p:spPr>
           <a:xfrm>
-            <a:off x="548640" y="1554480"/>
-            <a:ext cx="11091672" cy="3488331"/>
-          </a:xfrm>
-          <a:prstGeom prst="rect">
+            <a:off x="548640" y="1691640"/>
+            <a:ext cx="512064" cy="512064"/>
+          </a:xfrm>
+          <a:prstGeom prst="ellipse">
             <a:avLst/>
           </a:prstGeom>
           <a:solidFill>
-            <a:srgbClr val="FFFFFF"/>
+            <a:srgbClr val="FBEBD9"/>
           </a:solidFill>
-          <a:ln w="9525">
+          <a:ln w="12700">
             <a:solidFill>
-              <a:srgbClr val="D3DEDB"/>
+              <a:srgbClr val="FBEBD9"/>
+            </a:solidFill>
+            <a:prstDash val="solid"/>
+          </a:ln>
+        </p:spPr>
+      </p:sp>
+      <p:pic>
+        <p:nvPicPr>
+          <p:cNvPr id="6" name="Image 0" descr="preencoded.png">    </p:cNvPr>
+          <p:cNvPicPr>
+            <a:picLocks noChangeAspect="1"/>
+          </p:cNvPicPr>
+          <p:nvPr/>
+        </p:nvPicPr>
+        <p:blipFill>
+          <a:blip r:embed="rId1"/>
+          <a:stretch>
+            <a:fillRect/>
+          </a:stretch>
+        </p:blipFill>
+        <p:spPr>
+          <a:xfrm>
+            <a:off x="686897" y="1829897"/>
+            <a:ext cx="235549" cy="235549"/>
+          </a:xfrm>
+          <a:prstGeom prst="rect">
+            <a:avLst/>
+          </a:prstGeom>
+        </p:spPr>
+      </p:pic>
+      <p:sp>
+        <p:nvSpPr>
+          <p:cNvPr id="7" name="Text 4"/>
+          <p:cNvSpPr txBox="1"/>
+          <p:nvPr/>
+        </p:nvSpPr>
+        <p:spPr>
+          <a:xfrm>
+            <a:off x="1234440" y="1673352"/>
+            <a:ext cx="2377440" cy="292608"/>
+          </a:xfrm>
+          <a:prstGeom prst="rect">
+            <a:avLst/>
+          </a:prstGeom>
+          <a:noFill/>
+          <a:ln/>
+        </p:spPr>
+        <p:txBody>
+          <a:bodyPr wrap="square" lIns="0" tIns="0" rIns="0" bIns="0" rtlCol="0" anchor="t"/>
+          <a:lstStyle/>
+          <a:p>
+            <a:pPr indent="0" marL="0">
+              <a:buNone/>
+            </a:pPr>
+            <a:r>
+              <a:rPr lang="en-US" sz="1400" b="1" dirty="0">
+                <a:solidFill>
+                  <a:srgbClr val="123A40"/>
+                </a:solidFill>
+                <a:latin typeface="Cambria" pitchFamily="34" charset="0"/>
+                <a:ea typeface="Cambria" pitchFamily="34" charset="-122"/>
+                <a:cs typeface="Cambria" pitchFamily="34" charset="-120"/>
+              </a:rPr>
+              <a:t>Одно главное действие</a:t>
+            </a:r>
+            <a:endParaRPr lang="en-US" sz="1400" dirty="0"/>
+          </a:p>
+        </p:txBody>
+      </p:sp>
+      <p:sp>
+        <p:nvSpPr>
+          <p:cNvPr id="8" name="Text 5"/>
+          <p:cNvSpPr txBox="1"/>
+          <p:nvPr/>
+        </p:nvSpPr>
+        <p:spPr>
+          <a:xfrm>
+            <a:off x="1234440" y="1984248"/>
+            <a:ext cx="2377440" cy="822960"/>
+          </a:xfrm>
+          <a:prstGeom prst="rect">
+            <a:avLst/>
+          </a:prstGeom>
+          <a:noFill/>
+          <a:ln/>
+        </p:spPr>
+        <p:txBody>
+          <a:bodyPr wrap="square" lIns="0" tIns="0" rIns="0" bIns="0" rtlCol="0" anchor="t"/>
+          <a:lstStyle/>
+          <a:p>
+            <a:pPr indent="0" marL="0">
+              <a:buNone/>
+            </a:pPr>
+            <a:r>
+              <a:rPr lang="en-US" sz="1200" dirty="0">
+                <a:solidFill>
+                  <a:srgbClr val="16252B"/>
+                </a:solidFill>
+                <a:latin typeface="Calibri" pitchFamily="34" charset="0"/>
+                <a:ea typeface="Calibri" pitchFamily="34" charset="-122"/>
+                <a:cs typeface="Calibri" pitchFamily="34" charset="-120"/>
+              </a:rPr>
+              <a:t>На каждом экране сразу видно, что сделать сейчас, без прокрутки</a:t>
+            </a:r>
+            <a:endParaRPr lang="en-US" sz="1200" dirty="0"/>
+          </a:p>
+        </p:txBody>
+      </p:sp>
+      <p:sp>
+        <p:nvSpPr>
+          <p:cNvPr id="9" name="Shape 6"/>
+          <p:cNvSpPr/>
+          <p:nvPr/>
+        </p:nvSpPr>
+        <p:spPr>
+          <a:xfrm>
+            <a:off x="548640" y="3063240"/>
+            <a:ext cx="512064" cy="512064"/>
+          </a:xfrm>
+          <a:prstGeom prst="ellipse">
+            <a:avLst/>
+          </a:prstGeom>
+          <a:solidFill>
+            <a:srgbClr val="FBEBD9"/>
+          </a:solidFill>
+          <a:ln w="12700">
+            <a:solidFill>
+              <a:srgbClr val="FBEBD9"/>
+            </a:solidFill>
+            <a:prstDash val="solid"/>
+          </a:ln>
+        </p:spPr>
+      </p:sp>
+      <p:pic>
+        <p:nvPicPr>
+          <p:cNvPr id="10" name="Image 1" descr="preencoded.png">    </p:cNvPr>
+          <p:cNvPicPr>
+            <a:picLocks noChangeAspect="1"/>
+          </p:cNvPicPr>
+          <p:nvPr/>
+        </p:nvPicPr>
+        <p:blipFill>
+          <a:blip r:embed="rId2"/>
+          <a:stretch>
+            <a:fillRect/>
+          </a:stretch>
+        </p:blipFill>
+        <p:spPr>
+          <a:xfrm>
+            <a:off x="686897" y="3201497"/>
+            <a:ext cx="235549" cy="235549"/>
+          </a:xfrm>
+          <a:prstGeom prst="rect">
+            <a:avLst/>
+          </a:prstGeom>
+        </p:spPr>
+      </p:pic>
+      <p:sp>
+        <p:nvSpPr>
+          <p:cNvPr id="11" name="Text 7"/>
+          <p:cNvSpPr txBox="1"/>
+          <p:nvPr/>
+        </p:nvSpPr>
+        <p:spPr>
+          <a:xfrm>
+            <a:off x="1234440" y="3044952"/>
+            <a:ext cx="2377440" cy="292608"/>
+          </a:xfrm>
+          <a:prstGeom prst="rect">
+            <a:avLst/>
+          </a:prstGeom>
+          <a:noFill/>
+          <a:ln/>
+        </p:spPr>
+        <p:txBody>
+          <a:bodyPr wrap="square" lIns="0" tIns="0" rIns="0" bIns="0" rtlCol="0" anchor="t"/>
+          <a:lstStyle/>
+          <a:p>
+            <a:pPr indent="0" marL="0">
+              <a:buNone/>
+            </a:pPr>
+            <a:r>
+              <a:rPr lang="en-US" sz="1400" b="1" dirty="0">
+                <a:solidFill>
+                  <a:srgbClr val="123A40"/>
+                </a:solidFill>
+                <a:latin typeface="Cambria" pitchFamily="34" charset="0"/>
+                <a:ea typeface="Cambria" pitchFamily="34" charset="-122"/>
+                <a:cs typeface="Cambria" pitchFamily="34" charset="-120"/>
+              </a:rPr>
+              <a:t>Запись дошла</a:t>
+            </a:r>
+            <a:endParaRPr lang="en-US" sz="1400" dirty="0"/>
+          </a:p>
+        </p:txBody>
+      </p:sp>
+      <p:sp>
+        <p:nvSpPr>
+          <p:cNvPr id="12" name="Text 8"/>
+          <p:cNvSpPr txBox="1"/>
+          <p:nvPr/>
+        </p:nvSpPr>
+        <p:spPr>
+          <a:xfrm>
+            <a:off x="1234440" y="3355848"/>
+            <a:ext cx="2377440" cy="822960"/>
+          </a:xfrm>
+          <a:prstGeom prst="rect">
+            <a:avLst/>
+          </a:prstGeom>
+          <a:noFill/>
+          <a:ln/>
+        </p:spPr>
+        <p:txBody>
+          <a:bodyPr wrap="square" lIns="0" tIns="0" rIns="0" bIns="0" rtlCol="0" anchor="t"/>
+          <a:lstStyle/>
+          <a:p>
+            <a:pPr indent="0" marL="0">
+              <a:buNone/>
+            </a:pPr>
+            <a:r>
+              <a:rPr lang="en-US" sz="1200" dirty="0">
+                <a:solidFill>
+                  <a:srgbClr val="16252B"/>
+                </a:solidFill>
+                <a:latin typeface="Calibri" pitchFamily="34" charset="0"/>
+                <a:ea typeface="Calibri" pitchFamily="34" charset="-122"/>
+                <a:cs typeface="Calibri" pitchFamily="34" charset="-120"/>
+              </a:rPr>
+              <a:t>Пациент видит время сохранения на сервере и квитанцию об анкете</a:t>
+            </a:r>
+            <a:endParaRPr lang="en-US" sz="1200" dirty="0"/>
+          </a:p>
+        </p:txBody>
+      </p:sp>
+      <p:sp>
+        <p:nvSpPr>
+          <p:cNvPr id="13" name="Shape 9"/>
+          <p:cNvSpPr/>
+          <p:nvPr/>
+        </p:nvSpPr>
+        <p:spPr>
+          <a:xfrm>
+            <a:off x="548640" y="4434840"/>
+            <a:ext cx="512064" cy="512064"/>
+          </a:xfrm>
+          <a:prstGeom prst="ellipse">
+            <a:avLst/>
+          </a:prstGeom>
+          <a:solidFill>
+            <a:srgbClr val="FBEBD9"/>
+          </a:solidFill>
+          <a:ln w="12700">
+            <a:solidFill>
+              <a:srgbClr val="FBEBD9"/>
+            </a:solidFill>
+            <a:prstDash val="solid"/>
+          </a:ln>
+        </p:spPr>
+      </p:sp>
+      <p:pic>
+        <p:nvPicPr>
+          <p:cNvPr id="14" name="Image 2" descr="preencoded.png">    </p:cNvPr>
+          <p:cNvPicPr>
+            <a:picLocks noChangeAspect="1"/>
+          </p:cNvPicPr>
+          <p:nvPr/>
+        </p:nvPicPr>
+        <p:blipFill>
+          <a:blip r:embed="rId3"/>
+          <a:stretch>
+            <a:fillRect/>
+          </a:stretch>
+        </p:blipFill>
+        <p:spPr>
+          <a:xfrm>
+            <a:off x="686897" y="4573097"/>
+            <a:ext cx="235549" cy="235549"/>
+          </a:xfrm>
+          <a:prstGeom prst="rect">
+            <a:avLst/>
+          </a:prstGeom>
+        </p:spPr>
+      </p:pic>
+      <p:sp>
+        <p:nvSpPr>
+          <p:cNvPr id="15" name="Text 10"/>
+          <p:cNvSpPr txBox="1"/>
+          <p:nvPr/>
+        </p:nvSpPr>
+        <p:spPr>
+          <a:xfrm>
+            <a:off x="1234440" y="4416552"/>
+            <a:ext cx="2377440" cy="292608"/>
+          </a:xfrm>
+          <a:prstGeom prst="rect">
+            <a:avLst/>
+          </a:prstGeom>
+          <a:noFill/>
+          <a:ln/>
+        </p:spPr>
+        <p:txBody>
+          <a:bodyPr wrap="square" lIns="0" tIns="0" rIns="0" bIns="0" rtlCol="0" anchor="t"/>
+          <a:lstStyle/>
+          <a:p>
+            <a:pPr indent="0" marL="0">
+              <a:buNone/>
+            </a:pPr>
+            <a:r>
+              <a:rPr lang="en-US" sz="1400" b="1" dirty="0">
+                <a:solidFill>
+                  <a:srgbClr val="123A40"/>
+                </a:solidFill>
+                <a:latin typeface="Cambria" pitchFamily="34" charset="0"/>
+                <a:ea typeface="Cambria" pitchFamily="34" charset="-122"/>
+                <a:cs typeface="Cambria" pitchFamily="34" charset="-120"/>
+              </a:rPr>
+              <a:t>Баллы видит врач</a:t>
+            </a:r>
+            <a:endParaRPr lang="en-US" sz="1400" dirty="0"/>
+          </a:p>
+        </p:txBody>
+      </p:sp>
+      <p:sp>
+        <p:nvSpPr>
+          <p:cNvPr id="16" name="Text 11"/>
+          <p:cNvSpPr txBox="1"/>
+          <p:nvPr/>
+        </p:nvSpPr>
+        <p:spPr>
+          <a:xfrm>
+            <a:off x="1234440" y="4727448"/>
+            <a:ext cx="2377440" cy="822960"/>
+          </a:xfrm>
+          <a:prstGeom prst="rect">
+            <a:avLst/>
+          </a:prstGeom>
+          <a:noFill/>
+          <a:ln/>
+        </p:spPr>
+        <p:txBody>
+          <a:bodyPr wrap="square" lIns="0" tIns="0" rIns="0" bIns="0" rtlCol="0" anchor="t"/>
+          <a:lstStyle/>
+          <a:p>
+            <a:pPr indent="0" marL="0">
+              <a:buNone/>
+            </a:pPr>
+            <a:r>
+              <a:rPr lang="en-US" sz="1200" dirty="0">
+                <a:solidFill>
+                  <a:srgbClr val="16252B"/>
+                </a:solidFill>
+                <a:latin typeface="Calibri" pitchFamily="34" charset="0"/>
+                <a:ea typeface="Calibri" pitchFamily="34" charset="-122"/>
+                <a:cs typeface="Calibri" pitchFamily="34" charset="-120"/>
+              </a:rPr>
+              <a:t>Пациент получает квитанцию, а суммы и графики анкет остаются у врача</a:t>
+            </a:r>
+            <a:endParaRPr lang="en-US" sz="1200" dirty="0"/>
+          </a:p>
+        </p:txBody>
+      </p:sp>
+      <p:sp>
+        <p:nvSpPr>
+          <p:cNvPr id="17" name="Shape 12"/>
+          <p:cNvSpPr/>
+          <p:nvPr/>
+        </p:nvSpPr>
+        <p:spPr>
+          <a:xfrm>
+            <a:off x="3886200" y="1554480"/>
+            <a:ext cx="1847088" cy="3826975"/>
+          </a:xfrm>
+          <a:prstGeom prst="roundRect">
+            <a:avLst>
+              <a:gd name="adj" fmla="val 7921"/>
+            </a:avLst>
+          </a:prstGeom>
+          <a:solidFill>
+            <a:srgbClr val="16252B"/>
+          </a:solidFill>
+          <a:ln w="12700">
+            <a:solidFill>
+              <a:srgbClr val="16252B"/>
             </a:solidFill>
             <a:prstDash val="solid"/>
           </a:ln>
@@ -20507,310 +20754,7 @@
       </p:sp>
       <p:pic>
         <p:nvPicPr>
-          <p:cNvPr id="6" name="Image 0" descr="/Users/azamatsibgatullin/Documents/HAC/deliverables/presentation/assets/doctor-charts.jpg">    </p:cNvPr>
-          <p:cNvPicPr>
-            <a:picLocks noChangeAspect="1"/>
-          </p:cNvPicPr>
-          <p:nvPr/>
-        </p:nvPicPr>
-        <p:blipFill>
-          <a:blip r:embed="rId1"/>
-          <a:stretch>
-            <a:fillRect/>
-          </a:stretch>
-        </p:blipFill>
-        <p:spPr>
-          <a:xfrm>
-            <a:off x="576072" y="1581912"/>
-            <a:ext cx="11036808" cy="3433467"/>
-          </a:xfrm>
-          <a:prstGeom prst="rect">
-            <a:avLst/>
-          </a:prstGeom>
-        </p:spPr>
-      </p:pic>
-      <p:sp>
-        <p:nvSpPr>
-          <p:cNvPr id="7" name="Shape 4"/>
-          <p:cNvSpPr/>
-          <p:nvPr/>
-        </p:nvSpPr>
-        <p:spPr>
-          <a:xfrm>
-            <a:off x="548640" y="5303520"/>
-            <a:ext cx="457200" cy="457200"/>
-          </a:xfrm>
-          <a:prstGeom prst="ellipse">
-            <a:avLst/>
-          </a:prstGeom>
-          <a:solidFill>
-            <a:srgbClr val="DCEBE8"/>
-          </a:solidFill>
-          <a:ln w="12700">
-            <a:solidFill>
-              <a:srgbClr val="DCEBE8"/>
-            </a:solidFill>
-            <a:prstDash val="solid"/>
-          </a:ln>
-        </p:spPr>
-      </p:sp>
-      <p:pic>
-        <p:nvPicPr>
-          <p:cNvPr id="8" name="Image 1" descr="preencoded.png">    </p:cNvPr>
-          <p:cNvPicPr>
-            <a:picLocks noChangeAspect="1"/>
-          </p:cNvPicPr>
-          <p:nvPr/>
-        </p:nvPicPr>
-        <p:blipFill>
-          <a:blip r:embed="rId2"/>
-          <a:stretch>
-            <a:fillRect/>
-          </a:stretch>
-        </p:blipFill>
-        <p:spPr>
-          <a:xfrm>
-            <a:off x="672084" y="5426964"/>
-            <a:ext cx="210312" cy="210312"/>
-          </a:xfrm>
-          <a:prstGeom prst="rect">
-            <a:avLst/>
-          </a:prstGeom>
-        </p:spPr>
-      </p:pic>
-      <p:sp>
-        <p:nvSpPr>
-          <p:cNvPr id="9" name="Text 5"/>
-          <p:cNvSpPr txBox="1"/>
-          <p:nvPr/>
-        </p:nvSpPr>
-        <p:spPr>
-          <a:xfrm>
-            <a:off x="1143000" y="5303520"/>
-            <a:ext cx="3017520" cy="292608"/>
-          </a:xfrm>
-          <a:prstGeom prst="rect">
-            <a:avLst/>
-          </a:prstGeom>
-          <a:noFill/>
-          <a:ln/>
-        </p:spPr>
-        <p:txBody>
-          <a:bodyPr wrap="square" lIns="0" tIns="0" rIns="0" bIns="0" rtlCol="0" anchor="t"/>
-          <a:lstStyle/>
-          <a:p>
-            <a:pPr indent="0" marL="0">
-              <a:buNone/>
-            </a:pPr>
-            <a:r>
-              <a:rPr lang="en-US" sz="1400" b="1" dirty="0">
-                <a:solidFill>
-                  <a:srgbClr val="123A40"/>
-                </a:solidFill>
-                <a:latin typeface="Cambria" pitchFamily="34" charset="0"/>
-                <a:ea typeface="Cambria" pitchFamily="34" charset="-122"/>
-                <a:cs typeface="Cambria" pitchFamily="34" charset="-120"/>
-              </a:rPr>
-              <a:t>Точные русские версии</a:t>
-            </a:r>
-            <a:endParaRPr lang="en-US" sz="1400" dirty="0"/>
-          </a:p>
-        </p:txBody>
-      </p:sp>
-      <p:sp>
-        <p:nvSpPr>
-          <p:cNvPr id="10" name="Text 6"/>
-          <p:cNvSpPr txBox="1"/>
-          <p:nvPr/>
-        </p:nvSpPr>
-        <p:spPr>
-          <a:xfrm>
-            <a:off x="1143000" y="5596128"/>
-            <a:ext cx="3017520" cy="640080"/>
-          </a:xfrm>
-          <a:prstGeom prst="rect">
-            <a:avLst/>
-          </a:prstGeom>
-          <a:noFill/>
-          <a:ln/>
-        </p:spPr>
-        <p:txBody>
-          <a:bodyPr wrap="square" lIns="0" tIns="0" rIns="0" bIns="0" rtlCol="0" anchor="t"/>
-          <a:lstStyle/>
-          <a:p>
-            <a:pPr indent="0" marL="0">
-              <a:buNone/>
-            </a:pPr>
-            <a:r>
-              <a:rPr lang="en-US" sz="1100" dirty="0">
-                <a:solidFill>
-                  <a:srgbClr val="16252B"/>
-                </a:solidFill>
-                <a:latin typeface="Calibri" pitchFamily="34" charset="0"/>
-                <a:ea typeface="Calibri" pitchFamily="34" charset="-122"/>
-                <a:cs typeface="Calibri" pitchFamily="34" charset="-120"/>
-              </a:rPr>
-              <a:t>DASS-42 (Фаттахов, Горобец), PHQ-9 и GAD-7 (Золотарева, 2023). Текст, порядок и варианты ответов не меняются</a:t>
-            </a:r>
-            <a:endParaRPr lang="en-US" sz="1100" dirty="0"/>
-          </a:p>
-        </p:txBody>
-      </p:sp>
-      <p:sp>
-        <p:nvSpPr>
-          <p:cNvPr id="11" name="Shape 7"/>
-          <p:cNvSpPr/>
-          <p:nvPr/>
-        </p:nvSpPr>
-        <p:spPr>
-          <a:xfrm>
-            <a:off x="4297680" y="5303520"/>
-            <a:ext cx="457200" cy="457200"/>
-          </a:xfrm>
-          <a:prstGeom prst="ellipse">
-            <a:avLst/>
-          </a:prstGeom>
-          <a:solidFill>
-            <a:srgbClr val="DCEBE8"/>
-          </a:solidFill>
-          <a:ln w="12700">
-            <a:solidFill>
-              <a:srgbClr val="DCEBE8"/>
-            </a:solidFill>
-            <a:prstDash val="solid"/>
-          </a:ln>
-        </p:spPr>
-      </p:sp>
-      <p:pic>
-        <p:nvPicPr>
-          <p:cNvPr id="12" name="Image 2" descr="preencoded.png">    </p:cNvPr>
-          <p:cNvPicPr>
-            <a:picLocks noChangeAspect="1"/>
-          </p:cNvPicPr>
-          <p:nvPr/>
-        </p:nvPicPr>
-        <p:blipFill>
-          <a:blip r:embed="rId3"/>
-          <a:stretch>
-            <a:fillRect/>
-          </a:stretch>
-        </p:blipFill>
-        <p:spPr>
-          <a:xfrm>
-            <a:off x="4421124" y="5426964"/>
-            <a:ext cx="210312" cy="210312"/>
-          </a:xfrm>
-          <a:prstGeom prst="rect">
-            <a:avLst/>
-          </a:prstGeom>
-        </p:spPr>
-      </p:pic>
-      <p:sp>
-        <p:nvSpPr>
-          <p:cNvPr id="13" name="Text 8"/>
-          <p:cNvSpPr txBox="1"/>
-          <p:nvPr/>
-        </p:nvSpPr>
-        <p:spPr>
-          <a:xfrm>
-            <a:off x="4892040" y="5303520"/>
-            <a:ext cx="3017520" cy="292608"/>
-          </a:xfrm>
-          <a:prstGeom prst="rect">
-            <a:avLst/>
-          </a:prstGeom>
-          <a:noFill/>
-          <a:ln/>
-        </p:spPr>
-        <p:txBody>
-          <a:bodyPr wrap="square" lIns="0" tIns="0" rIns="0" bIns="0" rtlCol="0" anchor="t"/>
-          <a:lstStyle/>
-          <a:p>
-            <a:pPr indent="0" marL="0">
-              <a:buNone/>
-            </a:pPr>
-            <a:r>
-              <a:rPr lang="en-US" sz="1400" b="1" dirty="0">
-                <a:solidFill>
-                  <a:srgbClr val="123A40"/>
-                </a:solidFill>
-                <a:latin typeface="Cambria" pitchFamily="34" charset="0"/>
-                <a:ea typeface="Cambria" pitchFamily="34" charset="-122"/>
-                <a:cs typeface="Cambria" pitchFamily="34" charset="-120"/>
-              </a:rPr>
-              <a:t>Пропуск не равен нулю</a:t>
-            </a:r>
-            <a:endParaRPr lang="en-US" sz="1400" dirty="0"/>
-          </a:p>
-        </p:txBody>
-      </p:sp>
-      <p:sp>
-        <p:nvSpPr>
-          <p:cNvPr id="14" name="Text 9"/>
-          <p:cNvSpPr txBox="1"/>
-          <p:nvPr/>
-        </p:nvSpPr>
-        <p:spPr>
-          <a:xfrm>
-            <a:off x="4892040" y="5596128"/>
-            <a:ext cx="3017520" cy="640080"/>
-          </a:xfrm>
-          <a:prstGeom prst="rect">
-            <a:avLst/>
-          </a:prstGeom>
-          <a:noFill/>
-          <a:ln/>
-        </p:spPr>
-        <p:txBody>
-          <a:bodyPr wrap="square" lIns="0" tIns="0" rIns="0" bIns="0" rtlCol="0" anchor="t"/>
-          <a:lstStyle/>
-          <a:p>
-            <a:pPr indent="0" marL="0">
-              <a:buNone/>
-            </a:pPr>
-            <a:r>
-              <a:rPr lang="en-US" sz="1100" dirty="0">
-                <a:solidFill>
-                  <a:srgbClr val="16252B"/>
-                </a:solidFill>
-                <a:latin typeface="Calibri" pitchFamily="34" charset="0"/>
-                <a:ea typeface="Calibri" pitchFamily="34" charset="-122"/>
-                <a:cs typeface="Calibri" pitchFamily="34" charset="-120"/>
-              </a:rPr>
-              <a:t>Неполная анкета не даёт ложную точку на графике. Каждая версия шкалы в своей серии</a:t>
-            </a:r>
-            <a:endParaRPr lang="en-US" sz="1100" dirty="0"/>
-          </a:p>
-        </p:txBody>
-      </p:sp>
-      <p:sp>
-        <p:nvSpPr>
-          <p:cNvPr id="15" name="Shape 10"/>
-          <p:cNvSpPr/>
-          <p:nvPr/>
-        </p:nvSpPr>
-        <p:spPr>
-          <a:xfrm>
-            <a:off x="8046720" y="5303520"/>
-            <a:ext cx="457200" cy="457200"/>
-          </a:xfrm>
-          <a:prstGeom prst="ellipse">
-            <a:avLst/>
-          </a:prstGeom>
-          <a:solidFill>
-            <a:srgbClr val="DCEBE8"/>
-          </a:solidFill>
-          <a:ln w="12700">
-            <a:solidFill>
-              <a:srgbClr val="DCEBE8"/>
-            </a:solidFill>
-            <a:prstDash val="solid"/>
-          </a:ln>
-        </p:spPr>
-      </p:sp>
-      <p:pic>
-        <p:nvPicPr>
-          <p:cNvPr id="16" name="Image 3" descr="preencoded.png">    </p:cNvPr>
+          <p:cNvPr id="18" name="Image 3" descr="/Users/azamatsibgatullin/Documents/HAC/deliverables/presentation/assets/patient-today.jpg">    </p:cNvPr>
           <p:cNvPicPr>
             <a:picLocks noChangeAspect="1"/>
           </p:cNvPicPr>
@@ -20824,8 +20768,8 @@
         </p:blipFill>
         <p:spPr>
           <a:xfrm>
-            <a:off x="8170164" y="5426964"/>
-            <a:ext cx="210312" cy="210312"/>
+            <a:off x="3959352" y="1627632"/>
+            <a:ext cx="1700784" cy="3680671"/>
           </a:xfrm>
           <a:prstGeom prst="rect">
             <a:avLst/>
@@ -20834,14 +20778,14 @@
       </p:pic>
       <p:sp>
         <p:nvSpPr>
-          <p:cNvPr id="17" name="Text 11"/>
-          <p:cNvSpPr txBox="1"/>
-          <p:nvPr/>
-        </p:nvSpPr>
-        <p:spPr>
-          <a:xfrm>
-            <a:off x="8641080" y="5303520"/>
-            <a:ext cx="3017520" cy="292608"/>
+          <p:cNvPr id="19" name="Text 13"/>
+          <p:cNvSpPr txBox="1"/>
+          <p:nvPr/>
+        </p:nvSpPr>
+        <p:spPr>
+          <a:xfrm>
+            <a:off x="3886200" y="5472895"/>
+            <a:ext cx="1847088" cy="274320"/>
           </a:xfrm>
           <a:prstGeom prst="rect">
             <a:avLst/>
@@ -20853,11 +20797,11 @@
           <a:bodyPr wrap="square" lIns="0" tIns="0" rIns="0" bIns="0" rtlCol="0" anchor="t"/>
           <a:lstStyle/>
           <a:p>
-            <a:pPr indent="0" marL="0">
-              <a:buNone/>
-            </a:pPr>
-            <a:r>
-              <a:rPr lang="en-US" sz="1400" b="1" dirty="0">
+            <a:pPr algn="ctr" indent="0" marL="0">
+              <a:buNone/>
+            </a:pPr>
+            <a:r>
+              <a:rPr lang="en-US" sz="1200" b="1" dirty="0">
                 <a:solidFill>
                   <a:srgbClr val="123A40"/>
                 </a:solidFill>
@@ -20865,22 +20809,80 @@
                 <a:ea typeface="Cambria" pitchFamily="34" charset="-122"/>
                 <a:cs typeface="Cambria" pitchFamily="34" charset="-120"/>
               </a:rPr>
-              <a:t>Баллы не диагноз</a:t>
-            </a:r>
-            <a:endParaRPr lang="en-US" sz="1400" dirty="0"/>
-          </a:p>
-        </p:txBody>
-      </p:sp>
-      <p:sp>
-        <p:nvSpPr>
-          <p:cNvPr id="18" name="Text 12"/>
-          <p:cNvSpPr txBox="1"/>
-          <p:nvPr/>
-        </p:nvSpPr>
-        <p:spPr>
-          <a:xfrm>
-            <a:off x="8641080" y="5596128"/>
-            <a:ext cx="3017520" cy="640080"/>
+              <a:t>Сегодня</a:t>
+            </a:r>
+            <a:endParaRPr lang="en-US" sz="1200" dirty="0"/>
+          </a:p>
+        </p:txBody>
+      </p:sp>
+      <p:sp>
+        <p:nvSpPr>
+          <p:cNvPr id="20" name="Shape 14"/>
+          <p:cNvSpPr/>
+          <p:nvPr/>
+        </p:nvSpPr>
+        <p:spPr>
+          <a:xfrm>
+            <a:off x="5852160" y="1554480"/>
+            <a:ext cx="1847088" cy="3826975"/>
+          </a:xfrm>
+          <a:prstGeom prst="roundRect">
+            <a:avLst>
+              <a:gd name="adj" fmla="val 7921"/>
+            </a:avLst>
+          </a:prstGeom>
+          <a:solidFill>
+            <a:srgbClr val="16252B"/>
+          </a:solidFill>
+          <a:ln w="12700">
+            <a:solidFill>
+              <a:srgbClr val="16252B"/>
+            </a:solidFill>
+            <a:prstDash val="solid"/>
+          </a:ln>
+          <a:effectLst>
+            <a:outerShdw sx="100000" sy="100000" kx="0" ky="0" algn="bl" rotWithShape="0" blurRad="127000" dist="38100" dir="5400000">
+              <a:srgbClr val="0B2226">
+                <a:alpha val="16000"/>
+              </a:srgbClr>
+            </a:outerShdw>
+          </a:effectLst>
+        </p:spPr>
+      </p:sp>
+      <p:pic>
+        <p:nvPicPr>
+          <p:cNvPr id="21" name="Image 4" descr="/Users/azamatsibgatullin/Documents/HAC/deliverables/presentation/assets/patient-diary.jpg">    </p:cNvPr>
+          <p:cNvPicPr>
+            <a:picLocks noChangeAspect="1"/>
+          </p:cNvPicPr>
+          <p:nvPr/>
+        </p:nvPicPr>
+        <p:blipFill>
+          <a:blip r:embed="rId5"/>
+          <a:stretch>
+            <a:fillRect/>
+          </a:stretch>
+        </p:blipFill>
+        <p:spPr>
+          <a:xfrm>
+            <a:off x="5925312" y="1627632"/>
+            <a:ext cx="1700784" cy="3680671"/>
+          </a:xfrm>
+          <a:prstGeom prst="rect">
+            <a:avLst/>
+          </a:prstGeom>
+        </p:spPr>
+      </p:pic>
+      <p:sp>
+        <p:nvSpPr>
+          <p:cNvPr id="22" name="Text 15"/>
+          <p:cNvSpPr txBox="1"/>
+          <p:nvPr/>
+        </p:nvSpPr>
+        <p:spPr>
+          <a:xfrm>
+            <a:off x="5852160" y="5472895"/>
+            <a:ext cx="1847088" cy="274320"/>
           </a:xfrm>
           <a:prstGeom prst="rect">
             <a:avLst/>
@@ -20892,21 +20894,215 @@
           <a:bodyPr wrap="square" lIns="0" tIns="0" rIns="0" bIns="0" rtlCol="0" anchor="t"/>
           <a:lstStyle/>
           <a:p>
-            <a:pPr indent="0" marL="0">
-              <a:buNone/>
-            </a:pPr>
-            <a:r>
-              <a:rPr lang="en-US" sz="1100" dirty="0">
-                <a:solidFill>
-                  <a:srgbClr val="16252B"/>
-                </a:solidFill>
-                <a:latin typeface="Calibri" pitchFamily="34" charset="0"/>
-                <a:ea typeface="Calibri" pitchFamily="34" charset="-122"/>
-                <a:cs typeface="Calibri" pitchFamily="34" charset="-120"/>
-              </a:rPr>
-              <a:t>Суммы видит только врач, а повтор анкеты врач предлагает в один щелчок</a:t>
-            </a:r>
-            <a:endParaRPr lang="en-US" sz="1100" dirty="0"/>
+            <a:pPr algn="ctr" indent="0" marL="0">
+              <a:buNone/>
+            </a:pPr>
+            <a:r>
+              <a:rPr lang="en-US" sz="1200" b="1" dirty="0">
+                <a:solidFill>
+                  <a:srgbClr val="123A40"/>
+                </a:solidFill>
+                <a:latin typeface="Cambria" pitchFamily="34" charset="0"/>
+                <a:ea typeface="Cambria" pitchFamily="34" charset="-122"/>
+                <a:cs typeface="Cambria" pitchFamily="34" charset="-120"/>
+              </a:rPr>
+              <a:t>Дневник</a:t>
+            </a:r>
+            <a:endParaRPr lang="en-US" sz="1200" dirty="0"/>
+          </a:p>
+        </p:txBody>
+      </p:sp>
+      <p:sp>
+        <p:nvSpPr>
+          <p:cNvPr id="23" name="Shape 16"/>
+          <p:cNvSpPr/>
+          <p:nvPr/>
+        </p:nvSpPr>
+        <p:spPr>
+          <a:xfrm>
+            <a:off x="7818120" y="1554480"/>
+            <a:ext cx="1847088" cy="3826975"/>
+          </a:xfrm>
+          <a:prstGeom prst="roundRect">
+            <a:avLst>
+              <a:gd name="adj" fmla="val 7921"/>
+            </a:avLst>
+          </a:prstGeom>
+          <a:solidFill>
+            <a:srgbClr val="16252B"/>
+          </a:solidFill>
+          <a:ln w="12700">
+            <a:solidFill>
+              <a:srgbClr val="16252B"/>
+            </a:solidFill>
+            <a:prstDash val="solid"/>
+          </a:ln>
+          <a:effectLst>
+            <a:outerShdw sx="100000" sy="100000" kx="0" ky="0" algn="bl" rotWithShape="0" blurRad="127000" dist="38100" dir="5400000">
+              <a:srgbClr val="0B2226">
+                <a:alpha val="16000"/>
+              </a:srgbClr>
+            </a:outerShdw>
+          </a:effectLst>
+        </p:spPr>
+      </p:sp>
+      <p:pic>
+        <p:nvPicPr>
+          <p:cNvPr id="24" name="Image 5" descr="/Users/azamatsibgatullin/Documents/HAC/deliverables/presentation/assets/patient-forms.jpg">    </p:cNvPr>
+          <p:cNvPicPr>
+            <a:picLocks noChangeAspect="1"/>
+          </p:cNvPicPr>
+          <p:nvPr/>
+        </p:nvPicPr>
+        <p:blipFill>
+          <a:blip r:embed="rId6"/>
+          <a:stretch>
+            <a:fillRect/>
+          </a:stretch>
+        </p:blipFill>
+        <p:spPr>
+          <a:xfrm>
+            <a:off x="7891272" y="1627632"/>
+            <a:ext cx="1700784" cy="3680671"/>
+          </a:xfrm>
+          <a:prstGeom prst="rect">
+            <a:avLst/>
+          </a:prstGeom>
+        </p:spPr>
+      </p:pic>
+      <p:sp>
+        <p:nvSpPr>
+          <p:cNvPr id="25" name="Text 17"/>
+          <p:cNvSpPr txBox="1"/>
+          <p:nvPr/>
+        </p:nvSpPr>
+        <p:spPr>
+          <a:xfrm>
+            <a:off x="7818120" y="5472895"/>
+            <a:ext cx="1847088" cy="274320"/>
+          </a:xfrm>
+          <a:prstGeom prst="rect">
+            <a:avLst/>
+          </a:prstGeom>
+          <a:noFill/>
+          <a:ln/>
+        </p:spPr>
+        <p:txBody>
+          <a:bodyPr wrap="square" lIns="0" tIns="0" rIns="0" bIns="0" rtlCol="0" anchor="t"/>
+          <a:lstStyle/>
+          <a:p>
+            <a:pPr algn="ctr" indent="0" marL="0">
+              <a:buNone/>
+            </a:pPr>
+            <a:r>
+              <a:rPr lang="en-US" sz="1200" b="1" dirty="0">
+                <a:solidFill>
+                  <a:srgbClr val="123A40"/>
+                </a:solidFill>
+                <a:latin typeface="Cambria" pitchFamily="34" charset="0"/>
+                <a:ea typeface="Cambria" pitchFamily="34" charset="-122"/>
+                <a:cs typeface="Cambria" pitchFamily="34" charset="-120"/>
+              </a:rPr>
+              <a:t>Анкеты</a:t>
+            </a:r>
+            <a:endParaRPr lang="en-US" sz="1200" dirty="0"/>
+          </a:p>
+        </p:txBody>
+      </p:sp>
+      <p:sp>
+        <p:nvSpPr>
+          <p:cNvPr id="26" name="Shape 18"/>
+          <p:cNvSpPr/>
+          <p:nvPr/>
+        </p:nvSpPr>
+        <p:spPr>
+          <a:xfrm>
+            <a:off x="9784080" y="1554480"/>
+            <a:ext cx="1847088" cy="3826975"/>
+          </a:xfrm>
+          <a:prstGeom prst="roundRect">
+            <a:avLst>
+              <a:gd name="adj" fmla="val 7921"/>
+            </a:avLst>
+          </a:prstGeom>
+          <a:solidFill>
+            <a:srgbClr val="16252B"/>
+          </a:solidFill>
+          <a:ln w="12700">
+            <a:solidFill>
+              <a:srgbClr val="16252B"/>
+            </a:solidFill>
+            <a:prstDash val="solid"/>
+          </a:ln>
+          <a:effectLst>
+            <a:outerShdw sx="100000" sy="100000" kx="0" ky="0" algn="bl" rotWithShape="0" blurRad="127000" dist="38100" dir="5400000">
+              <a:srgbClr val="0B2226">
+                <a:alpha val="16000"/>
+              </a:srgbClr>
+            </a:outerShdw>
+          </a:effectLst>
+        </p:spPr>
+      </p:sp>
+      <p:pic>
+        <p:nvPicPr>
+          <p:cNvPr id="27" name="Image 6" descr="/Users/azamatsibgatullin/Documents/HAC/deliverables/presentation/assets/patient-plan.jpg">    </p:cNvPr>
+          <p:cNvPicPr>
+            <a:picLocks noChangeAspect="1"/>
+          </p:cNvPicPr>
+          <p:nvPr/>
+        </p:nvPicPr>
+        <p:blipFill>
+          <a:blip r:embed="rId7"/>
+          <a:stretch>
+            <a:fillRect/>
+          </a:stretch>
+        </p:blipFill>
+        <p:spPr>
+          <a:xfrm>
+            <a:off x="9857232" y="1627632"/>
+            <a:ext cx="1700784" cy="3680671"/>
+          </a:xfrm>
+          <a:prstGeom prst="rect">
+            <a:avLst/>
+          </a:prstGeom>
+        </p:spPr>
+      </p:pic>
+      <p:sp>
+        <p:nvSpPr>
+          <p:cNvPr id="28" name="Text 19"/>
+          <p:cNvSpPr txBox="1"/>
+          <p:nvPr/>
+        </p:nvSpPr>
+        <p:spPr>
+          <a:xfrm>
+            <a:off x="9784080" y="5472895"/>
+            <a:ext cx="1847088" cy="274320"/>
+          </a:xfrm>
+          <a:prstGeom prst="rect">
+            <a:avLst/>
+          </a:prstGeom>
+          <a:noFill/>
+          <a:ln/>
+        </p:spPr>
+        <p:txBody>
+          <a:bodyPr wrap="square" lIns="0" tIns="0" rIns="0" bIns="0" rtlCol="0" anchor="t"/>
+          <a:lstStyle/>
+          <a:p>
+            <a:pPr algn="ctr" indent="0" marL="0">
+              <a:buNone/>
+            </a:pPr>
+            <a:r>
+              <a:rPr lang="en-US" sz="1200" b="1" dirty="0">
+                <a:solidFill>
+                  <a:srgbClr val="123A40"/>
+                </a:solidFill>
+                <a:latin typeface="Cambria" pitchFamily="34" charset="0"/>
+                <a:ea typeface="Cambria" pitchFamily="34" charset="-122"/>
+                <a:cs typeface="Cambria" pitchFamily="34" charset="-120"/>
+              </a:rPr>
+              <a:t>План</a:t>
+            </a:r>
+            <a:endParaRPr lang="en-US" sz="1200" dirty="0"/>
           </a:p>
         </p:txBody>
       </p:sp>
@@ -20992,7 +21188,7 @@
         <p:spPr>
           <a:xfrm>
             <a:off x="548640" y="384048"/>
-            <a:ext cx="1430122" cy="256032"/>
+            <a:ext cx="1896466" cy="256032"/>
           </a:xfrm>
           <a:prstGeom prst="roundRect">
             <a:avLst>
@@ -21019,7 +21215,7 @@
         <p:spPr>
           <a:xfrm>
             <a:off x="548640" y="384048"/>
-            <a:ext cx="1430122" cy="256032"/>
+            <a:ext cx="1896466" cy="256032"/>
           </a:xfrm>
           <a:prstGeom prst="rect">
             <a:avLst/>
@@ -21043,7 +21239,7 @@
                 <a:ea typeface="Calibri" pitchFamily="34" charset="-122"/>
                 <a:cs typeface="Calibri" pitchFamily="34" charset="-120"/>
               </a:rPr>
-              <a:t>БЕЗОПАСНОСТЬ</a:t>
+              <a:t>ПРОТОТИП · АНКЕТЫ</a:t>
             </a:r>
             <a:endParaRPr lang="en-US" sz="900" dirty="0"/>
           </a:p>
@@ -21084,7 +21280,7 @@
                 <a:ea typeface="Cambria" pitchFamily="34" charset="-122"/>
                 <a:cs typeface="Cambria" pitchFamily="34" charset="-120"/>
               </a:rPr>
-              <a:t>Врач в центре каждого клинического решения</a:t>
+              <a:t>Динамика анкет видна сразу, ответы под рукой</a:t>
             </a:r>
             <a:endParaRPr lang="en-US" sz="2800" dirty="0"/>
           </a:p>
@@ -21098,53 +21294,33 @@
         </p:nvSpPr>
         <p:spPr>
           <a:xfrm>
-            <a:off x="548640" y="1627632"/>
-            <a:ext cx="3593592" cy="1901952"/>
-          </a:xfrm>
-          <a:prstGeom prst="roundRect">
-            <a:avLst>
-              <a:gd name="adj" fmla="val 3846"/>
-            </a:avLst>
+            <a:off x="548640" y="1554480"/>
+            <a:ext cx="11091672" cy="3488331"/>
+          </a:xfrm>
+          <a:prstGeom prst="rect">
+            <a:avLst/>
           </a:prstGeom>
           <a:solidFill>
-            <a:srgbClr val="FBEBD9"/>
+            <a:srgbClr val="FFFFFF"/>
           </a:solidFill>
-          <a:ln w="12700">
+          <a:ln w="9525">
             <a:solidFill>
-              <a:srgbClr val="FBEBD9"/>
+              <a:srgbClr val="D3DEDB"/>
             </a:solidFill>
             <a:prstDash val="solid"/>
           </a:ln>
-        </p:spPr>
-      </p:sp>
-      <p:sp>
-        <p:nvSpPr>
-          <p:cNvPr id="6" name="Shape 4"/>
-          <p:cNvSpPr/>
-          <p:nvPr/>
-        </p:nvSpPr>
-        <p:spPr>
-          <a:xfrm>
-            <a:off x="804672" y="1883664"/>
-            <a:ext cx="512064" cy="512064"/>
-          </a:xfrm>
-          <a:prstGeom prst="ellipse">
-            <a:avLst/>
-          </a:prstGeom>
-          <a:solidFill>
-            <a:srgbClr val="D9822B"/>
-          </a:solidFill>
-          <a:ln w="12700">
-            <a:solidFill>
-              <a:srgbClr val="D9822B"/>
-            </a:solidFill>
-            <a:prstDash val="solid"/>
-          </a:ln>
+          <a:effectLst>
+            <a:outerShdw sx="100000" sy="100000" kx="0" ky="0" algn="bl" rotWithShape="0" blurRad="127000" dist="38100" dir="5400000">
+              <a:srgbClr val="0B2226">
+                <a:alpha val="16000"/>
+              </a:srgbClr>
+            </a:outerShdw>
+          </a:effectLst>
         </p:spPr>
       </p:sp>
       <p:pic>
         <p:nvPicPr>
-          <p:cNvPr id="7" name="Image 0" descr="preencoded.png">    </p:cNvPr>
+          <p:cNvPr id="6" name="Image 0" descr="/Users/azamatsibgatullin/Documents/HAC/deliverables/presentation/assets/doctor-charts.jpg">    </p:cNvPr>
           <p:cNvPicPr>
             <a:picLocks noChangeAspect="1"/>
           </p:cNvPicPr>
@@ -21158,8 +21334,8 @@
         </p:blipFill>
         <p:spPr>
           <a:xfrm>
-            <a:off x="942929" y="2021921"/>
-            <a:ext cx="235549" cy="235549"/>
+            <a:off x="576072" y="1581912"/>
+            <a:ext cx="11036808" cy="3433467"/>
           </a:xfrm>
           <a:prstGeom prst="rect">
             <a:avLst/>
@@ -21168,137 +21344,32 @@
       </p:pic>
       <p:sp>
         <p:nvSpPr>
-          <p:cNvPr id="8" name="Text 5"/>
-          <p:cNvSpPr txBox="1"/>
-          <p:nvPr/>
-        </p:nvSpPr>
-        <p:spPr>
-          <a:xfrm>
-            <a:off x="1463040" y="1883664"/>
-            <a:ext cx="2560320" cy="512064"/>
-          </a:xfrm>
-          <a:prstGeom prst="rect">
-            <a:avLst/>
-          </a:prstGeom>
-          <a:noFill/>
-          <a:ln/>
-        </p:spPr>
-        <p:txBody>
-          <a:bodyPr wrap="square" lIns="0" tIns="0" rIns="0" bIns="0" rtlCol="0" anchor="ctr"/>
-          <a:lstStyle/>
-          <a:p>
-            <a:pPr indent="0" marL="0">
-              <a:buNone/>
-            </a:pPr>
-            <a:r>
-              <a:rPr lang="en-US" sz="1400" b="1" dirty="0">
-                <a:solidFill>
-                  <a:srgbClr val="123A40"/>
-                </a:solidFill>
-                <a:latin typeface="Cambria" pitchFamily="34" charset="0"/>
-                <a:ea typeface="Cambria" pitchFamily="34" charset="-122"/>
-                <a:cs typeface="Cambria" pitchFamily="34" charset="-120"/>
-              </a:rPr>
-              <a:t>Подтверждение врача</a:t>
-            </a:r>
-            <a:endParaRPr lang="en-US" sz="1400" dirty="0"/>
-          </a:p>
-        </p:txBody>
-      </p:sp>
-      <p:sp>
-        <p:nvSpPr>
-          <p:cNvPr id="9" name="Text 6"/>
-          <p:cNvSpPr txBox="1"/>
-          <p:nvPr/>
-        </p:nvSpPr>
-        <p:spPr>
-          <a:xfrm>
-            <a:off x="804672" y="2542032"/>
-            <a:ext cx="3154680" cy="914400"/>
-          </a:xfrm>
-          <a:prstGeom prst="rect">
-            <a:avLst/>
-          </a:prstGeom>
-          <a:noFill/>
-          <a:ln/>
-        </p:spPr>
-        <p:txBody>
-          <a:bodyPr wrap="square" lIns="0" tIns="0" rIns="0" bIns="0" rtlCol="0" anchor="t"/>
-          <a:lstStyle/>
-          <a:p>
-            <a:pPr indent="0" marL="0">
-              <a:buNone/>
-            </a:pPr>
-            <a:r>
-              <a:rPr lang="en-US" sz="1200" dirty="0">
-                <a:solidFill>
-                  <a:srgbClr val="16252B"/>
-                </a:solidFill>
-                <a:latin typeface="Calibri" pitchFamily="34" charset="0"/>
-                <a:ea typeface="Calibri" pitchFamily="34" charset="-122"/>
-                <a:cs typeface="Calibri" pitchFamily="34" charset="-120"/>
-              </a:rPr>
-              <a:t>Назначение, изменение и отмена терапии, направление и новый план вступают в силу только после подтверждения на сервере</a:t>
-            </a:r>
-            <a:endParaRPr lang="en-US" sz="1200" dirty="0"/>
-          </a:p>
-        </p:txBody>
-      </p:sp>
-      <p:sp>
-        <p:nvSpPr>
-          <p:cNvPr id="10" name="Shape 7"/>
+          <p:cNvPr id="7" name="Shape 4"/>
           <p:cNvSpPr/>
           <p:nvPr/>
         </p:nvSpPr>
         <p:spPr>
           <a:xfrm>
-            <a:off x="4297680" y="1627632"/>
-            <a:ext cx="3593592" cy="1901952"/>
-          </a:xfrm>
-          <a:prstGeom prst="roundRect">
-            <a:avLst>
-              <a:gd name="adj" fmla="val 3846"/>
-            </a:avLst>
+            <a:off x="548640" y="5303520"/>
+            <a:ext cx="457200" cy="457200"/>
+          </a:xfrm>
+          <a:prstGeom prst="ellipse">
+            <a:avLst/>
           </a:prstGeom>
           <a:solidFill>
-            <a:srgbClr val="F1F5F4"/>
+            <a:srgbClr val="DCEBE8"/>
           </a:solidFill>
           <a:ln w="12700">
             <a:solidFill>
-              <a:srgbClr val="F1F5F4"/>
+              <a:srgbClr val="DCEBE8"/>
             </a:solidFill>
             <a:prstDash val="solid"/>
           </a:ln>
         </p:spPr>
       </p:sp>
-      <p:sp>
-        <p:nvSpPr>
-          <p:cNvPr id="11" name="Shape 8"/>
-          <p:cNvSpPr/>
-          <p:nvPr/>
-        </p:nvSpPr>
-        <p:spPr>
-          <a:xfrm>
-            <a:off x="4553712" y="1883664"/>
-            <a:ext cx="512064" cy="512064"/>
-          </a:xfrm>
-          <a:prstGeom prst="ellipse">
-            <a:avLst/>
-          </a:prstGeom>
-          <a:solidFill>
-            <a:srgbClr val="123A40"/>
-          </a:solidFill>
-          <a:ln w="12700">
-            <a:solidFill>
-              <a:srgbClr val="123A40"/>
-            </a:solidFill>
-            <a:prstDash val="solid"/>
-          </a:ln>
-        </p:spPr>
-      </p:sp>
       <p:pic>
         <p:nvPicPr>
-          <p:cNvPr id="12" name="Image 1" descr="preencoded.png">    </p:cNvPr>
+          <p:cNvPr id="8" name="Image 1" descr="preencoded.png">    </p:cNvPr>
           <p:cNvPicPr>
             <a:picLocks noChangeAspect="1"/>
           </p:cNvPicPr>
@@ -21312,8 +21383,8 @@
         </p:blipFill>
         <p:spPr>
           <a:xfrm>
-            <a:off x="4691969" y="2021921"/>
-            <a:ext cx="235549" cy="235549"/>
+            <a:off x="672084" y="5426964"/>
+            <a:ext cx="210312" cy="210312"/>
           </a:xfrm>
           <a:prstGeom prst="rect">
             <a:avLst/>
@@ -21322,23 +21393,23 @@
       </p:pic>
       <p:sp>
         <p:nvSpPr>
-          <p:cNvPr id="13" name="Text 9"/>
-          <p:cNvSpPr txBox="1"/>
-          <p:nvPr/>
-        </p:nvSpPr>
-        <p:spPr>
-          <a:xfrm>
-            <a:off x="5212080" y="1883664"/>
-            <a:ext cx="2560320" cy="512064"/>
-          </a:xfrm>
-          <a:prstGeom prst="rect">
-            <a:avLst/>
-          </a:prstGeom>
-          <a:noFill/>
-          <a:ln/>
-        </p:spPr>
-        <p:txBody>
-          <a:bodyPr wrap="square" lIns="0" tIns="0" rIns="0" bIns="0" rtlCol="0" anchor="ctr"/>
+          <p:cNvPr id="9" name="Text 5"/>
+          <p:cNvSpPr txBox="1"/>
+          <p:nvPr/>
+        </p:nvSpPr>
+        <p:spPr>
+          <a:xfrm>
+            <a:off x="1143000" y="5303520"/>
+            <a:ext cx="3017520" cy="292608"/>
+          </a:xfrm>
+          <a:prstGeom prst="rect">
+            <a:avLst/>
+          </a:prstGeom>
+          <a:noFill/>
+          <a:ln/>
+        </p:spPr>
+        <p:txBody>
+          <a:bodyPr wrap="square" lIns="0" tIns="0" rIns="0" bIns="0" rtlCol="0" anchor="t"/>
           <a:lstStyle/>
           <a:p>
             <a:pPr indent="0" marL="0">
@@ -21353,7 +21424,7 @@
                 <a:ea typeface="Cambria" pitchFamily="34" charset="-122"/>
                 <a:cs typeface="Cambria" pitchFamily="34" charset="-120"/>
               </a:rPr>
-              <a:t>Права и связи</a:t>
+              <a:t>Точные русские версии</a:t>
             </a:r>
             <a:endParaRPr lang="en-US" sz="1400" dirty="0"/>
           </a:p>
@@ -21361,14 +21432,14 @@
       </p:sp>
       <p:sp>
         <p:nvSpPr>
-          <p:cNvPr id="14" name="Text 10"/>
-          <p:cNvSpPr txBox="1"/>
-          <p:nvPr/>
-        </p:nvSpPr>
-        <p:spPr>
-          <a:xfrm>
-            <a:off x="4553712" y="2542032"/>
-            <a:ext cx="3154680" cy="914400"/>
+          <p:cNvPr id="10" name="Text 6"/>
+          <p:cNvSpPr txBox="1"/>
+          <p:nvPr/>
+        </p:nvSpPr>
+        <p:spPr>
+          <a:xfrm>
+            <a:off x="1143000" y="5596128"/>
+            <a:ext cx="3017520" cy="640080"/>
           </a:xfrm>
           <a:prstGeom prst="rect">
             <a:avLst/>
@@ -21384,7 +21455,7 @@
               <a:buNone/>
             </a:pPr>
             <a:r>
-              <a:rPr lang="en-US" sz="1200" dirty="0">
+              <a:rPr lang="en-US" sz="1100" dirty="0">
                 <a:solidFill>
                   <a:srgbClr val="16252B"/>
                 </a:solidFill>
@@ -21392,67 +21463,40 @@
                 <a:ea typeface="Calibri" pitchFamily="34" charset="-122"/>
                 <a:cs typeface="Calibri" pitchFamily="34" charset="-120"/>
               </a:rPr>
-              <a:t>Врач видит только своих пациентов. Сервер проверяет роль и связь при каждом запросе, даже прямом</a:t>
-            </a:r>
-            <a:endParaRPr lang="en-US" sz="1200" dirty="0"/>
-          </a:p>
-        </p:txBody>
-      </p:sp>
-      <p:sp>
-        <p:nvSpPr>
-          <p:cNvPr id="15" name="Shape 11"/>
+              <a:t>DASS-42 (Фаттахов, Горобец), PHQ-9 и GAD-7 (Золотарева, 2023). Текст, порядок и варианты ответов не меняются</a:t>
+            </a:r>
+            <a:endParaRPr lang="en-US" sz="1100" dirty="0"/>
+          </a:p>
+        </p:txBody>
+      </p:sp>
+      <p:sp>
+        <p:nvSpPr>
+          <p:cNvPr id="11" name="Shape 7"/>
           <p:cNvSpPr/>
           <p:nvPr/>
         </p:nvSpPr>
         <p:spPr>
           <a:xfrm>
-            <a:off x="8046720" y="1627632"/>
-            <a:ext cx="3593592" cy="1901952"/>
-          </a:xfrm>
-          <a:prstGeom prst="roundRect">
-            <a:avLst>
-              <a:gd name="adj" fmla="val 3846"/>
-            </a:avLst>
+            <a:off x="4297680" y="5303520"/>
+            <a:ext cx="457200" cy="457200"/>
+          </a:xfrm>
+          <a:prstGeom prst="ellipse">
+            <a:avLst/>
           </a:prstGeom>
           <a:solidFill>
-            <a:srgbClr val="F1F5F4"/>
+            <a:srgbClr val="DCEBE8"/>
           </a:solidFill>
           <a:ln w="12700">
             <a:solidFill>
-              <a:srgbClr val="F1F5F4"/>
+              <a:srgbClr val="DCEBE8"/>
             </a:solidFill>
             <a:prstDash val="solid"/>
           </a:ln>
         </p:spPr>
       </p:sp>
-      <p:sp>
-        <p:nvSpPr>
-          <p:cNvPr id="16" name="Shape 12"/>
-          <p:cNvSpPr/>
-          <p:nvPr/>
-        </p:nvSpPr>
-        <p:spPr>
-          <a:xfrm>
-            <a:off x="8302752" y="1883664"/>
-            <a:ext cx="512064" cy="512064"/>
-          </a:xfrm>
-          <a:prstGeom prst="ellipse">
-            <a:avLst/>
-          </a:prstGeom>
-          <a:solidFill>
-            <a:srgbClr val="123A40"/>
-          </a:solidFill>
-          <a:ln w="12700">
-            <a:solidFill>
-              <a:srgbClr val="123A40"/>
-            </a:solidFill>
-            <a:prstDash val="solid"/>
-          </a:ln>
-        </p:spPr>
-      </p:sp>
       <p:pic>
         <p:nvPicPr>
-          <p:cNvPr id="17" name="Image 2" descr="preencoded.png">    </p:cNvPr>
+          <p:cNvPr id="12" name="Image 2" descr="preencoded.png">    </p:cNvPr>
           <p:cNvPicPr>
             <a:picLocks noChangeAspect="1"/>
           </p:cNvPicPr>
@@ -21466,8 +21510,8 @@
         </p:blipFill>
         <p:spPr>
           <a:xfrm>
-            <a:off x="8441009" y="2021921"/>
-            <a:ext cx="235549" cy="235549"/>
+            <a:off x="4421124" y="5426964"/>
+            <a:ext cx="210312" cy="210312"/>
           </a:xfrm>
           <a:prstGeom prst="rect">
             <a:avLst/>
@@ -21476,23 +21520,23 @@
       </p:pic>
       <p:sp>
         <p:nvSpPr>
-          <p:cNvPr id="18" name="Text 13"/>
-          <p:cNvSpPr txBox="1"/>
-          <p:nvPr/>
-        </p:nvSpPr>
-        <p:spPr>
-          <a:xfrm>
-            <a:off x="8961120" y="1883664"/>
-            <a:ext cx="2560320" cy="512064"/>
-          </a:xfrm>
-          <a:prstGeom prst="rect">
-            <a:avLst/>
-          </a:prstGeom>
-          <a:noFill/>
-          <a:ln/>
-        </p:spPr>
-        <p:txBody>
-          <a:bodyPr wrap="square" lIns="0" tIns="0" rIns="0" bIns="0" rtlCol="0" anchor="ctr"/>
+          <p:cNvPr id="13" name="Text 8"/>
+          <p:cNvSpPr txBox="1"/>
+          <p:nvPr/>
+        </p:nvSpPr>
+        <p:spPr>
+          <a:xfrm>
+            <a:off x="4892040" y="5303520"/>
+            <a:ext cx="3017520" cy="292608"/>
+          </a:xfrm>
+          <a:prstGeom prst="rect">
+            <a:avLst/>
+          </a:prstGeom>
+          <a:noFill/>
+          <a:ln/>
+        </p:spPr>
+        <p:txBody>
+          <a:bodyPr wrap="square" lIns="0" tIns="0" rIns="0" bIns="0" rtlCol="0" anchor="t"/>
           <a:lstStyle/>
           <a:p>
             <a:pPr indent="0" marL="0">
@@ -21507,7 +21551,7 @@
                 <a:ea typeface="Cambria" pitchFamily="34" charset="-122"/>
                 <a:cs typeface="Cambria" pitchFamily="34" charset="-120"/>
               </a:rPr>
-              <a:t>Журнал происхождения</a:t>
+              <a:t>Пропуск не равен нулю</a:t>
             </a:r>
             <a:endParaRPr lang="en-US" sz="1400" dirty="0"/>
           </a:p>
@@ -21515,14 +21559,14 @@
       </p:sp>
       <p:sp>
         <p:nvSpPr>
-          <p:cNvPr id="19" name="Text 14"/>
-          <p:cNvSpPr txBox="1"/>
-          <p:nvPr/>
-        </p:nvSpPr>
-        <p:spPr>
-          <a:xfrm>
-            <a:off x="8302752" y="2542032"/>
-            <a:ext cx="3154680" cy="914400"/>
+          <p:cNvPr id="14" name="Text 9"/>
+          <p:cNvSpPr txBox="1"/>
+          <p:nvPr/>
+        </p:nvSpPr>
+        <p:spPr>
+          <a:xfrm>
+            <a:off x="4892040" y="5596128"/>
+            <a:ext cx="3017520" cy="640080"/>
           </a:xfrm>
           <a:prstGeom prst="rect">
             <a:avLst/>
@@ -21538,7 +21582,7 @@
               <a:buNone/>
             </a:pPr>
             <a:r>
-              <a:rPr lang="en-US" sz="1200" dirty="0">
+              <a:rPr lang="en-US" sz="1100" dirty="0">
                 <a:solidFill>
                   <a:srgbClr val="16252B"/>
                 </a:solidFill>
@@ -21546,67 +21590,40 @@
                 <a:ea typeface="Calibri" pitchFamily="34" charset="-122"/>
                 <a:cs typeface="Calibri" pitchFamily="34" charset="-120"/>
               </a:rPr>
-              <a:t>У каждой записи автор, время и исходный текст. Исправление дополняет историю и ничего не стирает</a:t>
-            </a:r>
-            <a:endParaRPr lang="en-US" sz="1200" dirty="0"/>
-          </a:p>
-        </p:txBody>
-      </p:sp>
-      <p:sp>
-        <p:nvSpPr>
-          <p:cNvPr id="20" name="Shape 15"/>
+              <a:t>Неполная анкета не даёт ложную точку на графике. Каждая версия шкалы в своей серии</a:t>
+            </a:r>
+            <a:endParaRPr lang="en-US" sz="1100" dirty="0"/>
+          </a:p>
+        </p:txBody>
+      </p:sp>
+      <p:sp>
+        <p:nvSpPr>
+          <p:cNvPr id="15" name="Shape 10"/>
           <p:cNvSpPr/>
           <p:nvPr/>
         </p:nvSpPr>
         <p:spPr>
           <a:xfrm>
-            <a:off x="548640" y="3730752"/>
-            <a:ext cx="3593592" cy="1901952"/>
-          </a:xfrm>
-          <a:prstGeom prst="roundRect">
-            <a:avLst>
-              <a:gd name="adj" fmla="val 3846"/>
-            </a:avLst>
+            <a:off x="8046720" y="5303520"/>
+            <a:ext cx="457200" cy="457200"/>
+          </a:xfrm>
+          <a:prstGeom prst="ellipse">
+            <a:avLst/>
           </a:prstGeom>
           <a:solidFill>
-            <a:srgbClr val="F1F5F4"/>
+            <a:srgbClr val="DCEBE8"/>
           </a:solidFill>
           <a:ln w="12700">
             <a:solidFill>
-              <a:srgbClr val="F1F5F4"/>
+              <a:srgbClr val="DCEBE8"/>
             </a:solidFill>
             <a:prstDash val="solid"/>
           </a:ln>
         </p:spPr>
       </p:sp>
-      <p:sp>
-        <p:nvSpPr>
-          <p:cNvPr id="21" name="Shape 16"/>
-          <p:cNvSpPr/>
-          <p:nvPr/>
-        </p:nvSpPr>
-        <p:spPr>
-          <a:xfrm>
-            <a:off x="804672" y="3986784"/>
-            <a:ext cx="512064" cy="512064"/>
-          </a:xfrm>
-          <a:prstGeom prst="ellipse">
-            <a:avLst/>
-          </a:prstGeom>
-          <a:solidFill>
-            <a:srgbClr val="123A40"/>
-          </a:solidFill>
-          <a:ln w="12700">
-            <a:solidFill>
-              <a:srgbClr val="123A40"/>
-            </a:solidFill>
-            <a:prstDash val="solid"/>
-          </a:ln>
-        </p:spPr>
-      </p:sp>
       <p:pic>
         <p:nvPicPr>
-          <p:cNvPr id="22" name="Image 3" descr="preencoded.png">    </p:cNvPr>
+          <p:cNvPr id="16" name="Image 3" descr="preencoded.png">    </p:cNvPr>
           <p:cNvPicPr>
             <a:picLocks noChangeAspect="1"/>
           </p:cNvPicPr>
@@ -21620,8 +21637,8 @@
         </p:blipFill>
         <p:spPr>
           <a:xfrm>
-            <a:off x="942929" y="4125041"/>
-            <a:ext cx="235549" cy="235549"/>
+            <a:off x="8170164" y="5426964"/>
+            <a:ext cx="210312" cy="210312"/>
           </a:xfrm>
           <a:prstGeom prst="rect">
             <a:avLst/>
@@ -21630,23 +21647,23 @@
       </p:pic>
       <p:sp>
         <p:nvSpPr>
-          <p:cNvPr id="23" name="Text 17"/>
-          <p:cNvSpPr txBox="1"/>
-          <p:nvPr/>
-        </p:nvSpPr>
-        <p:spPr>
-          <a:xfrm>
-            <a:off x="1463040" y="3986784"/>
-            <a:ext cx="2560320" cy="512064"/>
-          </a:xfrm>
-          <a:prstGeom prst="rect">
-            <a:avLst/>
-          </a:prstGeom>
-          <a:noFill/>
-          <a:ln/>
-        </p:spPr>
-        <p:txBody>
-          <a:bodyPr wrap="square" lIns="0" tIns="0" rIns="0" bIns="0" rtlCol="0" anchor="ctr"/>
+          <p:cNvPr id="17" name="Text 11"/>
+          <p:cNvSpPr txBox="1"/>
+          <p:nvPr/>
+        </p:nvSpPr>
+        <p:spPr>
+          <a:xfrm>
+            <a:off x="8641080" y="5303520"/>
+            <a:ext cx="3017520" cy="292608"/>
+          </a:xfrm>
+          <a:prstGeom prst="rect">
+            <a:avLst/>
+          </a:prstGeom>
+          <a:noFill/>
+          <a:ln/>
+        </p:spPr>
+        <p:txBody>
+          <a:bodyPr wrap="square" lIns="0" tIns="0" rIns="0" bIns="0" rtlCol="0" anchor="t"/>
           <a:lstStyle/>
           <a:p>
             <a:pPr indent="0" marL="0">
@@ -21661,7 +21678,7 @@
                 <a:ea typeface="Cambria" pitchFamily="34" charset="-122"/>
                 <a:cs typeface="Cambria" pitchFamily="34" charset="-120"/>
               </a:rPr>
-              <a:t>Защита входа</a:t>
+              <a:t>Баллы не диагноз</a:t>
             </a:r>
             <a:endParaRPr lang="en-US" sz="1400" dirty="0"/>
           </a:p>
@@ -21669,14 +21686,14 @@
       </p:sp>
       <p:sp>
         <p:nvSpPr>
-          <p:cNvPr id="24" name="Text 18"/>
-          <p:cNvSpPr txBox="1"/>
-          <p:nvPr/>
-        </p:nvSpPr>
-        <p:spPr>
-          <a:xfrm>
-            <a:off x="804672" y="4645152"/>
-            <a:ext cx="3154680" cy="914400"/>
+          <p:cNvPr id="18" name="Text 12"/>
+          <p:cNvSpPr txBox="1"/>
+          <p:nvPr/>
+        </p:nvSpPr>
+        <p:spPr>
+          <a:xfrm>
+            <a:off x="8641080" y="5596128"/>
+            <a:ext cx="3017520" cy="640080"/>
           </a:xfrm>
           <a:prstGeom prst="rect">
             <a:avLst/>
@@ -21692,7 +21709,7 @@
               <a:buNone/>
             </a:pPr>
             <a:r>
-              <a:rPr lang="en-US" sz="1200" dirty="0">
+              <a:rPr lang="en-US" sz="1100" dirty="0">
                 <a:solidFill>
                   <a:srgbClr val="16252B"/>
                 </a:solidFill>
@@ -21700,356 +21717,9 @@
                 <a:ea typeface="Calibri" pitchFamily="34" charset="-122"/>
                 <a:cs typeface="Calibri" pitchFamily="34" charset="-120"/>
               </a:rPr>
-              <a:t>Токены против подделки запросов, истечение сессий, одноразовые приглашения и отзыв доступа</a:t>
-            </a:r>
-            <a:endParaRPr lang="en-US" sz="1200" dirty="0"/>
-          </a:p>
-        </p:txBody>
-      </p:sp>
-      <p:sp>
-        <p:nvSpPr>
-          <p:cNvPr id="25" name="Shape 19"/>
-          <p:cNvSpPr/>
-          <p:nvPr/>
-        </p:nvSpPr>
-        <p:spPr>
-          <a:xfrm>
-            <a:off x="4297680" y="3730752"/>
-            <a:ext cx="3593592" cy="1901952"/>
-          </a:xfrm>
-          <a:prstGeom prst="roundRect">
-            <a:avLst>
-              <a:gd name="adj" fmla="val 3846"/>
-            </a:avLst>
-          </a:prstGeom>
-          <a:solidFill>
-            <a:srgbClr val="F1F5F4"/>
-          </a:solidFill>
-          <a:ln w="12700">
-            <a:solidFill>
-              <a:srgbClr val="F1F5F4"/>
-            </a:solidFill>
-            <a:prstDash val="solid"/>
-          </a:ln>
-        </p:spPr>
-      </p:sp>
-      <p:sp>
-        <p:nvSpPr>
-          <p:cNvPr id="26" name="Shape 20"/>
-          <p:cNvSpPr/>
-          <p:nvPr/>
-        </p:nvSpPr>
-        <p:spPr>
-          <a:xfrm>
-            <a:off x="4553712" y="3986784"/>
-            <a:ext cx="512064" cy="512064"/>
-          </a:xfrm>
-          <a:prstGeom prst="ellipse">
-            <a:avLst/>
-          </a:prstGeom>
-          <a:solidFill>
-            <a:srgbClr val="123A40"/>
-          </a:solidFill>
-          <a:ln w="12700">
-            <a:solidFill>
-              <a:srgbClr val="123A40"/>
-            </a:solidFill>
-            <a:prstDash val="solid"/>
-          </a:ln>
-        </p:spPr>
-      </p:sp>
-      <p:pic>
-        <p:nvPicPr>
-          <p:cNvPr id="27" name="Image 4" descr="preencoded.png">    </p:cNvPr>
-          <p:cNvPicPr>
-            <a:picLocks noChangeAspect="1"/>
-          </p:cNvPicPr>
-          <p:nvPr/>
-        </p:nvPicPr>
-        <p:blipFill>
-          <a:blip r:embed="rId5"/>
-          <a:stretch>
-            <a:fillRect/>
-          </a:stretch>
-        </p:blipFill>
-        <p:spPr>
-          <a:xfrm>
-            <a:off x="4691969" y="4125041"/>
-            <a:ext cx="235549" cy="235549"/>
-          </a:xfrm>
-          <a:prstGeom prst="rect">
-            <a:avLst/>
-          </a:prstGeom>
-        </p:spPr>
-      </p:pic>
-      <p:sp>
-        <p:nvSpPr>
-          <p:cNvPr id="28" name="Text 21"/>
-          <p:cNvSpPr txBox="1"/>
-          <p:nvPr/>
-        </p:nvSpPr>
-        <p:spPr>
-          <a:xfrm>
-            <a:off x="5212080" y="3986784"/>
-            <a:ext cx="2560320" cy="512064"/>
-          </a:xfrm>
-          <a:prstGeom prst="rect">
-            <a:avLst/>
-          </a:prstGeom>
-          <a:noFill/>
-          <a:ln/>
-        </p:spPr>
-        <p:txBody>
-          <a:bodyPr wrap="square" lIns="0" tIns="0" rIns="0" bIns="0" rtlCol="0" anchor="ctr"/>
-          <a:lstStyle/>
-          <a:p>
-            <a:pPr indent="0" marL="0">
-              <a:buNone/>
-            </a:pPr>
-            <a:r>
-              <a:rPr lang="en-US" sz="1400" b="1" dirty="0">
-                <a:solidFill>
-                  <a:srgbClr val="123A40"/>
-                </a:solidFill>
-                <a:latin typeface="Cambria" pitchFamily="34" charset="0"/>
-                <a:ea typeface="Cambria" pitchFamily="34" charset="-122"/>
-                <a:cs typeface="Cambria" pitchFamily="34" charset="-120"/>
-              </a:rPr>
-              <a:t>Без внешних сервисов</a:t>
-            </a:r>
-            <a:endParaRPr lang="en-US" sz="1400" dirty="0"/>
-          </a:p>
-        </p:txBody>
-      </p:sp>
-      <p:sp>
-        <p:nvSpPr>
-          <p:cNvPr id="29" name="Text 22"/>
-          <p:cNvSpPr txBox="1"/>
-          <p:nvPr/>
-        </p:nvSpPr>
-        <p:spPr>
-          <a:xfrm>
-            <a:off x="4553712" y="4645152"/>
-            <a:ext cx="3154680" cy="914400"/>
-          </a:xfrm>
-          <a:prstGeom prst="rect">
-            <a:avLst/>
-          </a:prstGeom>
-          <a:noFill/>
-          <a:ln/>
-        </p:spPr>
-        <p:txBody>
-          <a:bodyPr wrap="square" lIns="0" tIns="0" rIns="0" bIns="0" rtlCol="0" anchor="t"/>
-          <a:lstStyle/>
-          <a:p>
-            <a:pPr indent="0" marL="0">
-              <a:buNone/>
-            </a:pPr>
-            <a:r>
-              <a:rPr lang="en-US" sz="1200" dirty="0">
-                <a:solidFill>
-                  <a:srgbClr val="16252B"/>
-                </a:solidFill>
-                <a:latin typeface="Calibri" pitchFamily="34" charset="0"/>
-                <a:ea typeface="Calibri" pitchFamily="34" charset="-122"/>
-                <a:cs typeface="Calibri" pitchFamily="34" charset="-120"/>
-              </a:rPr>
-              <a:t>Шрифты и скрипты свои, строгая политика безопасности страниц. Данные не уходят третьим лицам</a:t>
-            </a:r>
-            <a:endParaRPr lang="en-US" sz="1200" dirty="0"/>
-          </a:p>
-        </p:txBody>
-      </p:sp>
-      <p:sp>
-        <p:nvSpPr>
-          <p:cNvPr id="30" name="Shape 23"/>
-          <p:cNvSpPr/>
-          <p:nvPr/>
-        </p:nvSpPr>
-        <p:spPr>
-          <a:xfrm>
-            <a:off x="8046720" y="3730752"/>
-            <a:ext cx="3593592" cy="1901952"/>
-          </a:xfrm>
-          <a:prstGeom prst="roundRect">
-            <a:avLst>
-              <a:gd name="adj" fmla="val 3846"/>
-            </a:avLst>
-          </a:prstGeom>
-          <a:solidFill>
-            <a:srgbClr val="F1F5F4"/>
-          </a:solidFill>
-          <a:ln w="12700">
-            <a:solidFill>
-              <a:srgbClr val="F1F5F4"/>
-            </a:solidFill>
-            <a:prstDash val="solid"/>
-          </a:ln>
-        </p:spPr>
-      </p:sp>
-      <p:sp>
-        <p:nvSpPr>
-          <p:cNvPr id="31" name="Shape 24"/>
-          <p:cNvSpPr/>
-          <p:nvPr/>
-        </p:nvSpPr>
-        <p:spPr>
-          <a:xfrm>
-            <a:off x="8302752" y="3986784"/>
-            <a:ext cx="512064" cy="512064"/>
-          </a:xfrm>
-          <a:prstGeom prst="ellipse">
-            <a:avLst/>
-          </a:prstGeom>
-          <a:solidFill>
-            <a:srgbClr val="123A40"/>
-          </a:solidFill>
-          <a:ln w="12700">
-            <a:solidFill>
-              <a:srgbClr val="123A40"/>
-            </a:solidFill>
-            <a:prstDash val="solid"/>
-          </a:ln>
-        </p:spPr>
-      </p:sp>
-      <p:pic>
-        <p:nvPicPr>
-          <p:cNvPr id="32" name="Image 5" descr="preencoded.png">    </p:cNvPr>
-          <p:cNvPicPr>
-            <a:picLocks noChangeAspect="1"/>
-          </p:cNvPicPr>
-          <p:nvPr/>
-        </p:nvPicPr>
-        <p:blipFill>
-          <a:blip r:embed="rId6"/>
-          <a:stretch>
-            <a:fillRect/>
-          </a:stretch>
-        </p:blipFill>
-        <p:spPr>
-          <a:xfrm>
-            <a:off x="8441009" y="4125041"/>
-            <a:ext cx="235549" cy="235549"/>
-          </a:xfrm>
-          <a:prstGeom prst="rect">
-            <a:avLst/>
-          </a:prstGeom>
-        </p:spPr>
-      </p:pic>
-      <p:sp>
-        <p:nvSpPr>
-          <p:cNvPr id="33" name="Text 25"/>
-          <p:cNvSpPr txBox="1"/>
-          <p:nvPr/>
-        </p:nvSpPr>
-        <p:spPr>
-          <a:xfrm>
-            <a:off x="8961120" y="3986784"/>
-            <a:ext cx="2560320" cy="512064"/>
-          </a:xfrm>
-          <a:prstGeom prst="rect">
-            <a:avLst/>
-          </a:prstGeom>
-          <a:noFill/>
-          <a:ln/>
-        </p:spPr>
-        <p:txBody>
-          <a:bodyPr wrap="square" lIns="0" tIns="0" rIns="0" bIns="0" rtlCol="0" anchor="ctr"/>
-          <a:lstStyle/>
-          <a:p>
-            <a:pPr indent="0" marL="0">
-              <a:buNone/>
-            </a:pPr>
-            <a:r>
-              <a:rPr lang="en-US" sz="1400" b="1" dirty="0">
-                <a:solidFill>
-                  <a:srgbClr val="123A40"/>
-                </a:solidFill>
-                <a:latin typeface="Cambria" pitchFamily="34" charset="0"/>
-                <a:ea typeface="Cambria" pitchFamily="34" charset="-122"/>
-                <a:cs typeface="Cambria" pitchFamily="34" charset="-120"/>
-              </a:rPr>
-              <a:t>Только вымышленные данные</a:t>
-            </a:r>
-            <a:endParaRPr lang="en-US" sz="1400" dirty="0"/>
-          </a:p>
-        </p:txBody>
-      </p:sp>
-      <p:sp>
-        <p:nvSpPr>
-          <p:cNvPr id="34" name="Text 26"/>
-          <p:cNvSpPr txBox="1"/>
-          <p:nvPr/>
-        </p:nvSpPr>
-        <p:spPr>
-          <a:xfrm>
-            <a:off x="8302752" y="4645152"/>
-            <a:ext cx="3154680" cy="914400"/>
-          </a:xfrm>
-          <a:prstGeom prst="rect">
-            <a:avLst/>
-          </a:prstGeom>
-          <a:noFill/>
-          <a:ln/>
-        </p:spPr>
-        <p:txBody>
-          <a:bodyPr wrap="square" lIns="0" tIns="0" rIns="0" bIns="0" rtlCol="0" anchor="t"/>
-          <a:lstStyle/>
-          <a:p>
-            <a:pPr indent="0" marL="0">
-              <a:buNone/>
-            </a:pPr>
-            <a:r>
-              <a:rPr lang="en-US" sz="1200" dirty="0">
-                <a:solidFill>
-                  <a:srgbClr val="16252B"/>
-                </a:solidFill>
-                <a:latin typeface="Calibri" pitchFamily="34" charset="0"/>
-                <a:ea typeface="Calibri" pitchFamily="34" charset="-122"/>
-                <a:cs typeface="Calibri" pitchFamily="34" charset="-120"/>
-              </a:rPr>
-              <a:t>В демонстрации 8 придуманных пациентов и 3 врача. Реальные данные людей не вводятся</a:t>
-            </a:r>
-            <a:endParaRPr lang="en-US" sz="1200" dirty="0"/>
-          </a:p>
-        </p:txBody>
-      </p:sp>
-      <p:sp>
-        <p:nvSpPr>
-          <p:cNvPr id="35" name="Text 27"/>
-          <p:cNvSpPr txBox="1"/>
-          <p:nvPr/>
-        </p:nvSpPr>
-        <p:spPr>
-          <a:xfrm>
-            <a:off x="548640" y="6053328"/>
-            <a:ext cx="11094415" cy="274320"/>
-          </a:xfrm>
-          <a:prstGeom prst="rect">
-            <a:avLst/>
-          </a:prstGeom>
-          <a:noFill/>
-          <a:ln/>
-        </p:spPr>
-        <p:txBody>
-          <a:bodyPr wrap="square" lIns="0" tIns="0" rIns="0" bIns="0" rtlCol="0" anchor="t"/>
-          <a:lstStyle/>
-          <a:p>
-            <a:pPr indent="0" marL="0">
-              <a:buNone/>
-            </a:pPr>
-            <a:r>
-              <a:rPr lang="en-US" sz="1000" dirty="0">
-                <a:solidFill>
-                  <a:srgbClr val="5A6B71"/>
-                </a:solidFill>
-                <a:latin typeface="Calibri" pitchFamily="34" charset="0"/>
-                <a:ea typeface="Calibri" pitchFamily="34" charset="-122"/>
-                <a:cs typeface="Calibri" pitchFamily="34" charset="-120"/>
-              </a:rPr>
-              <a:t>Технологии прототипа: Python и Flask, SQLite, HTML, CSS и JavaScript без сторонних библиотек в браузере.</a:t>
-            </a:r>
-            <a:endParaRPr lang="en-US" sz="1000" dirty="0"/>
+              <a:t>Суммы видит только врач, а повтор анкеты врач предлагает в один щелчок</a:t>
+            </a:r>
+            <a:endParaRPr lang="en-US" sz="1100" dirty="0"/>
           </a:p>
         </p:txBody>
       </p:sp>
